--- a/output/wordlabs-phon-3day.pptx
+++ b/output/wordlabs-phon-3day.pptx
@@ -6071,7 +6071,7 @@
                 <a:ea typeface="Calibri" pitchFamily="34" charset="-122"/>
                 <a:cs typeface="Calibri" pitchFamily="34" charset="-120"/>
               </a:rPr>
-              <a:t>, or would you prefer to use the </a:t>
+              <a:t>, or do you prefer the </a:t>
             </a:r>
             <a:pPr algn="l" indent="0" marL="0">
               <a:buNone/>
@@ -6088,7 +6088,7 @@
                 <a:ea typeface="Calibri" pitchFamily="34" charset="-122"/>
                 <a:cs typeface="Calibri" pitchFamily="34" charset="-120"/>
               </a:rPr>
-              <a:t>microphone</a:t>
+              <a:t>saxophone</a:t>
             </a:r>
             <a:pPr algn="l" indent="0" marL="0">
               <a:buNone/>
@@ -6102,7 +6102,7 @@
                 <a:ea typeface="Calibri" pitchFamily="34" charset="-122"/>
                 <a:cs typeface="Calibri" pitchFamily="34" charset="-120"/>
               </a:rPr>
-              <a:t> to sing?</a:t>
+              <a:t>?</a:t>
             </a:r>
             <a:endParaRPr lang="en-US" sz="1800" dirty="0"/>
           </a:p>
@@ -6385,7 +6385,7 @@
                 <a:ea typeface="Trebuchet MS" pitchFamily="34" charset="-122"/>
                 <a:cs typeface="Trebuchet MS" pitchFamily="34" charset="-120"/>
               </a:rPr>
-              <a:t>microphone</a:t>
+              <a:t>saxophone</a:t>
             </a:r>
             <a:endParaRPr lang="en-US" sz="1400" dirty="0"/>
           </a:p>
@@ -8084,7 +8084,7 @@
                 <a:ea typeface="Calibri" pitchFamily="34" charset="-122"/>
                 <a:cs typeface="Calibri" pitchFamily="34" charset="-120"/>
               </a:rPr>
-              <a:t>noun-forming ending</a:t>
+              <a:t>noun marker</a:t>
             </a:r>
             <a:endParaRPr lang="en-US" sz="850" dirty="0"/>
           </a:p>
@@ -9181,7 +9181,7 @@
                 <a:ea typeface="Calibri" pitchFamily="34" charset="-122"/>
                 <a:cs typeface="Calibri" pitchFamily="34" charset="-120"/>
               </a:rPr>
-              <a:t>noun-forming ending</a:t>
+              <a:t>noun marker</a:t>
             </a:r>
             <a:endParaRPr lang="en-US" sz="850" dirty="0"/>
           </a:p>
@@ -10515,7 +10515,7 @@
                 <a:ea typeface="Calibri" pitchFamily="34" charset="-122"/>
                 <a:cs typeface="Calibri" pitchFamily="34" charset="-120"/>
               </a:rPr>
-              <a:t>noun-forming ending</a:t>
+              <a:t>noun marker</a:t>
             </a:r>
             <a:endParaRPr lang="en-US" sz="850" dirty="0"/>
           </a:p>
@@ -10991,7 +10991,7 @@
         </p:nvSpPr>
         <p:spPr>
           <a:xfrm>
-            <a:off x="2023872" y="4169664"/>
+            <a:off x="2124837" y="4169664"/>
             <a:ext cx="685800" cy="384048"/>
           </a:xfrm>
           <a:prstGeom prst="rect">
@@ -11018,7 +11018,7 @@
         </p:nvSpPr>
         <p:spPr>
           <a:xfrm>
-            <a:off x="2023872" y="4169664"/>
+            <a:off x="2124837" y="4169664"/>
             <a:ext cx="685800" cy="384048"/>
           </a:xfrm>
           <a:prstGeom prst="rect">
@@ -11057,7 +11057,7 @@
         </p:nvSpPr>
         <p:spPr>
           <a:xfrm>
-            <a:off x="2023872" y="4572000"/>
+            <a:off x="2124837" y="4572000"/>
             <a:ext cx="685800" cy="219456"/>
           </a:xfrm>
           <a:prstGeom prst="rect">
@@ -11096,7 +11096,7 @@
         </p:nvSpPr>
         <p:spPr>
           <a:xfrm>
-            <a:off x="2831592" y="4169664"/>
+            <a:off x="3033522" y="4169664"/>
             <a:ext cx="685800" cy="384048"/>
           </a:xfrm>
           <a:prstGeom prst="rect">
@@ -11123,7 +11123,7 @@
         </p:nvSpPr>
         <p:spPr>
           <a:xfrm>
-            <a:off x="2831592" y="4169664"/>
+            <a:off x="3033522" y="4169664"/>
             <a:ext cx="685800" cy="384048"/>
           </a:xfrm>
           <a:prstGeom prst="rect">
@@ -11162,7 +11162,7 @@
         </p:nvSpPr>
         <p:spPr>
           <a:xfrm>
-            <a:off x="3639312" y="4169664"/>
+            <a:off x="3942207" y="4169664"/>
             <a:ext cx="685800" cy="384048"/>
           </a:xfrm>
           <a:prstGeom prst="rect">
@@ -11189,7 +11189,7 @@
         </p:nvSpPr>
         <p:spPr>
           <a:xfrm>
-            <a:off x="3639312" y="4169664"/>
+            <a:off x="3942207" y="4169664"/>
             <a:ext cx="685800" cy="384048"/>
           </a:xfrm>
           <a:prstGeom prst="rect">
@@ -11228,7 +11228,7 @@
         </p:nvSpPr>
         <p:spPr>
           <a:xfrm>
-            <a:off x="4447032" y="4169664"/>
+            <a:off x="4850892" y="4169664"/>
             <a:ext cx="685800" cy="384048"/>
           </a:xfrm>
           <a:prstGeom prst="rect">
@@ -11255,7 +11255,7 @@
         </p:nvSpPr>
         <p:spPr>
           <a:xfrm>
-            <a:off x="4447032" y="4169664"/>
+            <a:off x="4850892" y="4169664"/>
             <a:ext cx="685800" cy="384048"/>
           </a:xfrm>
           <a:prstGeom prst="rect">
@@ -11294,7 +11294,7 @@
         </p:nvSpPr>
         <p:spPr>
           <a:xfrm>
-            <a:off x="5254752" y="4169664"/>
+            <a:off x="5759577" y="4169664"/>
             <a:ext cx="685800" cy="384048"/>
           </a:xfrm>
           <a:prstGeom prst="rect">
@@ -11321,7 +11321,7 @@
         </p:nvSpPr>
         <p:spPr>
           <a:xfrm>
-            <a:off x="5254752" y="4169664"/>
+            <a:off x="5759577" y="4169664"/>
             <a:ext cx="685800" cy="384048"/>
           </a:xfrm>
           <a:prstGeom prst="rect">
@@ -11360,7 +11360,7 @@
         </p:nvSpPr>
         <p:spPr>
           <a:xfrm>
-            <a:off x="5254752" y="4572000"/>
+            <a:off x="5759577" y="4572000"/>
             <a:ext cx="685800" cy="219456"/>
           </a:xfrm>
           <a:prstGeom prst="rect">
@@ -11399,7 +11399,7 @@
         </p:nvSpPr>
         <p:spPr>
           <a:xfrm>
-            <a:off x="6062472" y="4169664"/>
+            <a:off x="6668262" y="4169664"/>
             <a:ext cx="685800" cy="384048"/>
           </a:xfrm>
           <a:prstGeom prst="rect">
@@ -11426,7 +11426,7 @@
         </p:nvSpPr>
         <p:spPr>
           <a:xfrm>
-            <a:off x="6062472" y="4169664"/>
+            <a:off x="6668262" y="4169664"/>
             <a:ext cx="685800" cy="384048"/>
           </a:xfrm>
           <a:prstGeom prst="rect">
@@ -11465,7 +11465,7 @@
         </p:nvSpPr>
         <p:spPr>
           <a:xfrm>
-            <a:off x="6870192" y="4169664"/>
+            <a:off x="7576947" y="4169664"/>
             <a:ext cx="685800" cy="384048"/>
           </a:xfrm>
           <a:prstGeom prst="rect">
@@ -11492,7 +11492,7 @@
         </p:nvSpPr>
         <p:spPr>
           <a:xfrm>
-            <a:off x="6870192" y="4169664"/>
+            <a:off x="7576947" y="4169664"/>
             <a:ext cx="685800" cy="384048"/>
           </a:xfrm>
           <a:prstGeom prst="rect">
@@ -11517,73 +11517,7 @@
                 <a:ea typeface="Trebuchet MS" pitchFamily="34" charset="-122"/>
                 <a:cs typeface="Trebuchet MS" pitchFamily="34" charset="-120"/>
               </a:rPr>
-              <a:t>n</a:t>
-            </a:r>
-            <a:endParaRPr lang="en-US" sz="900" dirty="0"/>
-          </a:p>
-        </p:txBody>
-      </p:sp>
-      <p:sp>
-        <p:nvSpPr>
-          <p:cNvPr id="55" name="Shape 53"/>
-          <p:cNvSpPr/>
-          <p:nvPr/>
-        </p:nvSpPr>
-        <p:spPr>
-          <a:xfrm>
-            <a:off x="7677912" y="4169664"/>
-            <a:ext cx="685800" cy="384048"/>
-          </a:xfrm>
-          <a:prstGeom prst="rect">
-            <a:avLst>
-              <a:gd name="adj" fmla="val 9524"/>
-            </a:avLst>
-          </a:prstGeom>
-          <a:solidFill>
-            <a:srgbClr val="FFFFFF"/>
-          </a:solidFill>
-          <a:ln w="12700">
-            <a:solidFill>
-              <a:srgbClr val="DB2777"/>
-            </a:solidFill>
-            <a:prstDash val="solid"/>
-          </a:ln>
-        </p:spPr>
-      </p:sp>
-      <p:sp>
-        <p:nvSpPr>
-          <p:cNvPr id="56" name="Text 54"/>
-          <p:cNvSpPr/>
-          <p:nvPr/>
-        </p:nvSpPr>
-        <p:spPr>
-          <a:xfrm>
-            <a:off x="7677912" y="4169664"/>
-            <a:ext cx="685800" cy="384048"/>
-          </a:xfrm>
-          <a:prstGeom prst="rect">
-            <a:avLst/>
-          </a:prstGeom>
-          <a:noFill/>
-          <a:ln/>
-        </p:spPr>
-        <p:txBody>
-          <a:bodyPr wrap="square" lIns="0" tIns="0" rIns="0" bIns="0" rtlCol="0" anchor="ctr"/>
-          <a:lstStyle/>
-          <a:p>
-            <a:pPr algn="ctr" indent="0" marL="0">
-              <a:buNone/>
-            </a:pPr>
-            <a:r>
-              <a:rPr lang="en-US" sz="900" b="1" dirty="0">
-                <a:solidFill>
-                  <a:srgbClr val="9D174D"/>
-                </a:solidFill>
-                <a:latin typeface="Trebuchet MS" pitchFamily="34" charset="0"/>
-                <a:ea typeface="Trebuchet MS" pitchFamily="34" charset="-122"/>
-                <a:cs typeface="Trebuchet MS" pitchFamily="34" charset="-120"/>
-              </a:rPr>
-              <a:t>e</a:t>
+              <a:t>ne</a:t>
             </a:r>
             <a:endParaRPr lang="en-US" sz="900" dirty="0"/>
           </a:p>
@@ -12014,7 +11948,7 @@
                 <a:ea typeface="Trebuchet MS" pitchFamily="34" charset="-122"/>
                 <a:cs typeface="Trebuchet MS" pitchFamily="34" charset="-120"/>
               </a:rPr>
-              <a:t>microphone</a:t>
+              <a:t>saxophone</a:t>
             </a:r>
             <a:endParaRPr lang="en-US" sz="2800" dirty="0"/>
           </a:p>
@@ -12841,7 +12775,7 @@
                 <a:ea typeface="Trebuchet MS" pitchFamily="34" charset="-122"/>
                 <a:cs typeface="Trebuchet MS" pitchFamily="34" charset="-120"/>
               </a:rPr>
-              <a:t>microphone</a:t>
+              <a:t>saxophone</a:t>
             </a:r>
             <a:endParaRPr lang="en-US" sz="2800" dirty="0"/>
           </a:p>
@@ -12980,7 +12914,7 @@
                 <a:ea typeface="Trebuchet MS" pitchFamily="34" charset="-122"/>
                 <a:cs typeface="Trebuchet MS" pitchFamily="34" charset="-120"/>
               </a:rPr>
-              <a:t>micro</a:t>
+              <a:t>saxo</a:t>
             </a:r>
             <a:endParaRPr lang="en-US" sz="1300" dirty="0"/>
           </a:p>
@@ -13019,7 +12953,7 @@
                 <a:ea typeface="Calibri" pitchFamily="34" charset="-122"/>
                 <a:cs typeface="Calibri" pitchFamily="34" charset="-120"/>
               </a:rPr>
-              <a:t>small</a:t>
+              <a:t>Sax (inventor's name)</a:t>
             </a:r>
             <a:endParaRPr lang="en-US" sz="850" dirty="0"/>
           </a:p>
@@ -13243,7 +13177,7 @@
                 <a:ea typeface="Calibri" pitchFamily="34" charset="-122"/>
                 <a:cs typeface="Calibri" pitchFamily="34" charset="-120"/>
               </a:rPr>
-              <a:t>noun-forming ending</a:t>
+              <a:t>noun marker</a:t>
             </a:r>
             <a:endParaRPr lang="en-US" sz="850" dirty="0"/>
           </a:p>
@@ -13938,7 +13872,7 @@
                 <a:ea typeface="Trebuchet MS" pitchFamily="34" charset="-122"/>
                 <a:cs typeface="Trebuchet MS" pitchFamily="34" charset="-120"/>
               </a:rPr>
-              <a:t>microphone</a:t>
+              <a:t>saxophone</a:t>
             </a:r>
             <a:endParaRPr lang="en-US" sz="2800" dirty="0"/>
           </a:p>
@@ -14077,7 +14011,7 @@
                 <a:ea typeface="Trebuchet MS" pitchFamily="34" charset="-122"/>
                 <a:cs typeface="Trebuchet MS" pitchFamily="34" charset="-120"/>
               </a:rPr>
-              <a:t>micro</a:t>
+              <a:t>saxo</a:t>
             </a:r>
             <a:endParaRPr lang="en-US" sz="1300" dirty="0"/>
           </a:p>
@@ -14116,7 +14050,7 @@
                 <a:ea typeface="Calibri" pitchFamily="34" charset="-122"/>
                 <a:cs typeface="Calibri" pitchFamily="34" charset="-120"/>
               </a:rPr>
-              <a:t>small</a:t>
+              <a:t>Sax (inventor's name)</a:t>
             </a:r>
             <a:endParaRPr lang="en-US" sz="850" dirty="0"/>
           </a:p>
@@ -14340,7 +14274,7 @@
                 <a:ea typeface="Calibri" pitchFamily="34" charset="-122"/>
                 <a:cs typeface="Calibri" pitchFamily="34" charset="-120"/>
               </a:rPr>
-              <a:t>noun-forming ending</a:t>
+              <a:t>noun marker</a:t>
             </a:r>
             <a:endParaRPr lang="en-US" sz="850" dirty="0"/>
           </a:p>
@@ -14499,7 +14433,7 @@
                 <a:ea typeface="Trebuchet MS" pitchFamily="34" charset="-122"/>
                 <a:cs typeface="Trebuchet MS" pitchFamily="34" charset="-120"/>
               </a:rPr>
-              <a:t>mi</a:t>
+              <a:t>sax</a:t>
             </a:r>
             <a:endParaRPr lang="en-US" sz="1400" dirty="0"/>
           </a:p>
@@ -14604,7 +14538,7 @@
                 <a:ea typeface="Trebuchet MS" pitchFamily="34" charset="-122"/>
                 <a:cs typeface="Trebuchet MS" pitchFamily="34" charset="-120"/>
               </a:rPr>
-              <a:t>cro</a:t>
+              <a:t>o</a:t>
             </a:r>
             <a:endParaRPr lang="en-US" sz="1400" dirty="0"/>
           </a:p>
@@ -15537,7 +15471,7 @@
                 <a:ea typeface="Trebuchet MS" pitchFamily="34" charset="-122"/>
                 <a:cs typeface="Trebuchet MS" pitchFamily="34" charset="-120"/>
               </a:rPr>
-              <a:t>microphone</a:t>
+              <a:t>saxophone</a:t>
             </a:r>
             <a:endParaRPr lang="en-US" sz="2800" dirty="0"/>
           </a:p>
@@ -15676,7 +15610,7 @@
                 <a:ea typeface="Trebuchet MS" pitchFamily="34" charset="-122"/>
                 <a:cs typeface="Trebuchet MS" pitchFamily="34" charset="-120"/>
               </a:rPr>
-              <a:t>micro</a:t>
+              <a:t>saxo</a:t>
             </a:r>
             <a:endParaRPr lang="en-US" sz="1300" dirty="0"/>
           </a:p>
@@ -15715,7 +15649,7 @@
                 <a:ea typeface="Calibri" pitchFamily="34" charset="-122"/>
                 <a:cs typeface="Calibri" pitchFamily="34" charset="-120"/>
               </a:rPr>
-              <a:t>small</a:t>
+              <a:t>Sax (inventor's name)</a:t>
             </a:r>
             <a:endParaRPr lang="en-US" sz="850" dirty="0"/>
           </a:p>
@@ -15939,7 +15873,7 @@
                 <a:ea typeface="Calibri" pitchFamily="34" charset="-122"/>
                 <a:cs typeface="Calibri" pitchFamily="34" charset="-120"/>
               </a:rPr>
-              <a:t>noun-forming ending</a:t>
+              <a:t>noun marker</a:t>
             </a:r>
             <a:endParaRPr lang="en-US" sz="850" dirty="0"/>
           </a:p>
@@ -16098,7 +16032,7 @@
                 <a:ea typeface="Trebuchet MS" pitchFamily="34" charset="-122"/>
                 <a:cs typeface="Trebuchet MS" pitchFamily="34" charset="-120"/>
               </a:rPr>
-              <a:t>mi</a:t>
+              <a:t>sax</a:t>
             </a:r>
             <a:endParaRPr lang="en-US" sz="1400" dirty="0"/>
           </a:p>
@@ -16203,7 +16137,7 @@
                 <a:ea typeface="Trebuchet MS" pitchFamily="34" charset="-122"/>
                 <a:cs typeface="Trebuchet MS" pitchFamily="34" charset="-120"/>
               </a:rPr>
-              <a:t>cro</a:t>
+              <a:t>o</a:t>
             </a:r>
             <a:endParaRPr lang="en-US" sz="1400" dirty="0"/>
           </a:p>
@@ -16415,8 +16349,8 @@
         </p:nvSpPr>
         <p:spPr>
           <a:xfrm>
-            <a:off x="1951330" y="4169664"/>
-            <a:ext cx="676656" cy="384048"/>
+            <a:off x="2124837" y="4169664"/>
+            <a:ext cx="685800" cy="384048"/>
           </a:xfrm>
           <a:prstGeom prst="rect">
             <a:avLst>
@@ -16442,8 +16376,8 @@
         </p:nvSpPr>
         <p:spPr>
           <a:xfrm>
-            <a:off x="1951330" y="4169664"/>
-            <a:ext cx="676656" cy="384048"/>
+            <a:off x="2124837" y="4169664"/>
+            <a:ext cx="685800" cy="384048"/>
           </a:xfrm>
           <a:prstGeom prst="rect">
             <a:avLst/>
@@ -16467,7 +16401,7 @@
                 <a:ea typeface="Trebuchet MS" pitchFamily="34" charset="-122"/>
                 <a:cs typeface="Trebuchet MS" pitchFamily="34" charset="-120"/>
               </a:rPr>
-              <a:t>m</a:t>
+              <a:t>s</a:t>
             </a:r>
             <a:endParaRPr lang="en-US" sz="900" dirty="0"/>
           </a:p>
@@ -16481,8 +16415,8 @@
         </p:nvSpPr>
         <p:spPr>
           <a:xfrm>
-            <a:off x="2677363" y="4169664"/>
-            <a:ext cx="676656" cy="384048"/>
+            <a:off x="3033522" y="4169664"/>
+            <a:ext cx="685800" cy="384048"/>
           </a:xfrm>
           <a:prstGeom prst="rect">
             <a:avLst>
@@ -16508,8 +16442,8 @@
         </p:nvSpPr>
         <p:spPr>
           <a:xfrm>
-            <a:off x="2677363" y="4169664"/>
-            <a:ext cx="676656" cy="384048"/>
+            <a:off x="3033522" y="4169664"/>
+            <a:ext cx="685800" cy="384048"/>
           </a:xfrm>
           <a:prstGeom prst="rect">
             <a:avLst/>
@@ -16533,7 +16467,7 @@
                 <a:ea typeface="Trebuchet MS" pitchFamily="34" charset="-122"/>
                 <a:cs typeface="Trebuchet MS" pitchFamily="34" charset="-120"/>
               </a:rPr>
-              <a:t>i</a:t>
+              <a:t>a</a:t>
             </a:r>
             <a:endParaRPr lang="en-US" sz="900" dirty="0"/>
           </a:p>
@@ -16547,8 +16481,8 @@
         </p:nvSpPr>
         <p:spPr>
           <a:xfrm>
-            <a:off x="3403397" y="4169664"/>
-            <a:ext cx="676656" cy="384048"/>
+            <a:off x="3942207" y="4169664"/>
+            <a:ext cx="685800" cy="384048"/>
           </a:xfrm>
           <a:prstGeom prst="rect">
             <a:avLst>
@@ -16574,8 +16508,8 @@
         </p:nvSpPr>
         <p:spPr>
           <a:xfrm>
-            <a:off x="3403397" y="4169664"/>
-            <a:ext cx="676656" cy="384048"/>
+            <a:off x="3942207" y="4169664"/>
+            <a:ext cx="685800" cy="384048"/>
           </a:xfrm>
           <a:prstGeom prst="rect">
             <a:avLst/>
@@ -16599,7 +16533,7 @@
                 <a:ea typeface="Trebuchet MS" pitchFamily="34" charset="-122"/>
                 <a:cs typeface="Trebuchet MS" pitchFamily="34" charset="-120"/>
               </a:rPr>
-              <a:t>c</a:t>
+              <a:t>x</a:t>
             </a:r>
             <a:endParaRPr lang="en-US" sz="900" dirty="0"/>
           </a:p>
@@ -16613,8 +16547,8 @@
         </p:nvSpPr>
         <p:spPr>
           <a:xfrm>
-            <a:off x="3403397" y="4572000"/>
-            <a:ext cx="676656" cy="219456"/>
+            <a:off x="3942207" y="4572000"/>
+            <a:ext cx="685800" cy="219456"/>
           </a:xfrm>
           <a:prstGeom prst="rect">
             <a:avLst/>
@@ -16638,7 +16572,7 @@
                 <a:ea typeface="Calibri" pitchFamily="34" charset="-122"/>
                 <a:cs typeface="Calibri" pitchFamily="34" charset="-120"/>
               </a:rPr>
-              <a:t>/k/</a:t>
+              <a:t>/ks/</a:t>
             </a:r>
             <a:endParaRPr lang="en-US" sz="750" dirty="0"/>
           </a:p>
@@ -16652,8 +16586,8 @@
         </p:nvSpPr>
         <p:spPr>
           <a:xfrm>
-            <a:off x="4129430" y="4169664"/>
-            <a:ext cx="676656" cy="384048"/>
+            <a:off x="4850892" y="4169664"/>
+            <a:ext cx="685800" cy="384048"/>
           </a:xfrm>
           <a:prstGeom prst="rect">
             <a:avLst>
@@ -16679,8 +16613,8 @@
         </p:nvSpPr>
         <p:spPr>
           <a:xfrm>
-            <a:off x="4129430" y="4169664"/>
-            <a:ext cx="676656" cy="384048"/>
+            <a:off x="4850892" y="4169664"/>
+            <a:ext cx="685800" cy="384048"/>
           </a:xfrm>
           <a:prstGeom prst="rect">
             <a:avLst/>
@@ -16704,7 +16638,7 @@
                 <a:ea typeface="Trebuchet MS" pitchFamily="34" charset="-122"/>
                 <a:cs typeface="Trebuchet MS" pitchFamily="34" charset="-120"/>
               </a:rPr>
-              <a:t>r</a:t>
+              <a:t>o</a:t>
             </a:r>
             <a:endParaRPr lang="en-US" sz="900" dirty="0"/>
           </a:p>
@@ -16718,8 +16652,8 @@
         </p:nvSpPr>
         <p:spPr>
           <a:xfrm>
-            <a:off x="4855464" y="4169664"/>
-            <a:ext cx="676656" cy="384048"/>
+            <a:off x="5759577" y="4169664"/>
+            <a:ext cx="685800" cy="384048"/>
           </a:xfrm>
           <a:prstGeom prst="rect">
             <a:avLst>
@@ -16745,8 +16679,8 @@
         </p:nvSpPr>
         <p:spPr>
           <a:xfrm>
-            <a:off x="4855464" y="4169664"/>
-            <a:ext cx="676656" cy="384048"/>
+            <a:off x="5759577" y="4169664"/>
+            <a:ext cx="685800" cy="384048"/>
           </a:xfrm>
           <a:prstGeom prst="rect">
             <a:avLst/>
@@ -16770,7 +16704,7 @@
                 <a:ea typeface="Trebuchet MS" pitchFamily="34" charset="-122"/>
                 <a:cs typeface="Trebuchet MS" pitchFamily="34" charset="-120"/>
               </a:rPr>
-              <a:t>o</a:t>
+              <a:t>ph</a:t>
             </a:r>
             <a:endParaRPr lang="en-US" sz="900" dirty="0"/>
           </a:p>
@@ -16778,14 +16712,53 @@
       </p:sp>
       <p:sp>
         <p:nvSpPr>
-          <p:cNvPr id="50" name="Shape 48"/>
-          <p:cNvSpPr/>
-          <p:nvPr/>
-        </p:nvSpPr>
-        <p:spPr>
-          <a:xfrm>
-            <a:off x="5581498" y="4169664"/>
-            <a:ext cx="676656" cy="384048"/>
+          <p:cNvPr id="50" name="Text 48"/>
+          <p:cNvSpPr/>
+          <p:nvPr/>
+        </p:nvSpPr>
+        <p:spPr>
+          <a:xfrm>
+            <a:off x="5759577" y="4572000"/>
+            <a:ext cx="685800" cy="219456"/>
+          </a:xfrm>
+          <a:prstGeom prst="rect">
+            <a:avLst/>
+          </a:prstGeom>
+          <a:noFill/>
+          <a:ln/>
+        </p:spPr>
+        <p:txBody>
+          <a:bodyPr wrap="square" lIns="0" tIns="0" rIns="0" bIns="0" rtlCol="0" anchor="t"/>
+          <a:lstStyle/>
+          <a:p>
+            <a:pPr algn="ctr" indent="0" marL="0">
+              <a:buNone/>
+            </a:pPr>
+            <a:r>
+              <a:rPr lang="en-US" sz="750" i="1" dirty="0">
+                <a:solidFill>
+                  <a:srgbClr val="94A3B8"/>
+                </a:solidFill>
+                <a:latin typeface="Calibri" pitchFamily="34" charset="0"/>
+                <a:ea typeface="Calibri" pitchFamily="34" charset="-122"/>
+                <a:cs typeface="Calibri" pitchFamily="34" charset="-120"/>
+              </a:rPr>
+              <a:t>/f/</a:t>
+            </a:r>
+            <a:endParaRPr lang="en-US" sz="750" dirty="0"/>
+          </a:p>
+        </p:txBody>
+      </p:sp>
+      <p:sp>
+        <p:nvSpPr>
+          <p:cNvPr id="51" name="Shape 49"/>
+          <p:cNvSpPr/>
+          <p:nvPr/>
+        </p:nvSpPr>
+        <p:spPr>
+          <a:xfrm>
+            <a:off x="6668262" y="4169664"/>
+            <a:ext cx="685800" cy="384048"/>
           </a:xfrm>
           <a:prstGeom prst="rect">
             <a:avLst>
@@ -16805,14 +16778,14 @@
       </p:sp>
       <p:sp>
         <p:nvSpPr>
-          <p:cNvPr id="51" name="Text 49"/>
-          <p:cNvSpPr/>
-          <p:nvPr/>
-        </p:nvSpPr>
-        <p:spPr>
-          <a:xfrm>
-            <a:off x="5581498" y="4169664"/>
-            <a:ext cx="676656" cy="384048"/>
+          <p:cNvPr id="52" name="Text 50"/>
+          <p:cNvSpPr/>
+          <p:nvPr/>
+        </p:nvSpPr>
+        <p:spPr>
+          <a:xfrm>
+            <a:off x="6668262" y="4169664"/>
+            <a:ext cx="685800" cy="384048"/>
           </a:xfrm>
           <a:prstGeom prst="rect">
             <a:avLst/>
@@ -16836,7 +16809,7 @@
                 <a:ea typeface="Trebuchet MS" pitchFamily="34" charset="-122"/>
                 <a:cs typeface="Trebuchet MS" pitchFamily="34" charset="-120"/>
               </a:rPr>
-              <a:t>ph</a:t>
+              <a:t>o</a:t>
             </a:r>
             <a:endParaRPr lang="en-US" sz="900" dirty="0"/>
           </a:p>
@@ -16844,53 +16817,14 @@
       </p:sp>
       <p:sp>
         <p:nvSpPr>
-          <p:cNvPr id="52" name="Text 50"/>
-          <p:cNvSpPr/>
-          <p:nvPr/>
-        </p:nvSpPr>
-        <p:spPr>
-          <a:xfrm>
-            <a:off x="5581498" y="4572000"/>
-            <a:ext cx="676656" cy="219456"/>
-          </a:xfrm>
-          <a:prstGeom prst="rect">
-            <a:avLst/>
-          </a:prstGeom>
-          <a:noFill/>
-          <a:ln/>
-        </p:spPr>
-        <p:txBody>
-          <a:bodyPr wrap="square" lIns="0" tIns="0" rIns="0" bIns="0" rtlCol="0" anchor="t"/>
-          <a:lstStyle/>
-          <a:p>
-            <a:pPr algn="ctr" indent="0" marL="0">
-              <a:buNone/>
-            </a:pPr>
-            <a:r>
-              <a:rPr lang="en-US" sz="750" i="1" dirty="0">
-                <a:solidFill>
-                  <a:srgbClr val="94A3B8"/>
-                </a:solidFill>
-                <a:latin typeface="Calibri" pitchFamily="34" charset="0"/>
-                <a:ea typeface="Calibri" pitchFamily="34" charset="-122"/>
-                <a:cs typeface="Calibri" pitchFamily="34" charset="-120"/>
-              </a:rPr>
-              <a:t>/f/</a:t>
-            </a:r>
-            <a:endParaRPr lang="en-US" sz="750" dirty="0"/>
-          </a:p>
-        </p:txBody>
-      </p:sp>
-      <p:sp>
-        <p:nvSpPr>
           <p:cNvPr id="53" name="Shape 51"/>
           <p:cNvSpPr/>
           <p:nvPr/>
         </p:nvSpPr>
         <p:spPr>
           <a:xfrm>
-            <a:off x="6307531" y="4169664"/>
-            <a:ext cx="676656" cy="384048"/>
+            <a:off x="7576947" y="4169664"/>
+            <a:ext cx="685800" cy="384048"/>
           </a:xfrm>
           <a:prstGeom prst="rect">
             <a:avLst>
@@ -16916,8 +16850,8 @@
         </p:nvSpPr>
         <p:spPr>
           <a:xfrm>
-            <a:off x="6307531" y="4169664"/>
-            <a:ext cx="676656" cy="384048"/>
+            <a:off x="7576947" y="4169664"/>
+            <a:ext cx="685800" cy="384048"/>
           </a:xfrm>
           <a:prstGeom prst="rect">
             <a:avLst/>
@@ -16941,139 +16875,7 @@
                 <a:ea typeface="Trebuchet MS" pitchFamily="34" charset="-122"/>
                 <a:cs typeface="Trebuchet MS" pitchFamily="34" charset="-120"/>
               </a:rPr>
-              <a:t>o</a:t>
-            </a:r>
-            <a:endParaRPr lang="en-US" sz="900" dirty="0"/>
-          </a:p>
-        </p:txBody>
-      </p:sp>
-      <p:sp>
-        <p:nvSpPr>
-          <p:cNvPr id="55" name="Shape 53"/>
-          <p:cNvSpPr/>
-          <p:nvPr/>
-        </p:nvSpPr>
-        <p:spPr>
-          <a:xfrm>
-            <a:off x="7033565" y="4169664"/>
-            <a:ext cx="676656" cy="384048"/>
-          </a:xfrm>
-          <a:prstGeom prst="rect">
-            <a:avLst>
-              <a:gd name="adj" fmla="val 9524"/>
-            </a:avLst>
-          </a:prstGeom>
-          <a:solidFill>
-            <a:srgbClr val="FFFFFF"/>
-          </a:solidFill>
-          <a:ln w="12700">
-            <a:solidFill>
-              <a:srgbClr val="DB2777"/>
-            </a:solidFill>
-            <a:prstDash val="solid"/>
-          </a:ln>
-        </p:spPr>
-      </p:sp>
-      <p:sp>
-        <p:nvSpPr>
-          <p:cNvPr id="56" name="Text 54"/>
-          <p:cNvSpPr/>
-          <p:nvPr/>
-        </p:nvSpPr>
-        <p:spPr>
-          <a:xfrm>
-            <a:off x="7033565" y="4169664"/>
-            <a:ext cx="676656" cy="384048"/>
-          </a:xfrm>
-          <a:prstGeom prst="rect">
-            <a:avLst/>
-          </a:prstGeom>
-          <a:noFill/>
-          <a:ln/>
-        </p:spPr>
-        <p:txBody>
-          <a:bodyPr wrap="square" lIns="0" tIns="0" rIns="0" bIns="0" rtlCol="0" anchor="ctr"/>
-          <a:lstStyle/>
-          <a:p>
-            <a:pPr algn="ctr" indent="0" marL="0">
-              <a:buNone/>
-            </a:pPr>
-            <a:r>
-              <a:rPr lang="en-US" sz="900" b="1" dirty="0">
-                <a:solidFill>
-                  <a:srgbClr val="9D174D"/>
-                </a:solidFill>
-                <a:latin typeface="Trebuchet MS" pitchFamily="34" charset="0"/>
-                <a:ea typeface="Trebuchet MS" pitchFamily="34" charset="-122"/>
-                <a:cs typeface="Trebuchet MS" pitchFamily="34" charset="-120"/>
-              </a:rPr>
-              <a:t>n</a:t>
-            </a:r>
-            <a:endParaRPr lang="en-US" sz="900" dirty="0"/>
-          </a:p>
-        </p:txBody>
-      </p:sp>
-      <p:sp>
-        <p:nvSpPr>
-          <p:cNvPr id="57" name="Shape 55"/>
-          <p:cNvSpPr/>
-          <p:nvPr/>
-        </p:nvSpPr>
-        <p:spPr>
-          <a:xfrm>
-            <a:off x="7759598" y="4169664"/>
-            <a:ext cx="676656" cy="384048"/>
-          </a:xfrm>
-          <a:prstGeom prst="rect">
-            <a:avLst>
-              <a:gd name="adj" fmla="val 9524"/>
-            </a:avLst>
-          </a:prstGeom>
-          <a:solidFill>
-            <a:srgbClr val="FFFFFF"/>
-          </a:solidFill>
-          <a:ln w="12700">
-            <a:solidFill>
-              <a:srgbClr val="DB2777"/>
-            </a:solidFill>
-            <a:prstDash val="solid"/>
-          </a:ln>
-        </p:spPr>
-      </p:sp>
-      <p:sp>
-        <p:nvSpPr>
-          <p:cNvPr id="58" name="Text 56"/>
-          <p:cNvSpPr/>
-          <p:nvPr/>
-        </p:nvSpPr>
-        <p:spPr>
-          <a:xfrm>
-            <a:off x="7759598" y="4169664"/>
-            <a:ext cx="676656" cy="384048"/>
-          </a:xfrm>
-          <a:prstGeom prst="rect">
-            <a:avLst/>
-          </a:prstGeom>
-          <a:noFill/>
-          <a:ln/>
-        </p:spPr>
-        <p:txBody>
-          <a:bodyPr wrap="square" lIns="0" tIns="0" rIns="0" bIns="0" rtlCol="0" anchor="ctr"/>
-          <a:lstStyle/>
-          <a:p>
-            <a:pPr algn="ctr" indent="0" marL="0">
-              <a:buNone/>
-            </a:pPr>
-            <a:r>
-              <a:rPr lang="en-US" sz="900" b="1" dirty="0">
-                <a:solidFill>
-                  <a:srgbClr val="9D174D"/>
-                </a:solidFill>
-                <a:latin typeface="Trebuchet MS" pitchFamily="34" charset="0"/>
-                <a:ea typeface="Trebuchet MS" pitchFamily="34" charset="-122"/>
-                <a:cs typeface="Trebuchet MS" pitchFamily="34" charset="-120"/>
-              </a:rPr>
-              <a:t>e</a:t>
+              <a:t>ne</a:t>
             </a:r>
             <a:endParaRPr lang="en-US" sz="900" dirty="0"/>
           </a:p>
@@ -17981,7 +17783,7 @@
                 <a:ea typeface="Trebuchet MS" pitchFamily="34" charset="-122"/>
                 <a:cs typeface="Trebuchet MS" pitchFamily="34" charset="-120"/>
               </a:rPr>
-              <a:t>1</a:t>
+              <a:t>2</a:t>
             </a:r>
             <a:pPr algn="ctr" indent="0" marL="0">
               <a:buNone/>
@@ -17995,7 +17797,7 @@
                 <a:ea typeface="Trebuchet MS" pitchFamily="34" charset="-122"/>
                 <a:cs typeface="Trebuchet MS" pitchFamily="34" charset="-120"/>
               </a:rPr>
-              <a:t>  punctuation mark</a:t>
+              <a:t>  punctuation marks</a:t>
             </a:r>
             <a:endParaRPr lang="en-US" sz="2800" dirty="0"/>
           </a:p>
@@ -18399,7 +18201,7 @@
                 <a:ea typeface="Calibri" pitchFamily="34" charset="-122"/>
                 <a:cs typeface="Calibri" pitchFamily="34" charset="-120"/>
               </a:rPr>
-              <a:t>During the concert, the </a:t>
+              <a:t>The </a:t>
             </a:r>
             <a:pPr algn="l" indent="0" marL="0">
               <a:buNone/>
@@ -18416,7 +18218,7 @@
                 <a:ea typeface="Calibri" pitchFamily="34" charset="-122"/>
                 <a:cs typeface="Calibri" pitchFamily="34" charset="-120"/>
               </a:rPr>
-              <a:t>phonics</a:t>
+              <a:t>symphony</a:t>
             </a:r>
             <a:pPr algn="l" indent="0" marL="0">
               <a:buNone/>
@@ -18430,7 +18232,7 @@
                 <a:ea typeface="Calibri" pitchFamily="34" charset="-122"/>
                 <a:cs typeface="Calibri" pitchFamily="34" charset="-120"/>
               </a:rPr>
-              <a:t> teacher played the </a:t>
+              <a:t> began when the conductor raised her baton, and the </a:t>
             </a:r>
             <a:pPr algn="l" indent="0" marL="0">
               <a:buNone/>
@@ -18447,7 +18249,7 @@
                 <a:ea typeface="Calibri" pitchFamily="34" charset="-122"/>
                 <a:cs typeface="Calibri" pitchFamily="34" charset="-120"/>
               </a:rPr>
-              <a:t>xylophone</a:t>
+              <a:t>microphone</a:t>
             </a:r>
             <a:pPr algn="l" indent="0" marL="0">
               <a:buNone/>
@@ -18461,7 +18263,7 @@
                 <a:ea typeface="Calibri" pitchFamily="34" charset="-122"/>
                 <a:cs typeface="Calibri" pitchFamily="34" charset="-120"/>
               </a:rPr>
-              <a:t> while the students sang into the </a:t>
+              <a:t> carried every </a:t>
             </a:r>
             <a:pPr algn="l" indent="0" marL="0">
               <a:buNone/>
@@ -18478,7 +18280,7 @@
                 <a:ea typeface="Calibri" pitchFamily="34" charset="-122"/>
                 <a:cs typeface="Calibri" pitchFamily="34" charset="-120"/>
               </a:rPr>
-              <a:t>microphone</a:t>
+              <a:t>phoneme</a:t>
             </a:r>
             <a:pPr algn="l" indent="0" marL="0">
               <a:buNone/>
@@ -18492,7 +18294,7 @@
                 <a:ea typeface="Calibri" pitchFamily="34" charset="-122"/>
                 <a:cs typeface="Calibri" pitchFamily="34" charset="-120"/>
               </a:rPr>
-              <a:t>.</a:t>
+              <a:t> to the back of the hall.</a:t>
             </a:r>
             <a:endParaRPr lang="en-US" sz="1800" dirty="0"/>
           </a:p>
@@ -18647,7 +18449,7 @@
                 <a:ea typeface="Trebuchet MS" pitchFamily="34" charset="-122"/>
                 <a:cs typeface="Trebuchet MS" pitchFamily="34" charset="-120"/>
               </a:rPr>
-              <a:t>phonics</a:t>
+              <a:t>symphony</a:t>
             </a:r>
             <a:endParaRPr lang="en-US" sz="1400" dirty="0"/>
           </a:p>
@@ -18775,7 +18577,7 @@
                 <a:ea typeface="Trebuchet MS" pitchFamily="34" charset="-122"/>
                 <a:cs typeface="Trebuchet MS" pitchFamily="34" charset="-120"/>
               </a:rPr>
-              <a:t>xylophone</a:t>
+              <a:t>microphone</a:t>
             </a:r>
             <a:endParaRPr lang="en-US" sz="1400" dirty="0"/>
           </a:p>
@@ -18903,7 +18705,7 @@
                 <a:ea typeface="Trebuchet MS" pitchFamily="34" charset="-122"/>
                 <a:cs typeface="Trebuchet MS" pitchFamily="34" charset="-120"/>
               </a:rPr>
-              <a:t>microphone</a:t>
+              <a:t>phoneme</a:t>
             </a:r>
             <a:endParaRPr lang="en-US" sz="1400" dirty="0"/>
           </a:p>
@@ -19373,7 +19175,7 @@
                 <a:ea typeface="Trebuchet MS" pitchFamily="34" charset="-122"/>
                 <a:cs typeface="Trebuchet MS" pitchFamily="34" charset="-120"/>
               </a:rPr>
-              <a:t>phonics</a:t>
+              <a:t>symphony</a:t>
             </a:r>
             <a:endParaRPr lang="en-US" sz="2800" dirty="0"/>
           </a:p>
@@ -20200,7 +20002,7 @@
                 <a:ea typeface="Trebuchet MS" pitchFamily="34" charset="-122"/>
                 <a:cs typeface="Trebuchet MS" pitchFamily="34" charset="-120"/>
               </a:rPr>
-              <a:t>phonics</a:t>
+              <a:t>symphony</a:t>
             </a:r>
             <a:endParaRPr lang="en-US" sz="2800" dirty="0"/>
           </a:p>
@@ -20280,7 +20082,7 @@
         </p:nvSpPr>
         <p:spPr>
           <a:xfrm>
-            <a:off x="2938272" y="2258568"/>
+            <a:off x="2221992" y="2258568"/>
             <a:ext cx="1828800" cy="292608"/>
           </a:xfrm>
           <a:prstGeom prst="rect">
@@ -20289,11 +20091,11 @@
             </a:avLst>
           </a:prstGeom>
           <a:solidFill>
-            <a:srgbClr val="CCFBF1"/>
+            <a:srgbClr val="DDD6FE"/>
           </a:solidFill>
           <a:ln w="19050">
             <a:solidFill>
-              <a:srgbClr val="0D9488"/>
+              <a:srgbClr val="7C3AED"/>
             </a:solidFill>
             <a:prstDash val="solid"/>
           </a:ln>
@@ -20314,7 +20116,7 @@
         </p:nvSpPr>
         <p:spPr>
           <a:xfrm>
-            <a:off x="2938272" y="2258568"/>
+            <a:off x="2221992" y="2258568"/>
             <a:ext cx="1828800" cy="292608"/>
           </a:xfrm>
           <a:prstGeom prst="rect">
@@ -20333,13 +20135,13 @@
             <a:r>
               <a:rPr lang="en-US" sz="1300" b="1" dirty="0">
                 <a:solidFill>
-                  <a:srgbClr val="0F766E"/>
+                  <a:srgbClr val="4C1D95"/>
                 </a:solidFill>
                 <a:latin typeface="Trebuchet MS" pitchFamily="34" charset="0"/>
                 <a:ea typeface="Trebuchet MS" pitchFamily="34" charset="-122"/>
                 <a:cs typeface="Trebuchet MS" pitchFamily="34" charset="-120"/>
               </a:rPr>
-              <a:t>phon</a:t>
+              <a:t>sym</a:t>
             </a:r>
             <a:endParaRPr lang="en-US" sz="1300" dirty="0"/>
           </a:p>
@@ -20353,7 +20155,7 @@
         </p:nvSpPr>
         <p:spPr>
           <a:xfrm>
-            <a:off x="2938272" y="2569464"/>
+            <a:off x="2221992" y="2569464"/>
             <a:ext cx="1828800" cy="201168"/>
           </a:xfrm>
           <a:prstGeom prst="rect">
@@ -20378,7 +20180,7 @@
                 <a:ea typeface="Calibri" pitchFamily="34" charset="-122"/>
                 <a:cs typeface="Calibri" pitchFamily="34" charset="-120"/>
               </a:rPr>
-              <a:t>sound</a:t>
+              <a:t>together</a:t>
             </a:r>
             <a:endParaRPr lang="en-US" sz="850" dirty="0"/>
           </a:p>
@@ -20386,13 +20188,52 @@
       </p:sp>
       <p:sp>
         <p:nvSpPr>
-          <p:cNvPr id="19" name="Shape 17"/>
-          <p:cNvSpPr/>
-          <p:nvPr/>
-        </p:nvSpPr>
-        <p:spPr>
-          <a:xfrm>
-            <a:off x="5803392" y="2258568"/>
+          <p:cNvPr id="19" name="Text 17"/>
+          <p:cNvSpPr/>
+          <p:nvPr/>
+        </p:nvSpPr>
+        <p:spPr>
+          <a:xfrm>
+            <a:off x="2221992" y="2752344"/>
+            <a:ext cx="1828800" cy="182880"/>
+          </a:xfrm>
+          <a:prstGeom prst="rect">
+            <a:avLst/>
+          </a:prstGeom>
+          <a:noFill/>
+          <a:ln/>
+        </p:spPr>
+        <p:txBody>
+          <a:bodyPr wrap="square" lIns="0" tIns="0" rIns="0" bIns="0" rtlCol="0" anchor="t"/>
+          <a:lstStyle/>
+          <a:p>
+            <a:pPr algn="ctr" indent="0" marL="0">
+              <a:buNone/>
+            </a:pPr>
+            <a:r>
+              <a:rPr lang="en-US" sz="700" i="1" dirty="0">
+                <a:solidFill>
+                  <a:srgbClr val="94A3B8"/>
+                </a:solidFill>
+                <a:latin typeface="Calibri" pitchFamily="34" charset="0"/>
+                <a:ea typeface="Calibri" pitchFamily="34" charset="-122"/>
+                <a:cs typeface="Calibri" pitchFamily="34" charset="-120"/>
+              </a:rPr>
+              <a:t>syn → sym before 'ph'</a:t>
+            </a:r>
+            <a:endParaRPr lang="en-US" sz="700" dirty="0"/>
+          </a:p>
+        </p:txBody>
+      </p:sp>
+      <p:sp>
+        <p:nvSpPr>
+          <p:cNvPr id="20" name="Shape 18"/>
+          <p:cNvSpPr/>
+          <p:nvPr/>
+        </p:nvSpPr>
+        <p:spPr>
+          <a:xfrm>
+            <a:off x="4370832" y="2258568"/>
             <a:ext cx="1828800" cy="292608"/>
           </a:xfrm>
           <a:prstGeom prst="rect">
@@ -20401,11 +20242,11 @@
             </a:avLst>
           </a:prstGeom>
           <a:solidFill>
-            <a:srgbClr val="FCE7F3"/>
+            <a:srgbClr val="CCFBF1"/>
           </a:solidFill>
           <a:ln w="19050">
             <a:solidFill>
-              <a:srgbClr val="DB2777"/>
+              <a:srgbClr val="0D9488"/>
             </a:solidFill>
             <a:prstDash val="solid"/>
           </a:ln>
@@ -20420,13 +20261,13 @@
       </p:sp>
       <p:sp>
         <p:nvSpPr>
-          <p:cNvPr id="20" name="Text 18"/>
-          <p:cNvSpPr/>
-          <p:nvPr/>
-        </p:nvSpPr>
-        <p:spPr>
-          <a:xfrm>
-            <a:off x="5803392" y="2258568"/>
+          <p:cNvPr id="21" name="Text 19"/>
+          <p:cNvSpPr/>
+          <p:nvPr/>
+        </p:nvSpPr>
+        <p:spPr>
+          <a:xfrm>
+            <a:off x="4370832" y="2258568"/>
             <a:ext cx="1828800" cy="292608"/>
           </a:xfrm>
           <a:prstGeom prst="rect">
@@ -20445,13 +20286,13 @@
             <a:r>
               <a:rPr lang="en-US" sz="1300" b="1" dirty="0">
                 <a:solidFill>
-                  <a:srgbClr val="9D174D"/>
+                  <a:srgbClr val="0F766E"/>
                 </a:solidFill>
                 <a:latin typeface="Trebuchet MS" pitchFamily="34" charset="0"/>
                 <a:ea typeface="Trebuchet MS" pitchFamily="34" charset="-122"/>
                 <a:cs typeface="Trebuchet MS" pitchFamily="34" charset="-120"/>
               </a:rPr>
-              <a:t>ics</a:t>
+              <a:t>phon</a:t>
             </a:r>
             <a:endParaRPr lang="en-US" sz="1300" dirty="0"/>
           </a:p>
@@ -20459,13 +20300,13 @@
       </p:sp>
       <p:sp>
         <p:nvSpPr>
-          <p:cNvPr id="21" name="Text 19"/>
-          <p:cNvSpPr/>
-          <p:nvPr/>
-        </p:nvSpPr>
-        <p:spPr>
-          <a:xfrm>
-            <a:off x="5803392" y="2569464"/>
+          <p:cNvPr id="22" name="Text 20"/>
+          <p:cNvSpPr/>
+          <p:nvPr/>
+        </p:nvSpPr>
+        <p:spPr>
+          <a:xfrm>
+            <a:off x="4370832" y="2569464"/>
             <a:ext cx="1828800" cy="201168"/>
           </a:xfrm>
           <a:prstGeom prst="rect">
@@ -20490,7 +20331,7 @@
                 <a:ea typeface="Calibri" pitchFamily="34" charset="-122"/>
                 <a:cs typeface="Calibri" pitchFamily="34" charset="-120"/>
               </a:rPr>
-              <a:t>study or system of</a:t>
+              <a:t>sound</a:t>
             </a:r>
             <a:endParaRPr lang="en-US" sz="850" dirty="0"/>
           </a:p>
@@ -20498,7 +20339,119 @@
       </p:sp>
       <p:sp>
         <p:nvSpPr>
-          <p:cNvPr id="22" name="Shape 20"/>
+          <p:cNvPr id="23" name="Shape 21"/>
+          <p:cNvSpPr/>
+          <p:nvPr/>
+        </p:nvSpPr>
+        <p:spPr>
+          <a:xfrm>
+            <a:off x="6519672" y="2258568"/>
+            <a:ext cx="1828800" cy="292608"/>
+          </a:xfrm>
+          <a:prstGeom prst="rect">
+            <a:avLst>
+              <a:gd name="adj" fmla="val 25000"/>
+            </a:avLst>
+          </a:prstGeom>
+          <a:solidFill>
+            <a:srgbClr val="FCE7F3"/>
+          </a:solidFill>
+          <a:ln w="19050">
+            <a:solidFill>
+              <a:srgbClr val="DB2777"/>
+            </a:solidFill>
+            <a:prstDash val="solid"/>
+          </a:ln>
+          <a:effectLst>
+            <a:outerShdw sx="100000" sy="100000" kx="0" ky="0" algn="bl" rotWithShape="0" blurRad="101600" dist="38100" dir="8100000">
+              <a:srgbClr val="000000">
+                <a:alpha val="12000"/>
+              </a:srgbClr>
+            </a:outerShdw>
+          </a:effectLst>
+        </p:spPr>
+      </p:sp>
+      <p:sp>
+        <p:nvSpPr>
+          <p:cNvPr id="24" name="Text 22"/>
+          <p:cNvSpPr/>
+          <p:nvPr/>
+        </p:nvSpPr>
+        <p:spPr>
+          <a:xfrm>
+            <a:off x="6519672" y="2258568"/>
+            <a:ext cx="1828800" cy="292608"/>
+          </a:xfrm>
+          <a:prstGeom prst="rect">
+            <a:avLst/>
+          </a:prstGeom>
+          <a:noFill/>
+          <a:ln/>
+        </p:spPr>
+        <p:txBody>
+          <a:bodyPr wrap="square" lIns="0" tIns="0" rIns="0" bIns="0" rtlCol="0" anchor="ctr"/>
+          <a:lstStyle/>
+          <a:p>
+            <a:pPr algn="ctr" indent="0" marL="0">
+              <a:buNone/>
+            </a:pPr>
+            <a:r>
+              <a:rPr lang="en-US" sz="1300" b="1" dirty="0">
+                <a:solidFill>
+                  <a:srgbClr val="9D174D"/>
+                </a:solidFill>
+                <a:latin typeface="Trebuchet MS" pitchFamily="34" charset="0"/>
+                <a:ea typeface="Trebuchet MS" pitchFamily="34" charset="-122"/>
+                <a:cs typeface="Trebuchet MS" pitchFamily="34" charset="-120"/>
+              </a:rPr>
+              <a:t>y</a:t>
+            </a:r>
+            <a:endParaRPr lang="en-US" sz="1300" dirty="0"/>
+          </a:p>
+        </p:txBody>
+      </p:sp>
+      <p:sp>
+        <p:nvSpPr>
+          <p:cNvPr id="25" name="Text 23"/>
+          <p:cNvSpPr/>
+          <p:nvPr/>
+        </p:nvSpPr>
+        <p:spPr>
+          <a:xfrm>
+            <a:off x="6519672" y="2569464"/>
+            <a:ext cx="1828800" cy="201168"/>
+          </a:xfrm>
+          <a:prstGeom prst="rect">
+            <a:avLst/>
+          </a:prstGeom>
+          <a:noFill/>
+          <a:ln/>
+        </p:spPr>
+        <p:txBody>
+          <a:bodyPr wrap="square" lIns="0" tIns="0" rIns="0" bIns="0" rtlCol="0" anchor="t"/>
+          <a:lstStyle/>
+          <a:p>
+            <a:pPr algn="ctr" indent="0" marL="0">
+              <a:buNone/>
+            </a:pPr>
+            <a:r>
+              <a:rPr lang="en-US" sz="850" dirty="0">
+                <a:solidFill>
+                  <a:srgbClr val="475569"/>
+                </a:solidFill>
+                <a:latin typeface="Calibri" pitchFamily="34" charset="0"/>
+                <a:ea typeface="Calibri" pitchFamily="34" charset="-122"/>
+                <a:cs typeface="Calibri" pitchFamily="34" charset="-120"/>
+              </a:rPr>
+              <a:t>noun-forming suffix</a:t>
+            </a:r>
+            <a:endParaRPr lang="en-US" sz="850" dirty="0"/>
+          </a:p>
+        </p:txBody>
+      </p:sp>
+      <p:sp>
+        <p:nvSpPr>
+          <p:cNvPr id="26" name="Shape 24"/>
           <p:cNvSpPr/>
           <p:nvPr/>
         </p:nvSpPr>
@@ -20525,7 +20478,7 @@
       </p:sp>
       <p:sp>
         <p:nvSpPr>
-          <p:cNvPr id="23" name="Text 21"/>
+          <p:cNvPr id="27" name="Text 25"/>
           <p:cNvSpPr/>
           <p:nvPr/>
         </p:nvSpPr>
@@ -20564,7 +20517,7 @@
       </p:sp>
       <p:sp>
         <p:nvSpPr>
-          <p:cNvPr id="24" name="Shape 22"/>
+          <p:cNvPr id="28" name="Shape 26"/>
           <p:cNvSpPr/>
           <p:nvPr/>
         </p:nvSpPr>
@@ -20591,7 +20544,7 @@
       </p:sp>
       <p:sp>
         <p:nvSpPr>
-          <p:cNvPr id="25" name="Text 23"/>
+          <p:cNvPr id="29" name="Text 27"/>
           <p:cNvSpPr/>
           <p:nvPr/>
         </p:nvSpPr>
@@ -20630,7 +20583,7 @@
       </p:sp>
       <p:sp>
         <p:nvSpPr>
-          <p:cNvPr id="26" name="Shape 24"/>
+          <p:cNvPr id="30" name="Shape 28"/>
           <p:cNvSpPr/>
           <p:nvPr/>
         </p:nvSpPr>
@@ -20657,7 +20610,7 @@
       </p:sp>
       <p:sp>
         <p:nvSpPr>
-          <p:cNvPr id="27" name="Text 25"/>
+          <p:cNvPr id="31" name="Text 29"/>
           <p:cNvSpPr/>
           <p:nvPr/>
         </p:nvSpPr>
@@ -20696,7 +20649,7 @@
       </p:sp>
       <p:sp>
         <p:nvSpPr>
-          <p:cNvPr id="28" name="Shape 26"/>
+          <p:cNvPr id="32" name="Shape 30"/>
           <p:cNvSpPr/>
           <p:nvPr/>
         </p:nvSpPr>
@@ -20723,7 +20676,7 @@
       </p:sp>
       <p:sp>
         <p:nvSpPr>
-          <p:cNvPr id="29" name="Text 27"/>
+          <p:cNvPr id="33" name="Text 31"/>
           <p:cNvSpPr/>
           <p:nvPr/>
         </p:nvSpPr>
@@ -21185,7 +21138,7 @@
                 <a:ea typeface="Trebuchet MS" pitchFamily="34" charset="-122"/>
                 <a:cs typeface="Trebuchet MS" pitchFamily="34" charset="-120"/>
               </a:rPr>
-              <a:t>phonics</a:t>
+              <a:t>symphony</a:t>
             </a:r>
             <a:endParaRPr lang="en-US" sz="2800" dirty="0"/>
           </a:p>
@@ -21265,7 +21218,7 @@
         </p:nvSpPr>
         <p:spPr>
           <a:xfrm>
-            <a:off x="2938272" y="2258568"/>
+            <a:off x="2221992" y="2258568"/>
             <a:ext cx="1828800" cy="292608"/>
           </a:xfrm>
           <a:prstGeom prst="rect">
@@ -21274,11 +21227,11 @@
             </a:avLst>
           </a:prstGeom>
           <a:solidFill>
-            <a:srgbClr val="CCFBF1"/>
+            <a:srgbClr val="DDD6FE"/>
           </a:solidFill>
           <a:ln w="19050">
             <a:solidFill>
-              <a:srgbClr val="0D9488"/>
+              <a:srgbClr val="7C3AED"/>
             </a:solidFill>
             <a:prstDash val="solid"/>
           </a:ln>
@@ -21299,7 +21252,7 @@
         </p:nvSpPr>
         <p:spPr>
           <a:xfrm>
-            <a:off x="2938272" y="2258568"/>
+            <a:off x="2221992" y="2258568"/>
             <a:ext cx="1828800" cy="292608"/>
           </a:xfrm>
           <a:prstGeom prst="rect">
@@ -21318,13 +21271,13 @@
             <a:r>
               <a:rPr lang="en-US" sz="1300" b="1" dirty="0">
                 <a:solidFill>
-                  <a:srgbClr val="0F766E"/>
+                  <a:srgbClr val="4C1D95"/>
                 </a:solidFill>
                 <a:latin typeface="Trebuchet MS" pitchFamily="34" charset="0"/>
                 <a:ea typeface="Trebuchet MS" pitchFamily="34" charset="-122"/>
                 <a:cs typeface="Trebuchet MS" pitchFamily="34" charset="-120"/>
               </a:rPr>
-              <a:t>phon</a:t>
+              <a:t>sym</a:t>
             </a:r>
             <a:endParaRPr lang="en-US" sz="1300" dirty="0"/>
           </a:p>
@@ -21338,7 +21291,7 @@
         </p:nvSpPr>
         <p:spPr>
           <a:xfrm>
-            <a:off x="2938272" y="2569464"/>
+            <a:off x="2221992" y="2569464"/>
             <a:ext cx="1828800" cy="201168"/>
           </a:xfrm>
           <a:prstGeom prst="rect">
@@ -21363,7 +21316,7 @@
                 <a:ea typeface="Calibri" pitchFamily="34" charset="-122"/>
                 <a:cs typeface="Calibri" pitchFamily="34" charset="-120"/>
               </a:rPr>
-              <a:t>sound</a:t>
+              <a:t>together</a:t>
             </a:r>
             <a:endParaRPr lang="en-US" sz="850" dirty="0"/>
           </a:p>
@@ -21371,13 +21324,52 @@
       </p:sp>
       <p:sp>
         <p:nvSpPr>
-          <p:cNvPr id="19" name="Shape 17"/>
-          <p:cNvSpPr/>
-          <p:nvPr/>
-        </p:nvSpPr>
-        <p:spPr>
-          <a:xfrm>
-            <a:off x="5803392" y="2258568"/>
+          <p:cNvPr id="19" name="Text 17"/>
+          <p:cNvSpPr/>
+          <p:nvPr/>
+        </p:nvSpPr>
+        <p:spPr>
+          <a:xfrm>
+            <a:off x="2221992" y="2752344"/>
+            <a:ext cx="1828800" cy="182880"/>
+          </a:xfrm>
+          <a:prstGeom prst="rect">
+            <a:avLst/>
+          </a:prstGeom>
+          <a:noFill/>
+          <a:ln/>
+        </p:spPr>
+        <p:txBody>
+          <a:bodyPr wrap="square" lIns="0" tIns="0" rIns="0" bIns="0" rtlCol="0" anchor="t"/>
+          <a:lstStyle/>
+          <a:p>
+            <a:pPr algn="ctr" indent="0" marL="0">
+              <a:buNone/>
+            </a:pPr>
+            <a:r>
+              <a:rPr lang="en-US" sz="700" i="1" dirty="0">
+                <a:solidFill>
+                  <a:srgbClr val="94A3B8"/>
+                </a:solidFill>
+                <a:latin typeface="Calibri" pitchFamily="34" charset="0"/>
+                <a:ea typeface="Calibri" pitchFamily="34" charset="-122"/>
+                <a:cs typeface="Calibri" pitchFamily="34" charset="-120"/>
+              </a:rPr>
+              <a:t>syn → sym before 'ph'</a:t>
+            </a:r>
+            <a:endParaRPr lang="en-US" sz="700" dirty="0"/>
+          </a:p>
+        </p:txBody>
+      </p:sp>
+      <p:sp>
+        <p:nvSpPr>
+          <p:cNvPr id="20" name="Shape 18"/>
+          <p:cNvSpPr/>
+          <p:nvPr/>
+        </p:nvSpPr>
+        <p:spPr>
+          <a:xfrm>
+            <a:off x="4370832" y="2258568"/>
             <a:ext cx="1828800" cy="292608"/>
           </a:xfrm>
           <a:prstGeom prst="rect">
@@ -21386,11 +21378,11 @@
             </a:avLst>
           </a:prstGeom>
           <a:solidFill>
-            <a:srgbClr val="FCE7F3"/>
+            <a:srgbClr val="CCFBF1"/>
           </a:solidFill>
           <a:ln w="19050">
             <a:solidFill>
-              <a:srgbClr val="DB2777"/>
+              <a:srgbClr val="0D9488"/>
             </a:solidFill>
             <a:prstDash val="solid"/>
           </a:ln>
@@ -21405,13 +21397,13 @@
       </p:sp>
       <p:sp>
         <p:nvSpPr>
-          <p:cNvPr id="20" name="Text 18"/>
-          <p:cNvSpPr/>
-          <p:nvPr/>
-        </p:nvSpPr>
-        <p:spPr>
-          <a:xfrm>
-            <a:off x="5803392" y="2258568"/>
+          <p:cNvPr id="21" name="Text 19"/>
+          <p:cNvSpPr/>
+          <p:nvPr/>
+        </p:nvSpPr>
+        <p:spPr>
+          <a:xfrm>
+            <a:off x="4370832" y="2258568"/>
             <a:ext cx="1828800" cy="292608"/>
           </a:xfrm>
           <a:prstGeom prst="rect">
@@ -21430,13 +21422,13 @@
             <a:r>
               <a:rPr lang="en-US" sz="1300" b="1" dirty="0">
                 <a:solidFill>
-                  <a:srgbClr val="9D174D"/>
+                  <a:srgbClr val="0F766E"/>
                 </a:solidFill>
                 <a:latin typeface="Trebuchet MS" pitchFamily="34" charset="0"/>
                 <a:ea typeface="Trebuchet MS" pitchFamily="34" charset="-122"/>
                 <a:cs typeface="Trebuchet MS" pitchFamily="34" charset="-120"/>
               </a:rPr>
-              <a:t>ics</a:t>
+              <a:t>phon</a:t>
             </a:r>
             <a:endParaRPr lang="en-US" sz="1300" dirty="0"/>
           </a:p>
@@ -21444,13 +21436,13 @@
       </p:sp>
       <p:sp>
         <p:nvSpPr>
-          <p:cNvPr id="21" name="Text 19"/>
-          <p:cNvSpPr/>
-          <p:nvPr/>
-        </p:nvSpPr>
-        <p:spPr>
-          <a:xfrm>
-            <a:off x="5803392" y="2569464"/>
+          <p:cNvPr id="22" name="Text 20"/>
+          <p:cNvSpPr/>
+          <p:nvPr/>
+        </p:nvSpPr>
+        <p:spPr>
+          <a:xfrm>
+            <a:off x="4370832" y="2569464"/>
             <a:ext cx="1828800" cy="201168"/>
           </a:xfrm>
           <a:prstGeom prst="rect">
@@ -21475,7 +21467,7 @@
                 <a:ea typeface="Calibri" pitchFamily="34" charset="-122"/>
                 <a:cs typeface="Calibri" pitchFamily="34" charset="-120"/>
               </a:rPr>
-              <a:t>study or system of</a:t>
+              <a:t>sound</a:t>
             </a:r>
             <a:endParaRPr lang="en-US" sz="850" dirty="0"/>
           </a:p>
@@ -21483,7 +21475,119 @@
       </p:sp>
       <p:sp>
         <p:nvSpPr>
-          <p:cNvPr id="22" name="Shape 20"/>
+          <p:cNvPr id="23" name="Shape 21"/>
+          <p:cNvSpPr/>
+          <p:nvPr/>
+        </p:nvSpPr>
+        <p:spPr>
+          <a:xfrm>
+            <a:off x="6519672" y="2258568"/>
+            <a:ext cx="1828800" cy="292608"/>
+          </a:xfrm>
+          <a:prstGeom prst="rect">
+            <a:avLst>
+              <a:gd name="adj" fmla="val 25000"/>
+            </a:avLst>
+          </a:prstGeom>
+          <a:solidFill>
+            <a:srgbClr val="FCE7F3"/>
+          </a:solidFill>
+          <a:ln w="19050">
+            <a:solidFill>
+              <a:srgbClr val="DB2777"/>
+            </a:solidFill>
+            <a:prstDash val="solid"/>
+          </a:ln>
+          <a:effectLst>
+            <a:outerShdw sx="100000" sy="100000" kx="0" ky="0" algn="bl" rotWithShape="0" blurRad="101600" dist="38100" dir="8100000">
+              <a:srgbClr val="000000">
+                <a:alpha val="12000"/>
+              </a:srgbClr>
+            </a:outerShdw>
+          </a:effectLst>
+        </p:spPr>
+      </p:sp>
+      <p:sp>
+        <p:nvSpPr>
+          <p:cNvPr id="24" name="Text 22"/>
+          <p:cNvSpPr/>
+          <p:nvPr/>
+        </p:nvSpPr>
+        <p:spPr>
+          <a:xfrm>
+            <a:off x="6519672" y="2258568"/>
+            <a:ext cx="1828800" cy="292608"/>
+          </a:xfrm>
+          <a:prstGeom prst="rect">
+            <a:avLst/>
+          </a:prstGeom>
+          <a:noFill/>
+          <a:ln/>
+        </p:spPr>
+        <p:txBody>
+          <a:bodyPr wrap="square" lIns="0" tIns="0" rIns="0" bIns="0" rtlCol="0" anchor="ctr"/>
+          <a:lstStyle/>
+          <a:p>
+            <a:pPr algn="ctr" indent="0" marL="0">
+              <a:buNone/>
+            </a:pPr>
+            <a:r>
+              <a:rPr lang="en-US" sz="1300" b="1" dirty="0">
+                <a:solidFill>
+                  <a:srgbClr val="9D174D"/>
+                </a:solidFill>
+                <a:latin typeface="Trebuchet MS" pitchFamily="34" charset="0"/>
+                <a:ea typeface="Trebuchet MS" pitchFamily="34" charset="-122"/>
+                <a:cs typeface="Trebuchet MS" pitchFamily="34" charset="-120"/>
+              </a:rPr>
+              <a:t>y</a:t>
+            </a:r>
+            <a:endParaRPr lang="en-US" sz="1300" dirty="0"/>
+          </a:p>
+        </p:txBody>
+      </p:sp>
+      <p:sp>
+        <p:nvSpPr>
+          <p:cNvPr id="25" name="Text 23"/>
+          <p:cNvSpPr/>
+          <p:nvPr/>
+        </p:nvSpPr>
+        <p:spPr>
+          <a:xfrm>
+            <a:off x="6519672" y="2569464"/>
+            <a:ext cx="1828800" cy="201168"/>
+          </a:xfrm>
+          <a:prstGeom prst="rect">
+            <a:avLst/>
+          </a:prstGeom>
+          <a:noFill/>
+          <a:ln/>
+        </p:spPr>
+        <p:txBody>
+          <a:bodyPr wrap="square" lIns="0" tIns="0" rIns="0" bIns="0" rtlCol="0" anchor="t"/>
+          <a:lstStyle/>
+          <a:p>
+            <a:pPr algn="ctr" indent="0" marL="0">
+              <a:buNone/>
+            </a:pPr>
+            <a:r>
+              <a:rPr lang="en-US" sz="850" dirty="0">
+                <a:solidFill>
+                  <a:srgbClr val="475569"/>
+                </a:solidFill>
+                <a:latin typeface="Calibri" pitchFamily="34" charset="0"/>
+                <a:ea typeface="Calibri" pitchFamily="34" charset="-122"/>
+                <a:cs typeface="Calibri" pitchFamily="34" charset="-120"/>
+              </a:rPr>
+              <a:t>noun-forming suffix</a:t>
+            </a:r>
+            <a:endParaRPr lang="en-US" sz="850" dirty="0"/>
+          </a:p>
+        </p:txBody>
+      </p:sp>
+      <p:sp>
+        <p:nvSpPr>
+          <p:cNvPr id="26" name="Shape 24"/>
           <p:cNvSpPr/>
           <p:nvPr/>
         </p:nvSpPr>
@@ -21510,7 +21614,7 @@
       </p:sp>
       <p:sp>
         <p:nvSpPr>
-          <p:cNvPr id="23" name="Text 21"/>
+          <p:cNvPr id="27" name="Text 25"/>
           <p:cNvSpPr/>
           <p:nvPr/>
         </p:nvSpPr>
@@ -21549,7 +21653,7 @@
       </p:sp>
       <p:sp>
         <p:nvSpPr>
-          <p:cNvPr id="24" name="Shape 22"/>
+          <p:cNvPr id="28" name="Shape 26"/>
           <p:cNvSpPr/>
           <p:nvPr/>
         </p:nvSpPr>
@@ -21576,13 +21680,13 @@
       </p:sp>
       <p:sp>
         <p:nvSpPr>
-          <p:cNvPr id="25" name="Shape 23"/>
-          <p:cNvSpPr/>
-          <p:nvPr/>
-        </p:nvSpPr>
-        <p:spPr>
-          <a:xfrm>
-            <a:off x="2999232" y="3364992"/>
+          <p:cNvPr id="29" name="Shape 27"/>
+          <p:cNvSpPr/>
+          <p:nvPr/>
+        </p:nvSpPr>
+        <p:spPr>
+          <a:xfrm>
+            <a:off x="2313432" y="3364992"/>
             <a:ext cx="1645920" cy="475488"/>
           </a:xfrm>
           <a:prstGeom prst="rect">
@@ -21603,13 +21707,13 @@
       </p:sp>
       <p:sp>
         <p:nvSpPr>
-          <p:cNvPr id="26" name="Text 24"/>
-          <p:cNvSpPr/>
-          <p:nvPr/>
-        </p:nvSpPr>
-        <p:spPr>
-          <a:xfrm>
-            <a:off x="2999232" y="3364992"/>
+          <p:cNvPr id="30" name="Text 28"/>
+          <p:cNvSpPr/>
+          <p:nvPr/>
+        </p:nvSpPr>
+        <p:spPr>
+          <a:xfrm>
+            <a:off x="2313432" y="3364992"/>
             <a:ext cx="1645920" cy="475488"/>
           </a:xfrm>
           <a:prstGeom prst="rect">
@@ -21634,7 +21738,7 @@
                 <a:ea typeface="Trebuchet MS" pitchFamily="34" charset="-122"/>
                 <a:cs typeface="Trebuchet MS" pitchFamily="34" charset="-120"/>
               </a:rPr>
-              <a:t>phon</a:t>
+              <a:t>sym</a:t>
             </a:r>
             <a:endParaRPr lang="en-US" sz="1400" dirty="0"/>
           </a:p>
@@ -21642,14 +21746,14 @@
       </p:sp>
       <p:sp>
         <p:nvSpPr>
-          <p:cNvPr id="27" name="Text 25"/>
-          <p:cNvSpPr/>
-          <p:nvPr/>
-        </p:nvSpPr>
-        <p:spPr>
-          <a:xfrm>
-            <a:off x="4645152" y="3364992"/>
-            <a:ext cx="1097280" cy="475488"/>
+          <p:cNvPr id="31" name="Text 29"/>
+          <p:cNvSpPr/>
+          <p:nvPr/>
+        </p:nvSpPr>
+        <p:spPr>
+          <a:xfrm>
+            <a:off x="3959352" y="3364992"/>
+            <a:ext cx="411480" cy="475488"/>
           </a:xfrm>
           <a:prstGeom prst="rect">
             <a:avLst/>
@@ -21681,13 +21785,13 @@
       </p:sp>
       <p:sp>
         <p:nvSpPr>
-          <p:cNvPr id="28" name="Shape 26"/>
-          <p:cNvSpPr/>
-          <p:nvPr/>
-        </p:nvSpPr>
-        <p:spPr>
-          <a:xfrm>
-            <a:off x="5742432" y="3364992"/>
+          <p:cNvPr id="32" name="Shape 30"/>
+          <p:cNvSpPr/>
+          <p:nvPr/>
+        </p:nvSpPr>
+        <p:spPr>
+          <a:xfrm>
+            <a:off x="4370832" y="3364992"/>
             <a:ext cx="1645920" cy="475488"/>
           </a:xfrm>
           <a:prstGeom prst="rect">
@@ -21708,13 +21812,13 @@
       </p:sp>
       <p:sp>
         <p:nvSpPr>
-          <p:cNvPr id="29" name="Text 27"/>
-          <p:cNvSpPr/>
-          <p:nvPr/>
-        </p:nvSpPr>
-        <p:spPr>
-          <a:xfrm>
-            <a:off x="5742432" y="3364992"/>
+          <p:cNvPr id="33" name="Text 31"/>
+          <p:cNvSpPr/>
+          <p:nvPr/>
+        </p:nvSpPr>
+        <p:spPr>
+          <a:xfrm>
+            <a:off x="4370832" y="3364992"/>
             <a:ext cx="1645920" cy="475488"/>
           </a:xfrm>
           <a:prstGeom prst="rect">
@@ -21739,7 +21843,7 @@
                 <a:ea typeface="Trebuchet MS" pitchFamily="34" charset="-122"/>
                 <a:cs typeface="Trebuchet MS" pitchFamily="34" charset="-120"/>
               </a:rPr>
-              <a:t>ics</a:t>
+              <a:t>pho</a:t>
             </a:r>
             <a:endParaRPr lang="en-US" sz="1400" dirty="0"/>
           </a:p>
@@ -21747,7 +21851,112 @@
       </p:sp>
       <p:sp>
         <p:nvSpPr>
-          <p:cNvPr id="30" name="Shape 28"/>
+          <p:cNvPr id="34" name="Text 32"/>
+          <p:cNvSpPr/>
+          <p:nvPr/>
+        </p:nvSpPr>
+        <p:spPr>
+          <a:xfrm>
+            <a:off x="6016752" y="3364992"/>
+            <a:ext cx="411480" cy="475488"/>
+          </a:xfrm>
+          <a:prstGeom prst="rect">
+            <a:avLst/>
+          </a:prstGeom>
+          <a:noFill/>
+          <a:ln/>
+        </p:spPr>
+        <p:txBody>
+          <a:bodyPr wrap="square" lIns="0" tIns="0" rIns="0" bIns="0" rtlCol="0" anchor="ctr"/>
+          <a:lstStyle/>
+          <a:p>
+            <a:pPr algn="ctr" indent="0" marL="0">
+              <a:buNone/>
+            </a:pPr>
+            <a:r>
+              <a:rPr lang="en-US" sz="1600" b="1" dirty="0">
+                <a:solidFill>
+                  <a:srgbClr val="0D9488"/>
+                </a:solidFill>
+                <a:latin typeface="Trebuchet MS" pitchFamily="34" charset="0"/>
+                <a:ea typeface="Trebuchet MS" pitchFamily="34" charset="-122"/>
+                <a:cs typeface="Trebuchet MS" pitchFamily="34" charset="-120"/>
+              </a:rPr>
+              <a:t>·</a:t>
+            </a:r>
+            <a:endParaRPr lang="en-US" sz="1600" dirty="0"/>
+          </a:p>
+        </p:txBody>
+      </p:sp>
+      <p:sp>
+        <p:nvSpPr>
+          <p:cNvPr id="35" name="Shape 33"/>
+          <p:cNvSpPr/>
+          <p:nvPr/>
+        </p:nvSpPr>
+        <p:spPr>
+          <a:xfrm>
+            <a:off x="6428232" y="3364992"/>
+            <a:ext cx="1645920" cy="475488"/>
+          </a:xfrm>
+          <a:prstGeom prst="rect">
+            <a:avLst>
+              <a:gd name="adj" fmla="val 9615"/>
+            </a:avLst>
+          </a:prstGeom>
+          <a:solidFill>
+            <a:srgbClr val="FFFFFF"/>
+          </a:solidFill>
+          <a:ln w="12700">
+            <a:solidFill>
+              <a:srgbClr val="0D9488"/>
+            </a:solidFill>
+            <a:prstDash val="solid"/>
+          </a:ln>
+        </p:spPr>
+      </p:sp>
+      <p:sp>
+        <p:nvSpPr>
+          <p:cNvPr id="36" name="Text 34"/>
+          <p:cNvSpPr/>
+          <p:nvPr/>
+        </p:nvSpPr>
+        <p:spPr>
+          <a:xfrm>
+            <a:off x="6428232" y="3364992"/>
+            <a:ext cx="1645920" cy="475488"/>
+          </a:xfrm>
+          <a:prstGeom prst="rect">
+            <a:avLst/>
+          </a:prstGeom>
+          <a:noFill/>
+          <a:ln/>
+        </p:spPr>
+        <p:txBody>
+          <a:bodyPr wrap="square" lIns="0" tIns="0" rIns="0" bIns="0" rtlCol="0" anchor="ctr"/>
+          <a:lstStyle/>
+          <a:p>
+            <a:pPr algn="ctr" indent="0" marL="0">
+              <a:buNone/>
+            </a:pPr>
+            <a:r>
+              <a:rPr lang="en-US" sz="1400" b="1" dirty="0">
+                <a:solidFill>
+                  <a:srgbClr val="0D9488"/>
+                </a:solidFill>
+                <a:latin typeface="Trebuchet MS" pitchFamily="34" charset="0"/>
+                <a:ea typeface="Trebuchet MS" pitchFamily="34" charset="-122"/>
+                <a:cs typeface="Trebuchet MS" pitchFamily="34" charset="-120"/>
+              </a:rPr>
+              <a:t>ny</a:t>
+            </a:r>
+            <a:endParaRPr lang="en-US" sz="1400" dirty="0"/>
+          </a:p>
+        </p:txBody>
+      </p:sp>
+      <p:sp>
+        <p:nvSpPr>
+          <p:cNvPr id="37" name="Shape 35"/>
           <p:cNvSpPr/>
           <p:nvPr/>
         </p:nvSpPr>
@@ -21774,7 +21983,7 @@
       </p:sp>
       <p:sp>
         <p:nvSpPr>
-          <p:cNvPr id="31" name="Text 29"/>
+          <p:cNvPr id="38" name="Text 36"/>
           <p:cNvSpPr/>
           <p:nvPr/>
         </p:nvSpPr>
@@ -21813,7 +22022,7 @@
       </p:sp>
       <p:sp>
         <p:nvSpPr>
-          <p:cNvPr id="32" name="Shape 30"/>
+          <p:cNvPr id="39" name="Shape 37"/>
           <p:cNvSpPr/>
           <p:nvPr/>
         </p:nvSpPr>
@@ -21840,7 +22049,7 @@
       </p:sp>
       <p:sp>
         <p:nvSpPr>
-          <p:cNvPr id="33" name="Text 31"/>
+          <p:cNvPr id="40" name="Text 38"/>
           <p:cNvSpPr/>
           <p:nvPr/>
         </p:nvSpPr>
@@ -22302,7 +22511,7 @@
                 <a:ea typeface="Trebuchet MS" pitchFamily="34" charset="-122"/>
                 <a:cs typeface="Trebuchet MS" pitchFamily="34" charset="-120"/>
               </a:rPr>
-              <a:t>phonics</a:t>
+              <a:t>symphony</a:t>
             </a:r>
             <a:endParaRPr lang="en-US" sz="2800" dirty="0"/>
           </a:p>
@@ -22382,7 +22591,7 @@
         </p:nvSpPr>
         <p:spPr>
           <a:xfrm>
-            <a:off x="2938272" y="2258568"/>
+            <a:off x="2221992" y="2258568"/>
             <a:ext cx="1828800" cy="292608"/>
           </a:xfrm>
           <a:prstGeom prst="rect">
@@ -22391,11 +22600,11 @@
             </a:avLst>
           </a:prstGeom>
           <a:solidFill>
-            <a:srgbClr val="CCFBF1"/>
+            <a:srgbClr val="DDD6FE"/>
           </a:solidFill>
           <a:ln w="19050">
             <a:solidFill>
-              <a:srgbClr val="0D9488"/>
+              <a:srgbClr val="7C3AED"/>
             </a:solidFill>
             <a:prstDash val="solid"/>
           </a:ln>
@@ -22416,7 +22625,7 @@
         </p:nvSpPr>
         <p:spPr>
           <a:xfrm>
-            <a:off x="2938272" y="2258568"/>
+            <a:off x="2221992" y="2258568"/>
             <a:ext cx="1828800" cy="292608"/>
           </a:xfrm>
           <a:prstGeom prst="rect">
@@ -22435,13 +22644,13 @@
             <a:r>
               <a:rPr lang="en-US" sz="1300" b="1" dirty="0">
                 <a:solidFill>
-                  <a:srgbClr val="0F766E"/>
+                  <a:srgbClr val="4C1D95"/>
                 </a:solidFill>
                 <a:latin typeface="Trebuchet MS" pitchFamily="34" charset="0"/>
                 <a:ea typeface="Trebuchet MS" pitchFamily="34" charset="-122"/>
                 <a:cs typeface="Trebuchet MS" pitchFamily="34" charset="-120"/>
               </a:rPr>
-              <a:t>phon</a:t>
+              <a:t>sym</a:t>
             </a:r>
             <a:endParaRPr lang="en-US" sz="1300" dirty="0"/>
           </a:p>
@@ -22455,7 +22664,7 @@
         </p:nvSpPr>
         <p:spPr>
           <a:xfrm>
-            <a:off x="2938272" y="2569464"/>
+            <a:off x="2221992" y="2569464"/>
             <a:ext cx="1828800" cy="201168"/>
           </a:xfrm>
           <a:prstGeom prst="rect">
@@ -22480,7 +22689,7 @@
                 <a:ea typeface="Calibri" pitchFamily="34" charset="-122"/>
                 <a:cs typeface="Calibri" pitchFamily="34" charset="-120"/>
               </a:rPr>
-              <a:t>sound</a:t>
+              <a:t>together</a:t>
             </a:r>
             <a:endParaRPr lang="en-US" sz="850" dirty="0"/>
           </a:p>
@@ -22488,13 +22697,52 @@
       </p:sp>
       <p:sp>
         <p:nvSpPr>
-          <p:cNvPr id="19" name="Shape 17"/>
-          <p:cNvSpPr/>
-          <p:nvPr/>
-        </p:nvSpPr>
-        <p:spPr>
-          <a:xfrm>
-            <a:off x="5803392" y="2258568"/>
+          <p:cNvPr id="19" name="Text 17"/>
+          <p:cNvSpPr/>
+          <p:nvPr/>
+        </p:nvSpPr>
+        <p:spPr>
+          <a:xfrm>
+            <a:off x="2221992" y="2752344"/>
+            <a:ext cx="1828800" cy="182880"/>
+          </a:xfrm>
+          <a:prstGeom prst="rect">
+            <a:avLst/>
+          </a:prstGeom>
+          <a:noFill/>
+          <a:ln/>
+        </p:spPr>
+        <p:txBody>
+          <a:bodyPr wrap="square" lIns="0" tIns="0" rIns="0" bIns="0" rtlCol="0" anchor="t"/>
+          <a:lstStyle/>
+          <a:p>
+            <a:pPr algn="ctr" indent="0" marL="0">
+              <a:buNone/>
+            </a:pPr>
+            <a:r>
+              <a:rPr lang="en-US" sz="700" i="1" dirty="0">
+                <a:solidFill>
+                  <a:srgbClr val="94A3B8"/>
+                </a:solidFill>
+                <a:latin typeface="Calibri" pitchFamily="34" charset="0"/>
+                <a:ea typeface="Calibri" pitchFamily="34" charset="-122"/>
+                <a:cs typeface="Calibri" pitchFamily="34" charset="-120"/>
+              </a:rPr>
+              <a:t>syn → sym before 'ph'</a:t>
+            </a:r>
+            <a:endParaRPr lang="en-US" sz="700" dirty="0"/>
+          </a:p>
+        </p:txBody>
+      </p:sp>
+      <p:sp>
+        <p:nvSpPr>
+          <p:cNvPr id="20" name="Shape 18"/>
+          <p:cNvSpPr/>
+          <p:nvPr/>
+        </p:nvSpPr>
+        <p:spPr>
+          <a:xfrm>
+            <a:off x="4370832" y="2258568"/>
             <a:ext cx="1828800" cy="292608"/>
           </a:xfrm>
           <a:prstGeom prst="rect">
@@ -22503,11 +22751,11 @@
             </a:avLst>
           </a:prstGeom>
           <a:solidFill>
-            <a:srgbClr val="FCE7F3"/>
+            <a:srgbClr val="CCFBF1"/>
           </a:solidFill>
           <a:ln w="19050">
             <a:solidFill>
-              <a:srgbClr val="DB2777"/>
+              <a:srgbClr val="0D9488"/>
             </a:solidFill>
             <a:prstDash val="solid"/>
           </a:ln>
@@ -22522,13 +22770,13 @@
       </p:sp>
       <p:sp>
         <p:nvSpPr>
-          <p:cNvPr id="20" name="Text 18"/>
-          <p:cNvSpPr/>
-          <p:nvPr/>
-        </p:nvSpPr>
-        <p:spPr>
-          <a:xfrm>
-            <a:off x="5803392" y="2258568"/>
+          <p:cNvPr id="21" name="Text 19"/>
+          <p:cNvSpPr/>
+          <p:nvPr/>
+        </p:nvSpPr>
+        <p:spPr>
+          <a:xfrm>
+            <a:off x="4370832" y="2258568"/>
             <a:ext cx="1828800" cy="292608"/>
           </a:xfrm>
           <a:prstGeom prst="rect">
@@ -22547,13 +22795,13 @@
             <a:r>
               <a:rPr lang="en-US" sz="1300" b="1" dirty="0">
                 <a:solidFill>
-                  <a:srgbClr val="9D174D"/>
+                  <a:srgbClr val="0F766E"/>
                 </a:solidFill>
                 <a:latin typeface="Trebuchet MS" pitchFamily="34" charset="0"/>
                 <a:ea typeface="Trebuchet MS" pitchFamily="34" charset="-122"/>
                 <a:cs typeface="Trebuchet MS" pitchFamily="34" charset="-120"/>
               </a:rPr>
-              <a:t>ics</a:t>
+              <a:t>phon</a:t>
             </a:r>
             <a:endParaRPr lang="en-US" sz="1300" dirty="0"/>
           </a:p>
@@ -22561,13 +22809,13 @@
       </p:sp>
       <p:sp>
         <p:nvSpPr>
-          <p:cNvPr id="21" name="Text 19"/>
-          <p:cNvSpPr/>
-          <p:nvPr/>
-        </p:nvSpPr>
-        <p:spPr>
-          <a:xfrm>
-            <a:off x="5803392" y="2569464"/>
+          <p:cNvPr id="22" name="Text 20"/>
+          <p:cNvSpPr/>
+          <p:nvPr/>
+        </p:nvSpPr>
+        <p:spPr>
+          <a:xfrm>
+            <a:off x="4370832" y="2569464"/>
             <a:ext cx="1828800" cy="201168"/>
           </a:xfrm>
           <a:prstGeom prst="rect">
@@ -22592,7 +22840,7 @@
                 <a:ea typeface="Calibri" pitchFamily="34" charset="-122"/>
                 <a:cs typeface="Calibri" pitchFamily="34" charset="-120"/>
               </a:rPr>
-              <a:t>study or system of</a:t>
+              <a:t>sound</a:t>
             </a:r>
             <a:endParaRPr lang="en-US" sz="850" dirty="0"/>
           </a:p>
@@ -22600,7 +22848,119 @@
       </p:sp>
       <p:sp>
         <p:nvSpPr>
-          <p:cNvPr id="22" name="Shape 20"/>
+          <p:cNvPr id="23" name="Shape 21"/>
+          <p:cNvSpPr/>
+          <p:nvPr/>
+        </p:nvSpPr>
+        <p:spPr>
+          <a:xfrm>
+            <a:off x="6519672" y="2258568"/>
+            <a:ext cx="1828800" cy="292608"/>
+          </a:xfrm>
+          <a:prstGeom prst="rect">
+            <a:avLst>
+              <a:gd name="adj" fmla="val 25000"/>
+            </a:avLst>
+          </a:prstGeom>
+          <a:solidFill>
+            <a:srgbClr val="FCE7F3"/>
+          </a:solidFill>
+          <a:ln w="19050">
+            <a:solidFill>
+              <a:srgbClr val="DB2777"/>
+            </a:solidFill>
+            <a:prstDash val="solid"/>
+          </a:ln>
+          <a:effectLst>
+            <a:outerShdw sx="100000" sy="100000" kx="0" ky="0" algn="bl" rotWithShape="0" blurRad="101600" dist="38100" dir="8100000">
+              <a:srgbClr val="000000">
+                <a:alpha val="12000"/>
+              </a:srgbClr>
+            </a:outerShdw>
+          </a:effectLst>
+        </p:spPr>
+      </p:sp>
+      <p:sp>
+        <p:nvSpPr>
+          <p:cNvPr id="24" name="Text 22"/>
+          <p:cNvSpPr/>
+          <p:nvPr/>
+        </p:nvSpPr>
+        <p:spPr>
+          <a:xfrm>
+            <a:off x="6519672" y="2258568"/>
+            <a:ext cx="1828800" cy="292608"/>
+          </a:xfrm>
+          <a:prstGeom prst="rect">
+            <a:avLst/>
+          </a:prstGeom>
+          <a:noFill/>
+          <a:ln/>
+        </p:spPr>
+        <p:txBody>
+          <a:bodyPr wrap="square" lIns="0" tIns="0" rIns="0" bIns="0" rtlCol="0" anchor="ctr"/>
+          <a:lstStyle/>
+          <a:p>
+            <a:pPr algn="ctr" indent="0" marL="0">
+              <a:buNone/>
+            </a:pPr>
+            <a:r>
+              <a:rPr lang="en-US" sz="1300" b="1" dirty="0">
+                <a:solidFill>
+                  <a:srgbClr val="9D174D"/>
+                </a:solidFill>
+                <a:latin typeface="Trebuchet MS" pitchFamily="34" charset="0"/>
+                <a:ea typeface="Trebuchet MS" pitchFamily="34" charset="-122"/>
+                <a:cs typeface="Trebuchet MS" pitchFamily="34" charset="-120"/>
+              </a:rPr>
+              <a:t>y</a:t>
+            </a:r>
+            <a:endParaRPr lang="en-US" sz="1300" dirty="0"/>
+          </a:p>
+        </p:txBody>
+      </p:sp>
+      <p:sp>
+        <p:nvSpPr>
+          <p:cNvPr id="25" name="Text 23"/>
+          <p:cNvSpPr/>
+          <p:nvPr/>
+        </p:nvSpPr>
+        <p:spPr>
+          <a:xfrm>
+            <a:off x="6519672" y="2569464"/>
+            <a:ext cx="1828800" cy="201168"/>
+          </a:xfrm>
+          <a:prstGeom prst="rect">
+            <a:avLst/>
+          </a:prstGeom>
+          <a:noFill/>
+          <a:ln/>
+        </p:spPr>
+        <p:txBody>
+          <a:bodyPr wrap="square" lIns="0" tIns="0" rIns="0" bIns="0" rtlCol="0" anchor="t"/>
+          <a:lstStyle/>
+          <a:p>
+            <a:pPr algn="ctr" indent="0" marL="0">
+              <a:buNone/>
+            </a:pPr>
+            <a:r>
+              <a:rPr lang="en-US" sz="850" dirty="0">
+                <a:solidFill>
+                  <a:srgbClr val="475569"/>
+                </a:solidFill>
+                <a:latin typeface="Calibri" pitchFamily="34" charset="0"/>
+                <a:ea typeface="Calibri" pitchFamily="34" charset="-122"/>
+                <a:cs typeface="Calibri" pitchFamily="34" charset="-120"/>
+              </a:rPr>
+              <a:t>noun-forming suffix</a:t>
+            </a:r>
+            <a:endParaRPr lang="en-US" sz="850" dirty="0"/>
+          </a:p>
+        </p:txBody>
+      </p:sp>
+      <p:sp>
+        <p:nvSpPr>
+          <p:cNvPr id="26" name="Shape 24"/>
           <p:cNvSpPr/>
           <p:nvPr/>
         </p:nvSpPr>
@@ -22627,7 +22987,7 @@
       </p:sp>
       <p:sp>
         <p:nvSpPr>
-          <p:cNvPr id="23" name="Text 21"/>
+          <p:cNvPr id="27" name="Text 25"/>
           <p:cNvSpPr/>
           <p:nvPr/>
         </p:nvSpPr>
@@ -22666,7 +23026,7 @@
       </p:sp>
       <p:sp>
         <p:nvSpPr>
-          <p:cNvPr id="24" name="Shape 22"/>
+          <p:cNvPr id="28" name="Shape 26"/>
           <p:cNvSpPr/>
           <p:nvPr/>
         </p:nvSpPr>
@@ -22693,13 +23053,13 @@
       </p:sp>
       <p:sp>
         <p:nvSpPr>
-          <p:cNvPr id="25" name="Shape 23"/>
-          <p:cNvSpPr/>
-          <p:nvPr/>
-        </p:nvSpPr>
-        <p:spPr>
-          <a:xfrm>
-            <a:off x="2999232" y="3364992"/>
+          <p:cNvPr id="29" name="Shape 27"/>
+          <p:cNvSpPr/>
+          <p:nvPr/>
+        </p:nvSpPr>
+        <p:spPr>
+          <a:xfrm>
+            <a:off x="2313432" y="3364992"/>
             <a:ext cx="1645920" cy="475488"/>
           </a:xfrm>
           <a:prstGeom prst="rect">
@@ -22720,13 +23080,13 @@
       </p:sp>
       <p:sp>
         <p:nvSpPr>
-          <p:cNvPr id="26" name="Text 24"/>
-          <p:cNvSpPr/>
-          <p:nvPr/>
-        </p:nvSpPr>
-        <p:spPr>
-          <a:xfrm>
-            <a:off x="2999232" y="3364992"/>
+          <p:cNvPr id="30" name="Text 28"/>
+          <p:cNvSpPr/>
+          <p:nvPr/>
+        </p:nvSpPr>
+        <p:spPr>
+          <a:xfrm>
+            <a:off x="2313432" y="3364992"/>
             <a:ext cx="1645920" cy="475488"/>
           </a:xfrm>
           <a:prstGeom prst="rect">
@@ -22751,7 +23111,7 @@
                 <a:ea typeface="Trebuchet MS" pitchFamily="34" charset="-122"/>
                 <a:cs typeface="Trebuchet MS" pitchFamily="34" charset="-120"/>
               </a:rPr>
-              <a:t>phon</a:t>
+              <a:t>sym</a:t>
             </a:r>
             <a:endParaRPr lang="en-US" sz="1400" dirty="0"/>
           </a:p>
@@ -22759,14 +23119,14 @@
       </p:sp>
       <p:sp>
         <p:nvSpPr>
-          <p:cNvPr id="27" name="Text 25"/>
-          <p:cNvSpPr/>
-          <p:nvPr/>
-        </p:nvSpPr>
-        <p:spPr>
-          <a:xfrm>
-            <a:off x="4645152" y="3364992"/>
-            <a:ext cx="1097280" cy="475488"/>
+          <p:cNvPr id="31" name="Text 29"/>
+          <p:cNvSpPr/>
+          <p:nvPr/>
+        </p:nvSpPr>
+        <p:spPr>
+          <a:xfrm>
+            <a:off x="3959352" y="3364992"/>
+            <a:ext cx="411480" cy="475488"/>
           </a:xfrm>
           <a:prstGeom prst="rect">
             <a:avLst/>
@@ -22798,13 +23158,13 @@
       </p:sp>
       <p:sp>
         <p:nvSpPr>
-          <p:cNvPr id="28" name="Shape 26"/>
-          <p:cNvSpPr/>
-          <p:nvPr/>
-        </p:nvSpPr>
-        <p:spPr>
-          <a:xfrm>
-            <a:off x="5742432" y="3364992"/>
+          <p:cNvPr id="32" name="Shape 30"/>
+          <p:cNvSpPr/>
+          <p:nvPr/>
+        </p:nvSpPr>
+        <p:spPr>
+          <a:xfrm>
+            <a:off x="4370832" y="3364992"/>
             <a:ext cx="1645920" cy="475488"/>
           </a:xfrm>
           <a:prstGeom prst="rect">
@@ -22825,13 +23185,13 @@
       </p:sp>
       <p:sp>
         <p:nvSpPr>
-          <p:cNvPr id="29" name="Text 27"/>
-          <p:cNvSpPr/>
-          <p:nvPr/>
-        </p:nvSpPr>
-        <p:spPr>
-          <a:xfrm>
-            <a:off x="5742432" y="3364992"/>
+          <p:cNvPr id="33" name="Text 31"/>
+          <p:cNvSpPr/>
+          <p:nvPr/>
+        </p:nvSpPr>
+        <p:spPr>
+          <a:xfrm>
+            <a:off x="4370832" y="3364992"/>
             <a:ext cx="1645920" cy="475488"/>
           </a:xfrm>
           <a:prstGeom prst="rect">
@@ -22856,7 +23216,7 @@
                 <a:ea typeface="Trebuchet MS" pitchFamily="34" charset="-122"/>
                 <a:cs typeface="Trebuchet MS" pitchFamily="34" charset="-120"/>
               </a:rPr>
-              <a:t>ics</a:t>
+              <a:t>pho</a:t>
             </a:r>
             <a:endParaRPr lang="en-US" sz="1400" dirty="0"/>
           </a:p>
@@ -22864,7 +23224,112 @@
       </p:sp>
       <p:sp>
         <p:nvSpPr>
-          <p:cNvPr id="30" name="Shape 28"/>
+          <p:cNvPr id="34" name="Text 32"/>
+          <p:cNvSpPr/>
+          <p:nvPr/>
+        </p:nvSpPr>
+        <p:spPr>
+          <a:xfrm>
+            <a:off x="6016752" y="3364992"/>
+            <a:ext cx="411480" cy="475488"/>
+          </a:xfrm>
+          <a:prstGeom prst="rect">
+            <a:avLst/>
+          </a:prstGeom>
+          <a:noFill/>
+          <a:ln/>
+        </p:spPr>
+        <p:txBody>
+          <a:bodyPr wrap="square" lIns="0" tIns="0" rIns="0" bIns="0" rtlCol="0" anchor="ctr"/>
+          <a:lstStyle/>
+          <a:p>
+            <a:pPr algn="ctr" indent="0" marL="0">
+              <a:buNone/>
+            </a:pPr>
+            <a:r>
+              <a:rPr lang="en-US" sz="1600" b="1" dirty="0">
+                <a:solidFill>
+                  <a:srgbClr val="0D9488"/>
+                </a:solidFill>
+                <a:latin typeface="Trebuchet MS" pitchFamily="34" charset="0"/>
+                <a:ea typeface="Trebuchet MS" pitchFamily="34" charset="-122"/>
+                <a:cs typeface="Trebuchet MS" pitchFamily="34" charset="-120"/>
+              </a:rPr>
+              <a:t>·</a:t>
+            </a:r>
+            <a:endParaRPr lang="en-US" sz="1600" dirty="0"/>
+          </a:p>
+        </p:txBody>
+      </p:sp>
+      <p:sp>
+        <p:nvSpPr>
+          <p:cNvPr id="35" name="Shape 33"/>
+          <p:cNvSpPr/>
+          <p:nvPr/>
+        </p:nvSpPr>
+        <p:spPr>
+          <a:xfrm>
+            <a:off x="6428232" y="3364992"/>
+            <a:ext cx="1645920" cy="475488"/>
+          </a:xfrm>
+          <a:prstGeom prst="rect">
+            <a:avLst>
+              <a:gd name="adj" fmla="val 9615"/>
+            </a:avLst>
+          </a:prstGeom>
+          <a:solidFill>
+            <a:srgbClr val="FFFFFF"/>
+          </a:solidFill>
+          <a:ln w="12700">
+            <a:solidFill>
+              <a:srgbClr val="0D9488"/>
+            </a:solidFill>
+            <a:prstDash val="solid"/>
+          </a:ln>
+        </p:spPr>
+      </p:sp>
+      <p:sp>
+        <p:nvSpPr>
+          <p:cNvPr id="36" name="Text 34"/>
+          <p:cNvSpPr/>
+          <p:nvPr/>
+        </p:nvSpPr>
+        <p:spPr>
+          <a:xfrm>
+            <a:off x="6428232" y="3364992"/>
+            <a:ext cx="1645920" cy="475488"/>
+          </a:xfrm>
+          <a:prstGeom prst="rect">
+            <a:avLst/>
+          </a:prstGeom>
+          <a:noFill/>
+          <a:ln/>
+        </p:spPr>
+        <p:txBody>
+          <a:bodyPr wrap="square" lIns="0" tIns="0" rIns="0" bIns="0" rtlCol="0" anchor="ctr"/>
+          <a:lstStyle/>
+          <a:p>
+            <a:pPr algn="ctr" indent="0" marL="0">
+              <a:buNone/>
+            </a:pPr>
+            <a:r>
+              <a:rPr lang="en-US" sz="1400" b="1" dirty="0">
+                <a:solidFill>
+                  <a:srgbClr val="0D9488"/>
+                </a:solidFill>
+                <a:latin typeface="Trebuchet MS" pitchFamily="34" charset="0"/>
+                <a:ea typeface="Trebuchet MS" pitchFamily="34" charset="-122"/>
+                <a:cs typeface="Trebuchet MS" pitchFamily="34" charset="-120"/>
+              </a:rPr>
+              <a:t>ny</a:t>
+            </a:r>
+            <a:endParaRPr lang="en-US" sz="1400" dirty="0"/>
+          </a:p>
+        </p:txBody>
+      </p:sp>
+      <p:sp>
+        <p:nvSpPr>
+          <p:cNvPr id="37" name="Shape 35"/>
           <p:cNvSpPr/>
           <p:nvPr/>
         </p:nvSpPr>
@@ -22891,7 +23356,7 @@
       </p:sp>
       <p:sp>
         <p:nvSpPr>
-          <p:cNvPr id="31" name="Text 29"/>
+          <p:cNvPr id="38" name="Text 36"/>
           <p:cNvSpPr/>
           <p:nvPr/>
         </p:nvSpPr>
@@ -22930,7 +23395,7 @@
       </p:sp>
       <p:sp>
         <p:nvSpPr>
-          <p:cNvPr id="32" name="Shape 30"/>
+          <p:cNvPr id="39" name="Shape 37"/>
           <p:cNvSpPr/>
           <p:nvPr/>
         </p:nvSpPr>
@@ -22957,13 +23422,13 @@
       </p:sp>
       <p:sp>
         <p:nvSpPr>
-          <p:cNvPr id="33" name="Shape 31"/>
-          <p:cNvSpPr/>
-          <p:nvPr/>
-        </p:nvSpPr>
-        <p:spPr>
-          <a:xfrm>
-            <a:off x="2254649" y="4169664"/>
+          <p:cNvPr id="40" name="Shape 38"/>
+          <p:cNvSpPr/>
+          <p:nvPr/>
+        </p:nvSpPr>
+        <p:spPr>
+          <a:xfrm>
+            <a:off x="2124837" y="4169664"/>
             <a:ext cx="685800" cy="384048"/>
           </a:xfrm>
           <a:prstGeom prst="rect">
@@ -22984,13 +23449,13 @@
       </p:sp>
       <p:sp>
         <p:nvSpPr>
-          <p:cNvPr id="34" name="Text 32"/>
-          <p:cNvSpPr/>
-          <p:nvPr/>
-        </p:nvSpPr>
-        <p:spPr>
-          <a:xfrm>
-            <a:off x="2254649" y="4169664"/>
+          <p:cNvPr id="41" name="Text 39"/>
+          <p:cNvSpPr/>
+          <p:nvPr/>
+        </p:nvSpPr>
+        <p:spPr>
+          <a:xfrm>
+            <a:off x="2124837" y="4169664"/>
             <a:ext cx="685800" cy="384048"/>
           </a:xfrm>
           <a:prstGeom prst="rect">
@@ -23015,6 +23480,204 @@
                 <a:ea typeface="Trebuchet MS" pitchFamily="34" charset="-122"/>
                 <a:cs typeface="Trebuchet MS" pitchFamily="34" charset="-120"/>
               </a:rPr>
+              <a:t>s</a:t>
+            </a:r>
+            <a:endParaRPr lang="en-US" sz="900" dirty="0"/>
+          </a:p>
+        </p:txBody>
+      </p:sp>
+      <p:sp>
+        <p:nvSpPr>
+          <p:cNvPr id="42" name="Shape 40"/>
+          <p:cNvSpPr/>
+          <p:nvPr/>
+        </p:nvSpPr>
+        <p:spPr>
+          <a:xfrm>
+            <a:off x="3033522" y="4169664"/>
+            <a:ext cx="685800" cy="384048"/>
+          </a:xfrm>
+          <a:prstGeom prst="rect">
+            <a:avLst>
+              <a:gd name="adj" fmla="val 9524"/>
+            </a:avLst>
+          </a:prstGeom>
+          <a:solidFill>
+            <a:srgbClr val="FFFFFF"/>
+          </a:solidFill>
+          <a:ln w="12700">
+            <a:solidFill>
+              <a:srgbClr val="DB2777"/>
+            </a:solidFill>
+            <a:prstDash val="solid"/>
+          </a:ln>
+        </p:spPr>
+      </p:sp>
+      <p:sp>
+        <p:nvSpPr>
+          <p:cNvPr id="43" name="Text 41"/>
+          <p:cNvSpPr/>
+          <p:nvPr/>
+        </p:nvSpPr>
+        <p:spPr>
+          <a:xfrm>
+            <a:off x="3033522" y="4169664"/>
+            <a:ext cx="685800" cy="384048"/>
+          </a:xfrm>
+          <a:prstGeom prst="rect">
+            <a:avLst/>
+          </a:prstGeom>
+          <a:noFill/>
+          <a:ln/>
+        </p:spPr>
+        <p:txBody>
+          <a:bodyPr wrap="square" lIns="0" tIns="0" rIns="0" bIns="0" rtlCol="0" anchor="ctr"/>
+          <a:lstStyle/>
+          <a:p>
+            <a:pPr algn="ctr" indent="0" marL="0">
+              <a:buNone/>
+            </a:pPr>
+            <a:r>
+              <a:rPr lang="en-US" sz="900" b="1" dirty="0">
+                <a:solidFill>
+                  <a:srgbClr val="9D174D"/>
+                </a:solidFill>
+                <a:latin typeface="Trebuchet MS" pitchFamily="34" charset="0"/>
+                <a:ea typeface="Trebuchet MS" pitchFamily="34" charset="-122"/>
+                <a:cs typeface="Trebuchet MS" pitchFamily="34" charset="-120"/>
+              </a:rPr>
+              <a:t>y</a:t>
+            </a:r>
+            <a:endParaRPr lang="en-US" sz="900" dirty="0"/>
+          </a:p>
+        </p:txBody>
+      </p:sp>
+      <p:sp>
+        <p:nvSpPr>
+          <p:cNvPr id="44" name="Shape 42"/>
+          <p:cNvSpPr/>
+          <p:nvPr/>
+        </p:nvSpPr>
+        <p:spPr>
+          <a:xfrm>
+            <a:off x="3942207" y="4169664"/>
+            <a:ext cx="685800" cy="384048"/>
+          </a:xfrm>
+          <a:prstGeom prst="rect">
+            <a:avLst>
+              <a:gd name="adj" fmla="val 9524"/>
+            </a:avLst>
+          </a:prstGeom>
+          <a:solidFill>
+            <a:srgbClr val="FFFFFF"/>
+          </a:solidFill>
+          <a:ln w="12700">
+            <a:solidFill>
+              <a:srgbClr val="DB2777"/>
+            </a:solidFill>
+            <a:prstDash val="solid"/>
+          </a:ln>
+        </p:spPr>
+      </p:sp>
+      <p:sp>
+        <p:nvSpPr>
+          <p:cNvPr id="45" name="Text 43"/>
+          <p:cNvSpPr/>
+          <p:nvPr/>
+        </p:nvSpPr>
+        <p:spPr>
+          <a:xfrm>
+            <a:off x="3942207" y="4169664"/>
+            <a:ext cx="685800" cy="384048"/>
+          </a:xfrm>
+          <a:prstGeom prst="rect">
+            <a:avLst/>
+          </a:prstGeom>
+          <a:noFill/>
+          <a:ln/>
+        </p:spPr>
+        <p:txBody>
+          <a:bodyPr wrap="square" lIns="0" tIns="0" rIns="0" bIns="0" rtlCol="0" anchor="ctr"/>
+          <a:lstStyle/>
+          <a:p>
+            <a:pPr algn="ctr" indent="0" marL="0">
+              <a:buNone/>
+            </a:pPr>
+            <a:r>
+              <a:rPr lang="en-US" sz="900" b="1" dirty="0">
+                <a:solidFill>
+                  <a:srgbClr val="9D174D"/>
+                </a:solidFill>
+                <a:latin typeface="Trebuchet MS" pitchFamily="34" charset="0"/>
+                <a:ea typeface="Trebuchet MS" pitchFamily="34" charset="-122"/>
+                <a:cs typeface="Trebuchet MS" pitchFamily="34" charset="-120"/>
+              </a:rPr>
+              <a:t>m</a:t>
+            </a:r>
+            <a:endParaRPr lang="en-US" sz="900" dirty="0"/>
+          </a:p>
+        </p:txBody>
+      </p:sp>
+      <p:sp>
+        <p:nvSpPr>
+          <p:cNvPr id="46" name="Shape 44"/>
+          <p:cNvSpPr/>
+          <p:nvPr/>
+        </p:nvSpPr>
+        <p:spPr>
+          <a:xfrm>
+            <a:off x="4850892" y="4169664"/>
+            <a:ext cx="685800" cy="384048"/>
+          </a:xfrm>
+          <a:prstGeom prst="rect">
+            <a:avLst>
+              <a:gd name="adj" fmla="val 9524"/>
+            </a:avLst>
+          </a:prstGeom>
+          <a:solidFill>
+            <a:srgbClr val="FFFFFF"/>
+          </a:solidFill>
+          <a:ln w="12700">
+            <a:solidFill>
+              <a:srgbClr val="DB2777"/>
+            </a:solidFill>
+            <a:prstDash val="solid"/>
+          </a:ln>
+        </p:spPr>
+      </p:sp>
+      <p:sp>
+        <p:nvSpPr>
+          <p:cNvPr id="47" name="Text 45"/>
+          <p:cNvSpPr/>
+          <p:nvPr/>
+        </p:nvSpPr>
+        <p:spPr>
+          <a:xfrm>
+            <a:off x="4850892" y="4169664"/>
+            <a:ext cx="685800" cy="384048"/>
+          </a:xfrm>
+          <a:prstGeom prst="rect">
+            <a:avLst/>
+          </a:prstGeom>
+          <a:noFill/>
+          <a:ln/>
+        </p:spPr>
+        <p:txBody>
+          <a:bodyPr wrap="square" lIns="0" tIns="0" rIns="0" bIns="0" rtlCol="0" anchor="ctr"/>
+          <a:lstStyle/>
+          <a:p>
+            <a:pPr algn="ctr" indent="0" marL="0">
+              <a:buNone/>
+            </a:pPr>
+            <a:r>
+              <a:rPr lang="en-US" sz="900" b="1" dirty="0">
+                <a:solidFill>
+                  <a:srgbClr val="9D174D"/>
+                </a:solidFill>
+                <a:latin typeface="Trebuchet MS" pitchFamily="34" charset="0"/>
+                <a:ea typeface="Trebuchet MS" pitchFamily="34" charset="-122"/>
+                <a:cs typeface="Trebuchet MS" pitchFamily="34" charset="-120"/>
+              </a:rPr>
               <a:t>ph</a:t>
             </a:r>
             <a:endParaRPr lang="en-US" sz="900" dirty="0"/>
@@ -23023,13 +23686,13 @@
       </p:sp>
       <p:sp>
         <p:nvSpPr>
-          <p:cNvPr id="35" name="Text 33"/>
-          <p:cNvSpPr/>
-          <p:nvPr/>
-        </p:nvSpPr>
-        <p:spPr>
-          <a:xfrm>
-            <a:off x="2254649" y="4572000"/>
+          <p:cNvPr id="48" name="Text 46"/>
+          <p:cNvSpPr/>
+          <p:nvPr/>
+        </p:nvSpPr>
+        <p:spPr>
+          <a:xfrm>
+            <a:off x="4850892" y="4572000"/>
             <a:ext cx="685800" cy="219456"/>
           </a:xfrm>
           <a:prstGeom prst="rect">
@@ -23062,13 +23725,13 @@
       </p:sp>
       <p:sp>
         <p:nvSpPr>
-          <p:cNvPr id="36" name="Shape 34"/>
-          <p:cNvSpPr/>
-          <p:nvPr/>
-        </p:nvSpPr>
-        <p:spPr>
-          <a:xfrm>
-            <a:off x="3293146" y="4169664"/>
+          <p:cNvPr id="49" name="Shape 47"/>
+          <p:cNvSpPr/>
+          <p:nvPr/>
+        </p:nvSpPr>
+        <p:spPr>
+          <a:xfrm>
+            <a:off x="5759577" y="4169664"/>
             <a:ext cx="685800" cy="384048"/>
           </a:xfrm>
           <a:prstGeom prst="rect">
@@ -23089,13 +23752,13 @@
       </p:sp>
       <p:sp>
         <p:nvSpPr>
-          <p:cNvPr id="37" name="Text 35"/>
-          <p:cNvSpPr/>
-          <p:nvPr/>
-        </p:nvSpPr>
-        <p:spPr>
-          <a:xfrm>
-            <a:off x="3293146" y="4169664"/>
+          <p:cNvPr id="50" name="Text 48"/>
+          <p:cNvSpPr/>
+          <p:nvPr/>
+        </p:nvSpPr>
+        <p:spPr>
+          <a:xfrm>
+            <a:off x="5759577" y="4169664"/>
             <a:ext cx="685800" cy="384048"/>
           </a:xfrm>
           <a:prstGeom prst="rect">
@@ -23128,13 +23791,13 @@
       </p:sp>
       <p:sp>
         <p:nvSpPr>
-          <p:cNvPr id="38" name="Shape 36"/>
-          <p:cNvSpPr/>
-          <p:nvPr/>
-        </p:nvSpPr>
-        <p:spPr>
-          <a:xfrm>
-            <a:off x="4331643" y="4169664"/>
+          <p:cNvPr id="51" name="Shape 49"/>
+          <p:cNvSpPr/>
+          <p:nvPr/>
+        </p:nvSpPr>
+        <p:spPr>
+          <a:xfrm>
+            <a:off x="6668262" y="4169664"/>
             <a:ext cx="685800" cy="384048"/>
           </a:xfrm>
           <a:prstGeom prst="rect">
@@ -23155,13 +23818,13 @@
       </p:sp>
       <p:sp>
         <p:nvSpPr>
-          <p:cNvPr id="39" name="Text 37"/>
-          <p:cNvSpPr/>
-          <p:nvPr/>
-        </p:nvSpPr>
-        <p:spPr>
-          <a:xfrm>
-            <a:off x="4331643" y="4169664"/>
+          <p:cNvPr id="52" name="Text 50"/>
+          <p:cNvSpPr/>
+          <p:nvPr/>
+        </p:nvSpPr>
+        <p:spPr>
+          <a:xfrm>
+            <a:off x="6668262" y="4169664"/>
             <a:ext cx="685800" cy="384048"/>
           </a:xfrm>
           <a:prstGeom prst="rect">
@@ -23194,13 +23857,13 @@
       </p:sp>
       <p:sp>
         <p:nvSpPr>
-          <p:cNvPr id="40" name="Shape 38"/>
-          <p:cNvSpPr/>
-          <p:nvPr/>
-        </p:nvSpPr>
-        <p:spPr>
-          <a:xfrm>
-            <a:off x="5370141" y="4169664"/>
+          <p:cNvPr id="53" name="Shape 51"/>
+          <p:cNvSpPr/>
+          <p:nvPr/>
+        </p:nvSpPr>
+        <p:spPr>
+          <a:xfrm>
+            <a:off x="7576947" y="4169664"/>
             <a:ext cx="685800" cy="384048"/>
           </a:xfrm>
           <a:prstGeom prst="rect">
@@ -23221,13 +23884,13 @@
       </p:sp>
       <p:sp>
         <p:nvSpPr>
-          <p:cNvPr id="41" name="Text 39"/>
-          <p:cNvSpPr/>
-          <p:nvPr/>
-        </p:nvSpPr>
-        <p:spPr>
-          <a:xfrm>
-            <a:off x="5370141" y="4169664"/>
+          <p:cNvPr id="54" name="Text 52"/>
+          <p:cNvSpPr/>
+          <p:nvPr/>
+        </p:nvSpPr>
+        <p:spPr>
+          <a:xfrm>
+            <a:off x="7576947" y="4169664"/>
             <a:ext cx="685800" cy="384048"/>
           </a:xfrm>
           <a:prstGeom prst="rect">
@@ -23252,178 +23915,7 @@
                 <a:ea typeface="Trebuchet MS" pitchFamily="34" charset="-122"/>
                 <a:cs typeface="Trebuchet MS" pitchFamily="34" charset="-120"/>
               </a:rPr>
-              <a:t>i</a:t>
-            </a:r>
-            <a:endParaRPr lang="en-US" sz="900" dirty="0"/>
-          </a:p>
-        </p:txBody>
-      </p:sp>
-      <p:sp>
-        <p:nvSpPr>
-          <p:cNvPr id="42" name="Shape 40"/>
-          <p:cNvSpPr/>
-          <p:nvPr/>
-        </p:nvSpPr>
-        <p:spPr>
-          <a:xfrm>
-            <a:off x="6408638" y="4169664"/>
-            <a:ext cx="685800" cy="384048"/>
-          </a:xfrm>
-          <a:prstGeom prst="rect">
-            <a:avLst>
-              <a:gd name="adj" fmla="val 9524"/>
-            </a:avLst>
-          </a:prstGeom>
-          <a:solidFill>
-            <a:srgbClr val="FFFFFF"/>
-          </a:solidFill>
-          <a:ln w="12700">
-            <a:solidFill>
-              <a:srgbClr val="DB2777"/>
-            </a:solidFill>
-            <a:prstDash val="solid"/>
-          </a:ln>
-        </p:spPr>
-      </p:sp>
-      <p:sp>
-        <p:nvSpPr>
-          <p:cNvPr id="43" name="Text 41"/>
-          <p:cNvSpPr/>
-          <p:nvPr/>
-        </p:nvSpPr>
-        <p:spPr>
-          <a:xfrm>
-            <a:off x="6408638" y="4169664"/>
-            <a:ext cx="685800" cy="384048"/>
-          </a:xfrm>
-          <a:prstGeom prst="rect">
-            <a:avLst/>
-          </a:prstGeom>
-          <a:noFill/>
-          <a:ln/>
-        </p:spPr>
-        <p:txBody>
-          <a:bodyPr wrap="square" lIns="0" tIns="0" rIns="0" bIns="0" rtlCol="0" anchor="ctr"/>
-          <a:lstStyle/>
-          <a:p>
-            <a:pPr algn="ctr" indent="0" marL="0">
-              <a:buNone/>
-            </a:pPr>
-            <a:r>
-              <a:rPr lang="en-US" sz="900" b="1" dirty="0">
-                <a:solidFill>
-                  <a:srgbClr val="9D174D"/>
-                </a:solidFill>
-                <a:latin typeface="Trebuchet MS" pitchFamily="34" charset="0"/>
-                <a:ea typeface="Trebuchet MS" pitchFamily="34" charset="-122"/>
-                <a:cs typeface="Trebuchet MS" pitchFamily="34" charset="-120"/>
-              </a:rPr>
-              <a:t>c</a:t>
-            </a:r>
-            <a:endParaRPr lang="en-US" sz="900" dirty="0"/>
-          </a:p>
-        </p:txBody>
-      </p:sp>
-      <p:sp>
-        <p:nvSpPr>
-          <p:cNvPr id="44" name="Text 42"/>
-          <p:cNvSpPr/>
-          <p:nvPr/>
-        </p:nvSpPr>
-        <p:spPr>
-          <a:xfrm>
-            <a:off x="6408638" y="4572000"/>
-            <a:ext cx="685800" cy="219456"/>
-          </a:xfrm>
-          <a:prstGeom prst="rect">
-            <a:avLst/>
-          </a:prstGeom>
-          <a:noFill/>
-          <a:ln/>
-        </p:spPr>
-        <p:txBody>
-          <a:bodyPr wrap="square" lIns="0" tIns="0" rIns="0" bIns="0" rtlCol="0" anchor="t"/>
-          <a:lstStyle/>
-          <a:p>
-            <a:pPr algn="ctr" indent="0" marL="0">
-              <a:buNone/>
-            </a:pPr>
-            <a:r>
-              <a:rPr lang="en-US" sz="750" i="1" dirty="0">
-                <a:solidFill>
-                  <a:srgbClr val="94A3B8"/>
-                </a:solidFill>
-                <a:latin typeface="Calibri" pitchFamily="34" charset="0"/>
-                <a:ea typeface="Calibri" pitchFamily="34" charset="-122"/>
-                <a:cs typeface="Calibri" pitchFamily="34" charset="-120"/>
-              </a:rPr>
-              <a:t>/k/</a:t>
-            </a:r>
-            <a:endParaRPr lang="en-US" sz="750" dirty="0"/>
-          </a:p>
-        </p:txBody>
-      </p:sp>
-      <p:sp>
-        <p:nvSpPr>
-          <p:cNvPr id="45" name="Shape 43"/>
-          <p:cNvSpPr/>
-          <p:nvPr/>
-        </p:nvSpPr>
-        <p:spPr>
-          <a:xfrm>
-            <a:off x="7447135" y="4169664"/>
-            <a:ext cx="685800" cy="384048"/>
-          </a:xfrm>
-          <a:prstGeom prst="rect">
-            <a:avLst>
-              <a:gd name="adj" fmla="val 9524"/>
-            </a:avLst>
-          </a:prstGeom>
-          <a:solidFill>
-            <a:srgbClr val="FFFFFF"/>
-          </a:solidFill>
-          <a:ln w="12700">
-            <a:solidFill>
-              <a:srgbClr val="DB2777"/>
-            </a:solidFill>
-            <a:prstDash val="solid"/>
-          </a:ln>
-        </p:spPr>
-      </p:sp>
-      <p:sp>
-        <p:nvSpPr>
-          <p:cNvPr id="46" name="Text 44"/>
-          <p:cNvSpPr/>
-          <p:nvPr/>
-        </p:nvSpPr>
-        <p:spPr>
-          <a:xfrm>
-            <a:off x="7447135" y="4169664"/>
-            <a:ext cx="685800" cy="384048"/>
-          </a:xfrm>
-          <a:prstGeom prst="rect">
-            <a:avLst/>
-          </a:prstGeom>
-          <a:noFill/>
-          <a:ln/>
-        </p:spPr>
-        <p:txBody>
-          <a:bodyPr wrap="square" lIns="0" tIns="0" rIns="0" bIns="0" rtlCol="0" anchor="ctr"/>
-          <a:lstStyle/>
-          <a:p>
-            <a:pPr algn="ctr" indent="0" marL="0">
-              <a:buNone/>
-            </a:pPr>
-            <a:r>
-              <a:rPr lang="en-US" sz="900" b="1" dirty="0">
-                <a:solidFill>
-                  <a:srgbClr val="9D174D"/>
-                </a:solidFill>
-                <a:latin typeface="Trebuchet MS" pitchFamily="34" charset="0"/>
-                <a:ea typeface="Trebuchet MS" pitchFamily="34" charset="-122"/>
-                <a:cs typeface="Trebuchet MS" pitchFamily="34" charset="-120"/>
-              </a:rPr>
-              <a:t>s</a:t>
+              <a:t>y</a:t>
             </a:r>
             <a:endParaRPr lang="en-US" sz="900" dirty="0"/>
           </a:p>
@@ -23854,7 +24346,7 @@
                 <a:ea typeface="Trebuchet MS" pitchFamily="34" charset="-122"/>
                 <a:cs typeface="Trebuchet MS" pitchFamily="34" charset="-120"/>
               </a:rPr>
-              <a:t>xylophone</a:t>
+              <a:t>microphone</a:t>
             </a:r>
             <a:endParaRPr lang="en-US" sz="2800" dirty="0"/>
           </a:p>
@@ -24681,7 +25173,7 @@
                 <a:ea typeface="Trebuchet MS" pitchFamily="34" charset="-122"/>
                 <a:cs typeface="Trebuchet MS" pitchFamily="34" charset="-120"/>
               </a:rPr>
-              <a:t>xylophone</a:t>
+              <a:t>microphone</a:t>
             </a:r>
             <a:endParaRPr lang="en-US" sz="2800" dirty="0"/>
           </a:p>
@@ -24820,7 +25312,7 @@
                 <a:ea typeface="Trebuchet MS" pitchFamily="34" charset="-122"/>
                 <a:cs typeface="Trebuchet MS" pitchFamily="34" charset="-120"/>
               </a:rPr>
-              <a:t>xylo</a:t>
+              <a:t>micro</a:t>
             </a:r>
             <a:endParaRPr lang="en-US" sz="1300" dirty="0"/>
           </a:p>
@@ -24859,7 +25351,7 @@
                 <a:ea typeface="Calibri" pitchFamily="34" charset="-122"/>
                 <a:cs typeface="Calibri" pitchFamily="34" charset="-120"/>
               </a:rPr>
-              <a:t>wood</a:t>
+              <a:t>small</a:t>
             </a:r>
             <a:endParaRPr lang="en-US" sz="850" dirty="0"/>
           </a:p>
@@ -25083,7 +25575,7 @@
                 <a:ea typeface="Calibri" pitchFamily="34" charset="-122"/>
                 <a:cs typeface="Calibri" pitchFamily="34" charset="-120"/>
               </a:rPr>
-              <a:t>noun-forming ending</a:t>
+              <a:t>noun marker</a:t>
             </a:r>
             <a:endParaRPr lang="en-US" sz="850" dirty="0"/>
           </a:p>
@@ -26497,7 +26989,7 @@
                 <a:ea typeface="Trebuchet MS" pitchFamily="34" charset="-122"/>
                 <a:cs typeface="Trebuchet MS" pitchFamily="34" charset="-120"/>
               </a:rPr>
-              <a:t>xylophone</a:t>
+              <a:t>microphone</a:t>
             </a:r>
             <a:endParaRPr lang="en-US" sz="2800" dirty="0"/>
           </a:p>
@@ -26636,7 +27128,7 @@
                 <a:ea typeface="Trebuchet MS" pitchFamily="34" charset="-122"/>
                 <a:cs typeface="Trebuchet MS" pitchFamily="34" charset="-120"/>
               </a:rPr>
-              <a:t>xylo</a:t>
+              <a:t>micro</a:t>
             </a:r>
             <a:endParaRPr lang="en-US" sz="1300" dirty="0"/>
           </a:p>
@@ -26675,7 +27167,7 @@
                 <a:ea typeface="Calibri" pitchFamily="34" charset="-122"/>
                 <a:cs typeface="Calibri" pitchFamily="34" charset="-120"/>
               </a:rPr>
-              <a:t>wood</a:t>
+              <a:t>small</a:t>
             </a:r>
             <a:endParaRPr lang="en-US" sz="850" dirty="0"/>
           </a:p>
@@ -26899,7 +27391,7 @@
                 <a:ea typeface="Calibri" pitchFamily="34" charset="-122"/>
                 <a:cs typeface="Calibri" pitchFamily="34" charset="-120"/>
               </a:rPr>
-              <a:t>noun-forming ending</a:t>
+              <a:t>noun marker</a:t>
             </a:r>
             <a:endParaRPr lang="en-US" sz="850" dirty="0"/>
           </a:p>
@@ -27058,7 +27550,7 @@
                 <a:ea typeface="Trebuchet MS" pitchFamily="34" charset="-122"/>
                 <a:cs typeface="Trebuchet MS" pitchFamily="34" charset="-120"/>
               </a:rPr>
-              <a:t>xy</a:t>
+              <a:t>mi</a:t>
             </a:r>
             <a:endParaRPr lang="en-US" sz="1400" dirty="0"/>
           </a:p>
@@ -27163,7 +27655,7 @@
                 <a:ea typeface="Trebuchet MS" pitchFamily="34" charset="-122"/>
                 <a:cs typeface="Trebuchet MS" pitchFamily="34" charset="-120"/>
               </a:rPr>
-              <a:t>lo</a:t>
+              <a:t>cro</a:t>
             </a:r>
             <a:endParaRPr lang="en-US" sz="1400" dirty="0"/>
           </a:p>
@@ -27831,7 +28323,7 @@
                 <a:ea typeface="Trebuchet MS" pitchFamily="34" charset="-122"/>
                 <a:cs typeface="Trebuchet MS" pitchFamily="34" charset="-120"/>
               </a:rPr>
-              <a:t>xylophone</a:t>
+              <a:t>microphone</a:t>
             </a:r>
             <a:endParaRPr lang="en-US" sz="2800" dirty="0"/>
           </a:p>
@@ -27970,7 +28462,7 @@
                 <a:ea typeface="Trebuchet MS" pitchFamily="34" charset="-122"/>
                 <a:cs typeface="Trebuchet MS" pitchFamily="34" charset="-120"/>
               </a:rPr>
-              <a:t>xylo</a:t>
+              <a:t>micro</a:t>
             </a:r>
             <a:endParaRPr lang="en-US" sz="1300" dirty="0"/>
           </a:p>
@@ -28009,7 +28501,7 @@
                 <a:ea typeface="Calibri" pitchFamily="34" charset="-122"/>
                 <a:cs typeface="Calibri" pitchFamily="34" charset="-120"/>
               </a:rPr>
-              <a:t>wood</a:t>
+              <a:t>small</a:t>
             </a:r>
             <a:endParaRPr lang="en-US" sz="850" dirty="0"/>
           </a:p>
@@ -28233,7 +28725,7 @@
                 <a:ea typeface="Calibri" pitchFamily="34" charset="-122"/>
                 <a:cs typeface="Calibri" pitchFamily="34" charset="-120"/>
               </a:rPr>
-              <a:t>noun-forming ending</a:t>
+              <a:t>noun marker</a:t>
             </a:r>
             <a:endParaRPr lang="en-US" sz="850" dirty="0"/>
           </a:p>
@@ -28392,7 +28884,7 @@
                 <a:ea typeface="Trebuchet MS" pitchFamily="34" charset="-122"/>
                 <a:cs typeface="Trebuchet MS" pitchFamily="34" charset="-120"/>
               </a:rPr>
-              <a:t>xy</a:t>
+              <a:t>mi</a:t>
             </a:r>
             <a:endParaRPr lang="en-US" sz="1400" dirty="0"/>
           </a:p>
@@ -28497,7 +28989,7 @@
                 <a:ea typeface="Trebuchet MS" pitchFamily="34" charset="-122"/>
                 <a:cs typeface="Trebuchet MS" pitchFamily="34" charset="-120"/>
               </a:rPr>
-              <a:t>lo</a:t>
+              <a:t>cro</a:t>
             </a:r>
             <a:endParaRPr lang="en-US" sz="1400" dirty="0"/>
           </a:p>
@@ -28761,7 +29253,7 @@
                 <a:ea typeface="Trebuchet MS" pitchFamily="34" charset="-122"/>
                 <a:cs typeface="Trebuchet MS" pitchFamily="34" charset="-120"/>
               </a:rPr>
-              <a:t>x</a:t>
+              <a:t>m</a:t>
             </a:r>
             <a:endParaRPr lang="en-US" sz="900" dirty="0"/>
           </a:p>
@@ -28769,13 +29261,145 @@
       </p:sp>
       <p:sp>
         <p:nvSpPr>
-          <p:cNvPr id="41" name="Text 39"/>
-          <p:cNvSpPr/>
-          <p:nvPr/>
-        </p:nvSpPr>
-        <p:spPr>
-          <a:xfrm>
-            <a:off x="2023872" y="4572000"/>
+          <p:cNvPr id="41" name="Shape 39"/>
+          <p:cNvSpPr/>
+          <p:nvPr/>
+        </p:nvSpPr>
+        <p:spPr>
+          <a:xfrm>
+            <a:off x="2831592" y="4169664"/>
+            <a:ext cx="685800" cy="384048"/>
+          </a:xfrm>
+          <a:prstGeom prst="rect">
+            <a:avLst>
+              <a:gd name="adj" fmla="val 9524"/>
+            </a:avLst>
+          </a:prstGeom>
+          <a:solidFill>
+            <a:srgbClr val="FFFFFF"/>
+          </a:solidFill>
+          <a:ln w="12700">
+            <a:solidFill>
+              <a:srgbClr val="DB2777"/>
+            </a:solidFill>
+            <a:prstDash val="solid"/>
+          </a:ln>
+        </p:spPr>
+      </p:sp>
+      <p:sp>
+        <p:nvSpPr>
+          <p:cNvPr id="42" name="Text 40"/>
+          <p:cNvSpPr/>
+          <p:nvPr/>
+        </p:nvSpPr>
+        <p:spPr>
+          <a:xfrm>
+            <a:off x="2831592" y="4169664"/>
+            <a:ext cx="685800" cy="384048"/>
+          </a:xfrm>
+          <a:prstGeom prst="rect">
+            <a:avLst/>
+          </a:prstGeom>
+          <a:noFill/>
+          <a:ln/>
+        </p:spPr>
+        <p:txBody>
+          <a:bodyPr wrap="square" lIns="0" tIns="0" rIns="0" bIns="0" rtlCol="0" anchor="ctr"/>
+          <a:lstStyle/>
+          <a:p>
+            <a:pPr algn="ctr" indent="0" marL="0">
+              <a:buNone/>
+            </a:pPr>
+            <a:r>
+              <a:rPr lang="en-US" sz="900" b="1" dirty="0">
+                <a:solidFill>
+                  <a:srgbClr val="9D174D"/>
+                </a:solidFill>
+                <a:latin typeface="Trebuchet MS" pitchFamily="34" charset="0"/>
+                <a:ea typeface="Trebuchet MS" pitchFamily="34" charset="-122"/>
+                <a:cs typeface="Trebuchet MS" pitchFamily="34" charset="-120"/>
+              </a:rPr>
+              <a:t>i</a:t>
+            </a:r>
+            <a:endParaRPr lang="en-US" sz="900" dirty="0"/>
+          </a:p>
+        </p:txBody>
+      </p:sp>
+      <p:sp>
+        <p:nvSpPr>
+          <p:cNvPr id="43" name="Shape 41"/>
+          <p:cNvSpPr/>
+          <p:nvPr/>
+        </p:nvSpPr>
+        <p:spPr>
+          <a:xfrm>
+            <a:off x="3639312" y="4169664"/>
+            <a:ext cx="685800" cy="384048"/>
+          </a:xfrm>
+          <a:prstGeom prst="rect">
+            <a:avLst>
+              <a:gd name="adj" fmla="val 9524"/>
+            </a:avLst>
+          </a:prstGeom>
+          <a:solidFill>
+            <a:srgbClr val="FFFFFF"/>
+          </a:solidFill>
+          <a:ln w="12700">
+            <a:solidFill>
+              <a:srgbClr val="DB2777"/>
+            </a:solidFill>
+            <a:prstDash val="solid"/>
+          </a:ln>
+        </p:spPr>
+      </p:sp>
+      <p:sp>
+        <p:nvSpPr>
+          <p:cNvPr id="44" name="Text 42"/>
+          <p:cNvSpPr/>
+          <p:nvPr/>
+        </p:nvSpPr>
+        <p:spPr>
+          <a:xfrm>
+            <a:off x="3639312" y="4169664"/>
+            <a:ext cx="685800" cy="384048"/>
+          </a:xfrm>
+          <a:prstGeom prst="rect">
+            <a:avLst/>
+          </a:prstGeom>
+          <a:noFill/>
+          <a:ln/>
+        </p:spPr>
+        <p:txBody>
+          <a:bodyPr wrap="square" lIns="0" tIns="0" rIns="0" bIns="0" rtlCol="0" anchor="ctr"/>
+          <a:lstStyle/>
+          <a:p>
+            <a:pPr algn="ctr" indent="0" marL="0">
+              <a:buNone/>
+            </a:pPr>
+            <a:r>
+              <a:rPr lang="en-US" sz="900" b="1" dirty="0">
+                <a:solidFill>
+                  <a:srgbClr val="9D174D"/>
+                </a:solidFill>
+                <a:latin typeface="Trebuchet MS" pitchFamily="34" charset="0"/>
+                <a:ea typeface="Trebuchet MS" pitchFamily="34" charset="-122"/>
+                <a:cs typeface="Trebuchet MS" pitchFamily="34" charset="-120"/>
+              </a:rPr>
+              <a:t>c</a:t>
+            </a:r>
+            <a:endParaRPr lang="en-US" sz="900" dirty="0"/>
+          </a:p>
+        </p:txBody>
+      </p:sp>
+      <p:sp>
+        <p:nvSpPr>
+          <p:cNvPr id="45" name="Text 43"/>
+          <p:cNvSpPr/>
+          <p:nvPr/>
+        </p:nvSpPr>
+        <p:spPr>
+          <a:xfrm>
+            <a:off x="3639312" y="4572000"/>
             <a:ext cx="685800" cy="219456"/>
           </a:xfrm>
           <a:prstGeom prst="rect">
@@ -28800,7 +29424,7 @@
                 <a:ea typeface="Calibri" pitchFamily="34" charset="-122"/>
                 <a:cs typeface="Calibri" pitchFamily="34" charset="-120"/>
               </a:rPr>
-              <a:t>/z/</a:t>
+              <a:t>/k/</a:t>
             </a:r>
             <a:endParaRPr lang="en-US" sz="750" dirty="0"/>
           </a:p>
@@ -28808,13 +29432,13 @@
       </p:sp>
       <p:sp>
         <p:nvSpPr>
-          <p:cNvPr id="42" name="Shape 40"/>
-          <p:cNvSpPr/>
-          <p:nvPr/>
-        </p:nvSpPr>
-        <p:spPr>
-          <a:xfrm>
-            <a:off x="2831592" y="4169664"/>
+          <p:cNvPr id="46" name="Shape 44"/>
+          <p:cNvSpPr/>
+          <p:nvPr/>
+        </p:nvSpPr>
+        <p:spPr>
+          <a:xfrm>
+            <a:off x="4447032" y="4169664"/>
             <a:ext cx="685800" cy="384048"/>
           </a:xfrm>
           <a:prstGeom prst="rect">
@@ -28835,13 +29459,13 @@
       </p:sp>
       <p:sp>
         <p:nvSpPr>
-          <p:cNvPr id="43" name="Text 41"/>
-          <p:cNvSpPr/>
-          <p:nvPr/>
-        </p:nvSpPr>
-        <p:spPr>
-          <a:xfrm>
-            <a:off x="2831592" y="4169664"/>
+          <p:cNvPr id="47" name="Text 45"/>
+          <p:cNvSpPr/>
+          <p:nvPr/>
+        </p:nvSpPr>
+        <p:spPr>
+          <a:xfrm>
+            <a:off x="4447032" y="4169664"/>
             <a:ext cx="685800" cy="384048"/>
           </a:xfrm>
           <a:prstGeom prst="rect">
@@ -28866,7 +29490,7 @@
                 <a:ea typeface="Trebuchet MS" pitchFamily="34" charset="-122"/>
                 <a:cs typeface="Trebuchet MS" pitchFamily="34" charset="-120"/>
               </a:rPr>
-              <a:t>y</a:t>
+              <a:t>r</a:t>
             </a:r>
             <a:endParaRPr lang="en-US" sz="900" dirty="0"/>
           </a:p>
@@ -28874,13 +29498,13 @@
       </p:sp>
       <p:sp>
         <p:nvSpPr>
-          <p:cNvPr id="44" name="Shape 42"/>
-          <p:cNvSpPr/>
-          <p:nvPr/>
-        </p:nvSpPr>
-        <p:spPr>
-          <a:xfrm>
-            <a:off x="3639312" y="4169664"/>
+          <p:cNvPr id="48" name="Shape 46"/>
+          <p:cNvSpPr/>
+          <p:nvPr/>
+        </p:nvSpPr>
+        <p:spPr>
+          <a:xfrm>
+            <a:off x="5254752" y="4169664"/>
             <a:ext cx="685800" cy="384048"/>
           </a:xfrm>
           <a:prstGeom prst="rect">
@@ -28901,13 +29525,13 @@
       </p:sp>
       <p:sp>
         <p:nvSpPr>
-          <p:cNvPr id="45" name="Text 43"/>
-          <p:cNvSpPr/>
-          <p:nvPr/>
-        </p:nvSpPr>
-        <p:spPr>
-          <a:xfrm>
-            <a:off x="3639312" y="4169664"/>
+          <p:cNvPr id="49" name="Text 47"/>
+          <p:cNvSpPr/>
+          <p:nvPr/>
+        </p:nvSpPr>
+        <p:spPr>
+          <a:xfrm>
+            <a:off x="5254752" y="4169664"/>
             <a:ext cx="685800" cy="384048"/>
           </a:xfrm>
           <a:prstGeom prst="rect">
@@ -28932,7 +29556,7 @@
                 <a:ea typeface="Trebuchet MS" pitchFamily="34" charset="-122"/>
                 <a:cs typeface="Trebuchet MS" pitchFamily="34" charset="-120"/>
               </a:rPr>
-              <a:t>l</a:t>
+              <a:t>o</a:t>
             </a:r>
             <a:endParaRPr lang="en-US" sz="900" dirty="0"/>
           </a:p>
@@ -28940,13 +29564,13 @@
       </p:sp>
       <p:sp>
         <p:nvSpPr>
-          <p:cNvPr id="46" name="Shape 44"/>
-          <p:cNvSpPr/>
-          <p:nvPr/>
-        </p:nvSpPr>
-        <p:spPr>
-          <a:xfrm>
-            <a:off x="4447032" y="4169664"/>
+          <p:cNvPr id="50" name="Shape 48"/>
+          <p:cNvSpPr/>
+          <p:nvPr/>
+        </p:nvSpPr>
+        <p:spPr>
+          <a:xfrm>
+            <a:off x="6062472" y="4169664"/>
             <a:ext cx="685800" cy="384048"/>
           </a:xfrm>
           <a:prstGeom prst="rect">
@@ -28967,13 +29591,13 @@
       </p:sp>
       <p:sp>
         <p:nvSpPr>
-          <p:cNvPr id="47" name="Text 45"/>
-          <p:cNvSpPr/>
-          <p:nvPr/>
-        </p:nvSpPr>
-        <p:spPr>
-          <a:xfrm>
-            <a:off x="4447032" y="4169664"/>
+          <p:cNvPr id="51" name="Text 49"/>
+          <p:cNvSpPr/>
+          <p:nvPr/>
+        </p:nvSpPr>
+        <p:spPr>
+          <a:xfrm>
+            <a:off x="6062472" y="4169664"/>
             <a:ext cx="685800" cy="384048"/>
           </a:xfrm>
           <a:prstGeom prst="rect">
@@ -28998,7 +29622,7 @@
                 <a:ea typeface="Trebuchet MS" pitchFamily="34" charset="-122"/>
                 <a:cs typeface="Trebuchet MS" pitchFamily="34" charset="-120"/>
               </a:rPr>
-              <a:t>o</a:t>
+              <a:t>ph</a:t>
             </a:r>
             <a:endParaRPr lang="en-US" sz="900" dirty="0"/>
           </a:p>
@@ -29006,13 +29630,52 @@
       </p:sp>
       <p:sp>
         <p:nvSpPr>
-          <p:cNvPr id="48" name="Shape 46"/>
-          <p:cNvSpPr/>
-          <p:nvPr/>
-        </p:nvSpPr>
-        <p:spPr>
-          <a:xfrm>
-            <a:off x="5254752" y="4169664"/>
+          <p:cNvPr id="52" name="Text 50"/>
+          <p:cNvSpPr/>
+          <p:nvPr/>
+        </p:nvSpPr>
+        <p:spPr>
+          <a:xfrm>
+            <a:off x="6062472" y="4572000"/>
+            <a:ext cx="685800" cy="219456"/>
+          </a:xfrm>
+          <a:prstGeom prst="rect">
+            <a:avLst/>
+          </a:prstGeom>
+          <a:noFill/>
+          <a:ln/>
+        </p:spPr>
+        <p:txBody>
+          <a:bodyPr wrap="square" lIns="0" tIns="0" rIns="0" bIns="0" rtlCol="0" anchor="t"/>
+          <a:lstStyle/>
+          <a:p>
+            <a:pPr algn="ctr" indent="0" marL="0">
+              <a:buNone/>
+            </a:pPr>
+            <a:r>
+              <a:rPr lang="en-US" sz="750" i="1" dirty="0">
+                <a:solidFill>
+                  <a:srgbClr val="94A3B8"/>
+                </a:solidFill>
+                <a:latin typeface="Calibri" pitchFamily="34" charset="0"/>
+                <a:ea typeface="Calibri" pitchFamily="34" charset="-122"/>
+                <a:cs typeface="Calibri" pitchFamily="34" charset="-120"/>
+              </a:rPr>
+              <a:t>/f/</a:t>
+            </a:r>
+            <a:endParaRPr lang="en-US" sz="750" dirty="0"/>
+          </a:p>
+        </p:txBody>
+      </p:sp>
+      <p:sp>
+        <p:nvSpPr>
+          <p:cNvPr id="53" name="Shape 51"/>
+          <p:cNvSpPr/>
+          <p:nvPr/>
+        </p:nvSpPr>
+        <p:spPr>
+          <a:xfrm>
+            <a:off x="6870192" y="4169664"/>
             <a:ext cx="685800" cy="384048"/>
           </a:xfrm>
           <a:prstGeom prst="rect">
@@ -29033,13 +29696,13 @@
       </p:sp>
       <p:sp>
         <p:nvSpPr>
-          <p:cNvPr id="49" name="Text 47"/>
-          <p:cNvSpPr/>
-          <p:nvPr/>
-        </p:nvSpPr>
-        <p:spPr>
-          <a:xfrm>
-            <a:off x="5254752" y="4169664"/>
+          <p:cNvPr id="54" name="Text 52"/>
+          <p:cNvSpPr/>
+          <p:nvPr/>
+        </p:nvSpPr>
+        <p:spPr>
+          <a:xfrm>
+            <a:off x="6870192" y="4169664"/>
             <a:ext cx="685800" cy="384048"/>
           </a:xfrm>
           <a:prstGeom prst="rect">
@@ -29064,7 +29727,7 @@
                 <a:ea typeface="Trebuchet MS" pitchFamily="34" charset="-122"/>
                 <a:cs typeface="Trebuchet MS" pitchFamily="34" charset="-120"/>
               </a:rPr>
-              <a:t>ph</a:t>
+              <a:t>o</a:t>
             </a:r>
             <a:endParaRPr lang="en-US" sz="900" dirty="0"/>
           </a:p>
@@ -29072,52 +29735,13 @@
       </p:sp>
       <p:sp>
         <p:nvSpPr>
-          <p:cNvPr id="50" name="Text 48"/>
-          <p:cNvSpPr/>
-          <p:nvPr/>
-        </p:nvSpPr>
-        <p:spPr>
-          <a:xfrm>
-            <a:off x="5254752" y="4572000"/>
-            <a:ext cx="685800" cy="219456"/>
-          </a:xfrm>
-          <a:prstGeom prst="rect">
-            <a:avLst/>
-          </a:prstGeom>
-          <a:noFill/>
-          <a:ln/>
-        </p:spPr>
-        <p:txBody>
-          <a:bodyPr wrap="square" lIns="0" tIns="0" rIns="0" bIns="0" rtlCol="0" anchor="t"/>
-          <a:lstStyle/>
-          <a:p>
-            <a:pPr algn="ctr" indent="0" marL="0">
-              <a:buNone/>
-            </a:pPr>
-            <a:r>
-              <a:rPr lang="en-US" sz="750" i="1" dirty="0">
-                <a:solidFill>
-                  <a:srgbClr val="94A3B8"/>
-                </a:solidFill>
-                <a:latin typeface="Calibri" pitchFamily="34" charset="0"/>
-                <a:ea typeface="Calibri" pitchFamily="34" charset="-122"/>
-                <a:cs typeface="Calibri" pitchFamily="34" charset="-120"/>
-              </a:rPr>
-              <a:t>/f/</a:t>
-            </a:r>
-            <a:endParaRPr lang="en-US" sz="750" dirty="0"/>
-          </a:p>
-        </p:txBody>
-      </p:sp>
-      <p:sp>
-        <p:nvSpPr>
-          <p:cNvPr id="51" name="Shape 49"/>
-          <p:cNvSpPr/>
-          <p:nvPr/>
-        </p:nvSpPr>
-        <p:spPr>
-          <a:xfrm>
-            <a:off x="6062472" y="4169664"/>
+          <p:cNvPr id="55" name="Shape 53"/>
+          <p:cNvSpPr/>
+          <p:nvPr/>
+        </p:nvSpPr>
+        <p:spPr>
+          <a:xfrm>
+            <a:off x="7677912" y="4169664"/>
             <a:ext cx="685800" cy="384048"/>
           </a:xfrm>
           <a:prstGeom prst="rect">
@@ -29138,13 +29762,13 @@
       </p:sp>
       <p:sp>
         <p:nvSpPr>
-          <p:cNvPr id="52" name="Text 50"/>
-          <p:cNvSpPr/>
-          <p:nvPr/>
-        </p:nvSpPr>
-        <p:spPr>
-          <a:xfrm>
-            <a:off x="6062472" y="4169664"/>
+          <p:cNvPr id="56" name="Text 54"/>
+          <p:cNvSpPr/>
+          <p:nvPr/>
+        </p:nvSpPr>
+        <p:spPr>
+          <a:xfrm>
+            <a:off x="7677912" y="4169664"/>
             <a:ext cx="685800" cy="384048"/>
           </a:xfrm>
           <a:prstGeom prst="rect">
@@ -29169,139 +29793,7 @@
                 <a:ea typeface="Trebuchet MS" pitchFamily="34" charset="-122"/>
                 <a:cs typeface="Trebuchet MS" pitchFamily="34" charset="-120"/>
               </a:rPr>
-              <a:t>o</a:t>
-            </a:r>
-            <a:endParaRPr lang="en-US" sz="900" dirty="0"/>
-          </a:p>
-        </p:txBody>
-      </p:sp>
-      <p:sp>
-        <p:nvSpPr>
-          <p:cNvPr id="53" name="Shape 51"/>
-          <p:cNvSpPr/>
-          <p:nvPr/>
-        </p:nvSpPr>
-        <p:spPr>
-          <a:xfrm>
-            <a:off x="6870192" y="4169664"/>
-            <a:ext cx="685800" cy="384048"/>
-          </a:xfrm>
-          <a:prstGeom prst="rect">
-            <a:avLst>
-              <a:gd name="adj" fmla="val 9524"/>
-            </a:avLst>
-          </a:prstGeom>
-          <a:solidFill>
-            <a:srgbClr val="FFFFFF"/>
-          </a:solidFill>
-          <a:ln w="12700">
-            <a:solidFill>
-              <a:srgbClr val="DB2777"/>
-            </a:solidFill>
-            <a:prstDash val="solid"/>
-          </a:ln>
-        </p:spPr>
-      </p:sp>
-      <p:sp>
-        <p:nvSpPr>
-          <p:cNvPr id="54" name="Text 52"/>
-          <p:cNvSpPr/>
-          <p:nvPr/>
-        </p:nvSpPr>
-        <p:spPr>
-          <a:xfrm>
-            <a:off x="6870192" y="4169664"/>
-            <a:ext cx="685800" cy="384048"/>
-          </a:xfrm>
-          <a:prstGeom prst="rect">
-            <a:avLst/>
-          </a:prstGeom>
-          <a:noFill/>
-          <a:ln/>
-        </p:spPr>
-        <p:txBody>
-          <a:bodyPr wrap="square" lIns="0" tIns="0" rIns="0" bIns="0" rtlCol="0" anchor="ctr"/>
-          <a:lstStyle/>
-          <a:p>
-            <a:pPr algn="ctr" indent="0" marL="0">
-              <a:buNone/>
-            </a:pPr>
-            <a:r>
-              <a:rPr lang="en-US" sz="900" b="1" dirty="0">
-                <a:solidFill>
-                  <a:srgbClr val="9D174D"/>
-                </a:solidFill>
-                <a:latin typeface="Trebuchet MS" pitchFamily="34" charset="0"/>
-                <a:ea typeface="Trebuchet MS" pitchFamily="34" charset="-122"/>
-                <a:cs typeface="Trebuchet MS" pitchFamily="34" charset="-120"/>
-              </a:rPr>
-              <a:t>n</a:t>
-            </a:r>
-            <a:endParaRPr lang="en-US" sz="900" dirty="0"/>
-          </a:p>
-        </p:txBody>
-      </p:sp>
-      <p:sp>
-        <p:nvSpPr>
-          <p:cNvPr id="55" name="Shape 53"/>
-          <p:cNvSpPr/>
-          <p:nvPr/>
-        </p:nvSpPr>
-        <p:spPr>
-          <a:xfrm>
-            <a:off x="7677912" y="4169664"/>
-            <a:ext cx="685800" cy="384048"/>
-          </a:xfrm>
-          <a:prstGeom prst="rect">
-            <a:avLst>
-              <a:gd name="adj" fmla="val 9524"/>
-            </a:avLst>
-          </a:prstGeom>
-          <a:solidFill>
-            <a:srgbClr val="FFFFFF"/>
-          </a:solidFill>
-          <a:ln w="12700">
-            <a:solidFill>
-              <a:srgbClr val="DB2777"/>
-            </a:solidFill>
-            <a:prstDash val="solid"/>
-          </a:ln>
-        </p:spPr>
-      </p:sp>
-      <p:sp>
-        <p:nvSpPr>
-          <p:cNvPr id="56" name="Text 54"/>
-          <p:cNvSpPr/>
-          <p:nvPr/>
-        </p:nvSpPr>
-        <p:spPr>
-          <a:xfrm>
-            <a:off x="7677912" y="4169664"/>
-            <a:ext cx="685800" cy="384048"/>
-          </a:xfrm>
-          <a:prstGeom prst="rect">
-            <a:avLst/>
-          </a:prstGeom>
-          <a:noFill/>
-          <a:ln/>
-        </p:spPr>
-        <p:txBody>
-          <a:bodyPr wrap="square" lIns="0" tIns="0" rIns="0" bIns="0" rtlCol="0" anchor="ctr"/>
-          <a:lstStyle/>
-          <a:p>
-            <a:pPr algn="ctr" indent="0" marL="0">
-              <a:buNone/>
-            </a:pPr>
-            <a:r>
-              <a:rPr lang="en-US" sz="900" b="1" dirty="0">
-                <a:solidFill>
-                  <a:srgbClr val="9D174D"/>
-                </a:solidFill>
-                <a:latin typeface="Trebuchet MS" pitchFamily="34" charset="0"/>
-                <a:ea typeface="Trebuchet MS" pitchFamily="34" charset="-122"/>
-                <a:cs typeface="Trebuchet MS" pitchFamily="34" charset="-120"/>
-              </a:rPr>
-              <a:t>e</a:t>
+              <a:t>ne</a:t>
             </a:r>
             <a:endParaRPr lang="en-US" sz="900" dirty="0"/>
           </a:p>
@@ -29732,7 +30224,7 @@
                 <a:ea typeface="Trebuchet MS" pitchFamily="34" charset="-122"/>
                 <a:cs typeface="Trebuchet MS" pitchFamily="34" charset="-120"/>
               </a:rPr>
-              <a:t>microphone</a:t>
+              <a:t>phoneme</a:t>
             </a:r>
             <a:endParaRPr lang="en-US" sz="2800" dirty="0"/>
           </a:p>
@@ -30559,7 +31051,7 @@
                 <a:ea typeface="Trebuchet MS" pitchFamily="34" charset="-122"/>
                 <a:cs typeface="Trebuchet MS" pitchFamily="34" charset="-120"/>
               </a:rPr>
-              <a:t>microphone</a:t>
+              <a:t>phoneme</a:t>
             </a:r>
             <a:endParaRPr lang="en-US" sz="2800" dirty="0"/>
           </a:p>
@@ -30639,7 +31131,7 @@
         </p:nvSpPr>
         <p:spPr>
           <a:xfrm>
-            <a:off x="2221992" y="2258568"/>
+            <a:off x="2938272" y="2258568"/>
             <a:ext cx="1828800" cy="292608"/>
           </a:xfrm>
           <a:prstGeom prst="rect">
@@ -30648,11 +31140,11 @@
             </a:avLst>
           </a:prstGeom>
           <a:solidFill>
-            <a:srgbClr val="DDD6FE"/>
+            <a:srgbClr val="CCFBF1"/>
           </a:solidFill>
           <a:ln w="19050">
             <a:solidFill>
-              <a:srgbClr val="7C3AED"/>
+              <a:srgbClr val="0D9488"/>
             </a:solidFill>
             <a:prstDash val="solid"/>
           </a:ln>
@@ -30673,7 +31165,7 @@
         </p:nvSpPr>
         <p:spPr>
           <a:xfrm>
-            <a:off x="2221992" y="2258568"/>
+            <a:off x="2938272" y="2258568"/>
             <a:ext cx="1828800" cy="292608"/>
           </a:xfrm>
           <a:prstGeom prst="rect">
@@ -30692,13 +31184,13 @@
             <a:r>
               <a:rPr lang="en-US" sz="1300" b="1" dirty="0">
                 <a:solidFill>
-                  <a:srgbClr val="4C1D95"/>
+                  <a:srgbClr val="0F766E"/>
                 </a:solidFill>
                 <a:latin typeface="Trebuchet MS" pitchFamily="34" charset="0"/>
                 <a:ea typeface="Trebuchet MS" pitchFamily="34" charset="-122"/>
                 <a:cs typeface="Trebuchet MS" pitchFamily="34" charset="-120"/>
               </a:rPr>
-              <a:t>micro</a:t>
+              <a:t>phon</a:t>
             </a:r>
             <a:endParaRPr lang="en-US" sz="1300" dirty="0"/>
           </a:p>
@@ -30712,7 +31204,7 @@
         </p:nvSpPr>
         <p:spPr>
           <a:xfrm>
-            <a:off x="2221992" y="2569464"/>
+            <a:off x="2938272" y="2569464"/>
             <a:ext cx="1828800" cy="201168"/>
           </a:xfrm>
           <a:prstGeom prst="rect">
@@ -30737,7 +31229,7 @@
                 <a:ea typeface="Calibri" pitchFamily="34" charset="-122"/>
                 <a:cs typeface="Calibri" pitchFamily="34" charset="-120"/>
               </a:rPr>
-              <a:t>small</a:t>
+              <a:t>sound</a:t>
             </a:r>
             <a:endParaRPr lang="en-US" sz="850" dirty="0"/>
           </a:p>
@@ -30751,7 +31243,7 @@
         </p:nvSpPr>
         <p:spPr>
           <a:xfrm>
-            <a:off x="4370832" y="2258568"/>
+            <a:off x="5803392" y="2258568"/>
             <a:ext cx="1828800" cy="292608"/>
           </a:xfrm>
           <a:prstGeom prst="rect">
@@ -30760,11 +31252,11 @@
             </a:avLst>
           </a:prstGeom>
           <a:solidFill>
-            <a:srgbClr val="CCFBF1"/>
+            <a:srgbClr val="FCE7F3"/>
           </a:solidFill>
           <a:ln w="19050">
             <a:solidFill>
-              <a:srgbClr val="0D9488"/>
+              <a:srgbClr val="DB2777"/>
             </a:solidFill>
             <a:prstDash val="solid"/>
           </a:ln>
@@ -30785,7 +31277,7 @@
         </p:nvSpPr>
         <p:spPr>
           <a:xfrm>
-            <a:off x="4370832" y="2258568"/>
+            <a:off x="5803392" y="2258568"/>
             <a:ext cx="1828800" cy="292608"/>
           </a:xfrm>
           <a:prstGeom prst="rect">
@@ -30804,13 +31296,13 @@
             <a:r>
               <a:rPr lang="en-US" sz="1300" b="1" dirty="0">
                 <a:solidFill>
-                  <a:srgbClr val="0F766E"/>
+                  <a:srgbClr val="9D174D"/>
                 </a:solidFill>
                 <a:latin typeface="Trebuchet MS" pitchFamily="34" charset="0"/>
                 <a:ea typeface="Trebuchet MS" pitchFamily="34" charset="-122"/>
                 <a:cs typeface="Trebuchet MS" pitchFamily="34" charset="-120"/>
               </a:rPr>
-              <a:t>phon</a:t>
+              <a:t>eme</a:t>
             </a:r>
             <a:endParaRPr lang="en-US" sz="1300" dirty="0"/>
           </a:p>
@@ -30824,7 +31316,7 @@
         </p:nvSpPr>
         <p:spPr>
           <a:xfrm>
-            <a:off x="4370832" y="2569464"/>
+            <a:off x="5803392" y="2569464"/>
             <a:ext cx="1828800" cy="201168"/>
           </a:xfrm>
           <a:prstGeom prst="rect">
@@ -30849,7 +31341,7 @@
                 <a:ea typeface="Calibri" pitchFamily="34" charset="-122"/>
                 <a:cs typeface="Calibri" pitchFamily="34" charset="-120"/>
               </a:rPr>
-              <a:t>sound</a:t>
+              <a:t>unit or element</a:t>
             </a:r>
             <a:endParaRPr lang="en-US" sz="850" dirty="0"/>
           </a:p>
@@ -30863,30 +31355,23 @@
         </p:nvSpPr>
         <p:spPr>
           <a:xfrm>
-            <a:off x="6519672" y="2258568"/>
-            <a:ext cx="1828800" cy="292608"/>
+            <a:off x="365760" y="3273552"/>
+            <a:ext cx="1371600" cy="658368"/>
           </a:xfrm>
           <a:prstGeom prst="rect">
             <a:avLst>
-              <a:gd name="adj" fmla="val 25000"/>
+              <a:gd name="adj" fmla="val 8333"/>
             </a:avLst>
           </a:prstGeom>
           <a:solidFill>
-            <a:srgbClr val="FCE7F3"/>
-          </a:solidFill>
-          <a:ln w="19050">
-            <a:solidFill>
-              <a:srgbClr val="DB2777"/>
-            </a:solidFill>
-            <a:prstDash val="solid"/>
-          </a:ln>
-          <a:effectLst>
-            <a:outerShdw sx="100000" sy="100000" kx="0" ky="0" algn="bl" rotWithShape="0" blurRad="101600" dist="38100" dir="8100000">
-              <a:srgbClr val="000000">
-                <a:alpha val="12000"/>
-              </a:srgbClr>
-            </a:outerShdw>
-          </a:effectLst>
+            <a:srgbClr val="E2E8F0"/>
+          </a:solidFill>
+          <a:ln w="12700">
+            <a:solidFill>
+              <a:srgbClr val="E2E8F0"/>
+            </a:solidFill>
+            <a:prstDash val="solid"/>
+          </a:ln>
         </p:spPr>
       </p:sp>
       <p:sp>
@@ -30897,90 +31382,117 @@
         </p:nvSpPr>
         <p:spPr>
           <a:xfrm>
-            <a:off x="6519672" y="2258568"/>
-            <a:ext cx="1828800" cy="292608"/>
-          </a:xfrm>
-          <a:prstGeom prst="rect">
-            <a:avLst/>
-          </a:prstGeom>
-          <a:noFill/>
-          <a:ln/>
-        </p:spPr>
-        <p:txBody>
-          <a:bodyPr wrap="square" lIns="0" tIns="0" rIns="0" bIns="0" rtlCol="0" anchor="ctr"/>
-          <a:lstStyle/>
-          <a:p>
-            <a:pPr algn="ctr" indent="0" marL="0">
-              <a:buNone/>
-            </a:pPr>
-            <a:r>
-              <a:rPr lang="en-US" sz="1300" b="1" dirty="0">
-                <a:solidFill>
-                  <a:srgbClr val="9D174D"/>
+            <a:off x="365760" y="3273552"/>
+            <a:ext cx="1371600" cy="658368"/>
+          </a:xfrm>
+          <a:prstGeom prst="rect">
+            <a:avLst/>
+          </a:prstGeom>
+          <a:noFill/>
+          <a:ln/>
+        </p:spPr>
+        <p:txBody>
+          <a:bodyPr wrap="square" lIns="0" tIns="0" rIns="0" bIns="0" rtlCol="0" anchor="ctr"/>
+          <a:lstStyle/>
+          <a:p>
+            <a:pPr algn="ctr" indent="0" marL="0">
+              <a:buNone/>
+            </a:pPr>
+            <a:r>
+              <a:rPr lang="en-US" sz="1100" b="1" dirty="0">
+                <a:solidFill>
+                  <a:srgbClr val="475569"/>
                 </a:solidFill>
                 <a:latin typeface="Trebuchet MS" pitchFamily="34" charset="0"/>
                 <a:ea typeface="Trebuchet MS" pitchFamily="34" charset="-122"/>
                 <a:cs typeface="Trebuchet MS" pitchFamily="34" charset="-120"/>
               </a:rPr>
-              <a:t>e</a:t>
-            </a:r>
-            <a:endParaRPr lang="en-US" sz="1300" dirty="0"/>
-          </a:p>
-        </p:txBody>
-      </p:sp>
-      <p:sp>
-        <p:nvSpPr>
-          <p:cNvPr id="24" name="Text 22"/>
-          <p:cNvSpPr/>
-          <p:nvPr/>
-        </p:nvSpPr>
-        <p:spPr>
-          <a:xfrm>
-            <a:off x="6519672" y="2569464"/>
-            <a:ext cx="1828800" cy="201168"/>
-          </a:xfrm>
-          <a:prstGeom prst="rect">
-            <a:avLst/>
-          </a:prstGeom>
-          <a:noFill/>
-          <a:ln/>
-        </p:spPr>
-        <p:txBody>
-          <a:bodyPr wrap="square" lIns="0" tIns="0" rIns="0" bIns="0" rtlCol="0" anchor="t"/>
-          <a:lstStyle/>
-          <a:p>
-            <a:pPr algn="ctr" indent="0" marL="0">
-              <a:buNone/>
-            </a:pPr>
-            <a:r>
-              <a:rPr lang="en-US" sz="850" dirty="0">
-                <a:solidFill>
-                  <a:srgbClr val="475569"/>
+              <a:t>Syllables</a:t>
+            </a:r>
+            <a:endParaRPr lang="en-US" sz="1100" dirty="0"/>
+          </a:p>
+        </p:txBody>
+      </p:sp>
+      <p:sp>
+        <p:nvSpPr>
+          <p:cNvPr id="24" name="Shape 22"/>
+          <p:cNvSpPr/>
+          <p:nvPr/>
+        </p:nvSpPr>
+        <p:spPr>
+          <a:xfrm>
+            <a:off x="1874520" y="3273552"/>
+            <a:ext cx="6903720" cy="658368"/>
+          </a:xfrm>
+          <a:prstGeom prst="rect">
+            <a:avLst>
+              <a:gd name="adj" fmla="val 8333"/>
+            </a:avLst>
+          </a:prstGeom>
+          <a:solidFill>
+            <a:srgbClr val="F8FAFC"/>
+          </a:solidFill>
+          <a:ln w="12700">
+            <a:solidFill>
+              <a:srgbClr val="E2E8F0"/>
+            </a:solidFill>
+            <a:prstDash val="dash"/>
+          </a:ln>
+        </p:spPr>
+      </p:sp>
+      <p:sp>
+        <p:nvSpPr>
+          <p:cNvPr id="25" name="Text 23"/>
+          <p:cNvSpPr/>
+          <p:nvPr/>
+        </p:nvSpPr>
+        <p:spPr>
+          <a:xfrm>
+            <a:off x="1874520" y="3273552"/>
+            <a:ext cx="6903720" cy="658368"/>
+          </a:xfrm>
+          <a:prstGeom prst="rect">
+            <a:avLst/>
+          </a:prstGeom>
+          <a:noFill/>
+          <a:ln/>
+        </p:spPr>
+        <p:txBody>
+          <a:bodyPr wrap="square" rtlCol="0" anchor="ctr"/>
+          <a:lstStyle/>
+          <a:p>
+            <a:pPr algn="ctr" indent="0" marL="0">
+              <a:buNone/>
+            </a:pPr>
+            <a:r>
+              <a:rPr lang="en-US" sz="1100" i="1" dirty="0">
+                <a:solidFill>
+                  <a:srgbClr val="CBD5E1"/>
                 </a:solidFill>
                 <a:latin typeface="Calibri" pitchFamily="34" charset="0"/>
                 <a:ea typeface="Calibri" pitchFamily="34" charset="-122"/>
                 <a:cs typeface="Calibri" pitchFamily="34" charset="-120"/>
               </a:rPr>
-              <a:t>noun-forming ending</a:t>
-            </a:r>
-            <a:endParaRPr lang="en-US" sz="850" dirty="0"/>
-          </a:p>
-        </p:txBody>
-      </p:sp>
-      <p:sp>
-        <p:nvSpPr>
-          <p:cNvPr id="25" name="Shape 23"/>
-          <p:cNvSpPr/>
-          <p:nvPr/>
-        </p:nvSpPr>
-        <p:spPr>
-          <a:xfrm>
-            <a:off x="365760" y="3273552"/>
-            <a:ext cx="1371600" cy="658368"/>
+              <a:t>Write here...</a:t>
+            </a:r>
+            <a:endParaRPr lang="en-US" sz="1100" dirty="0"/>
+          </a:p>
+        </p:txBody>
+      </p:sp>
+      <p:sp>
+        <p:nvSpPr>
+          <p:cNvPr id="26" name="Shape 24"/>
+          <p:cNvSpPr/>
+          <p:nvPr/>
+        </p:nvSpPr>
+        <p:spPr>
+          <a:xfrm>
+            <a:off x="365760" y="4096512"/>
+            <a:ext cx="1371600" cy="804672"/>
           </a:xfrm>
           <a:prstGeom prst="rect">
             <a:avLst>
-              <a:gd name="adj" fmla="val 8333"/>
+              <a:gd name="adj" fmla="val 6818"/>
             </a:avLst>
           </a:prstGeom>
           <a:solidFill>
@@ -30996,14 +31508,14 @@
       </p:sp>
       <p:sp>
         <p:nvSpPr>
-          <p:cNvPr id="26" name="Text 24"/>
-          <p:cNvSpPr/>
-          <p:nvPr/>
-        </p:nvSpPr>
-        <p:spPr>
-          <a:xfrm>
-            <a:off x="365760" y="3273552"/>
-            <a:ext cx="1371600" cy="658368"/>
+          <p:cNvPr id="27" name="Text 25"/>
+          <p:cNvSpPr/>
+          <p:nvPr/>
+        </p:nvSpPr>
+        <p:spPr>
+          <a:xfrm>
+            <a:off x="365760" y="4096512"/>
+            <a:ext cx="1371600" cy="804672"/>
           </a:xfrm>
           <a:prstGeom prst="rect">
             <a:avLst/>
@@ -31027,7 +31539,7 @@
                 <a:ea typeface="Trebuchet MS" pitchFamily="34" charset="-122"/>
                 <a:cs typeface="Trebuchet MS" pitchFamily="34" charset="-120"/>
               </a:rPr>
-              <a:t>Syllables</a:t>
+              <a:t>Phonemes</a:t>
             </a:r>
             <a:endParaRPr lang="en-US" sz="1100" dirty="0"/>
           </a:p>
@@ -31035,80 +31547,14 @@
       </p:sp>
       <p:sp>
         <p:nvSpPr>
-          <p:cNvPr id="27" name="Shape 25"/>
-          <p:cNvSpPr/>
-          <p:nvPr/>
-        </p:nvSpPr>
-        <p:spPr>
-          <a:xfrm>
-            <a:off x="1874520" y="3273552"/>
-            <a:ext cx="6903720" cy="658368"/>
-          </a:xfrm>
-          <a:prstGeom prst="rect">
-            <a:avLst>
-              <a:gd name="adj" fmla="val 8333"/>
-            </a:avLst>
-          </a:prstGeom>
-          <a:solidFill>
-            <a:srgbClr val="F8FAFC"/>
-          </a:solidFill>
-          <a:ln w="12700">
-            <a:solidFill>
-              <a:srgbClr val="E2E8F0"/>
-            </a:solidFill>
-            <a:prstDash val="dash"/>
-          </a:ln>
-        </p:spPr>
-      </p:sp>
-      <p:sp>
-        <p:nvSpPr>
-          <p:cNvPr id="28" name="Text 26"/>
-          <p:cNvSpPr/>
-          <p:nvPr/>
-        </p:nvSpPr>
-        <p:spPr>
-          <a:xfrm>
-            <a:off x="1874520" y="3273552"/>
-            <a:ext cx="6903720" cy="658368"/>
-          </a:xfrm>
-          <a:prstGeom prst="rect">
-            <a:avLst/>
-          </a:prstGeom>
-          <a:noFill/>
-          <a:ln/>
-        </p:spPr>
-        <p:txBody>
-          <a:bodyPr wrap="square" rtlCol="0" anchor="ctr"/>
-          <a:lstStyle/>
-          <a:p>
-            <a:pPr algn="ctr" indent="0" marL="0">
-              <a:buNone/>
-            </a:pPr>
-            <a:r>
-              <a:rPr lang="en-US" sz="1100" i="1" dirty="0">
-                <a:solidFill>
-                  <a:srgbClr val="CBD5E1"/>
-                </a:solidFill>
-                <a:latin typeface="Calibri" pitchFamily="34" charset="0"/>
-                <a:ea typeface="Calibri" pitchFamily="34" charset="-122"/>
-                <a:cs typeface="Calibri" pitchFamily="34" charset="-120"/>
-              </a:rPr>
-              <a:t>Write here...</a:t>
-            </a:r>
-            <a:endParaRPr lang="en-US" sz="1100" dirty="0"/>
-          </a:p>
-        </p:txBody>
-      </p:sp>
-      <p:sp>
-        <p:nvSpPr>
-          <p:cNvPr id="29" name="Shape 27"/>
-          <p:cNvSpPr/>
-          <p:nvPr/>
-        </p:nvSpPr>
-        <p:spPr>
-          <a:xfrm>
-            <a:off x="365760" y="4096512"/>
-            <a:ext cx="1371600" cy="804672"/>
+          <p:cNvPr id="28" name="Shape 26"/>
+          <p:cNvSpPr/>
+          <p:nvPr/>
+        </p:nvSpPr>
+        <p:spPr>
+          <a:xfrm>
+            <a:off x="1874520" y="4096512"/>
+            <a:ext cx="6903720" cy="804672"/>
           </a:xfrm>
           <a:prstGeom prst="rect">
             <a:avLst>
@@ -31116,85 +31562,19 @@
             </a:avLst>
           </a:prstGeom>
           <a:solidFill>
-            <a:srgbClr val="E2E8F0"/>
+            <a:srgbClr val="F8FAFC"/>
           </a:solidFill>
           <a:ln w="12700">
             <a:solidFill>
               <a:srgbClr val="E2E8F0"/>
             </a:solidFill>
-            <a:prstDash val="solid"/>
-          </a:ln>
-        </p:spPr>
-      </p:sp>
-      <p:sp>
-        <p:nvSpPr>
-          <p:cNvPr id="30" name="Text 28"/>
-          <p:cNvSpPr/>
-          <p:nvPr/>
-        </p:nvSpPr>
-        <p:spPr>
-          <a:xfrm>
-            <a:off x="365760" y="4096512"/>
-            <a:ext cx="1371600" cy="804672"/>
-          </a:xfrm>
-          <a:prstGeom prst="rect">
-            <a:avLst/>
-          </a:prstGeom>
-          <a:noFill/>
-          <a:ln/>
-        </p:spPr>
-        <p:txBody>
-          <a:bodyPr wrap="square" lIns="0" tIns="0" rIns="0" bIns="0" rtlCol="0" anchor="ctr"/>
-          <a:lstStyle/>
-          <a:p>
-            <a:pPr algn="ctr" indent="0" marL="0">
-              <a:buNone/>
-            </a:pPr>
-            <a:r>
-              <a:rPr lang="en-US" sz="1100" b="1" dirty="0">
-                <a:solidFill>
-                  <a:srgbClr val="475569"/>
-                </a:solidFill>
-                <a:latin typeface="Trebuchet MS" pitchFamily="34" charset="0"/>
-                <a:ea typeface="Trebuchet MS" pitchFamily="34" charset="-122"/>
-                <a:cs typeface="Trebuchet MS" pitchFamily="34" charset="-120"/>
-              </a:rPr>
-              <a:t>Phonemes</a:t>
-            </a:r>
-            <a:endParaRPr lang="en-US" sz="1100" dirty="0"/>
-          </a:p>
-        </p:txBody>
-      </p:sp>
-      <p:sp>
-        <p:nvSpPr>
-          <p:cNvPr id="31" name="Shape 29"/>
-          <p:cNvSpPr/>
-          <p:nvPr/>
-        </p:nvSpPr>
-        <p:spPr>
-          <a:xfrm>
-            <a:off x="1874520" y="4096512"/>
-            <a:ext cx="6903720" cy="804672"/>
-          </a:xfrm>
-          <a:prstGeom prst="rect">
-            <a:avLst>
-              <a:gd name="adj" fmla="val 6818"/>
-            </a:avLst>
-          </a:prstGeom>
-          <a:solidFill>
-            <a:srgbClr val="F8FAFC"/>
-          </a:solidFill>
-          <a:ln w="12700">
-            <a:solidFill>
-              <a:srgbClr val="E2E8F0"/>
-            </a:solidFill>
             <a:prstDash val="dash"/>
           </a:ln>
         </p:spPr>
       </p:sp>
       <p:sp>
         <p:nvSpPr>
-          <p:cNvPr id="32" name="Text 30"/>
+          <p:cNvPr id="29" name="Text 27"/>
           <p:cNvSpPr/>
           <p:nvPr/>
         </p:nvSpPr>
@@ -31656,7 +32036,7 @@
                 <a:ea typeface="Trebuchet MS" pitchFamily="34" charset="-122"/>
                 <a:cs typeface="Trebuchet MS" pitchFamily="34" charset="-120"/>
               </a:rPr>
-              <a:t>microphone</a:t>
+              <a:t>phoneme</a:t>
             </a:r>
             <a:endParaRPr lang="en-US" sz="2800" dirty="0"/>
           </a:p>
@@ -31736,7 +32116,7 @@
         </p:nvSpPr>
         <p:spPr>
           <a:xfrm>
-            <a:off x="2221992" y="2258568"/>
+            <a:off x="2938272" y="2258568"/>
             <a:ext cx="1828800" cy="292608"/>
           </a:xfrm>
           <a:prstGeom prst="rect">
@@ -31745,11 +32125,11 @@
             </a:avLst>
           </a:prstGeom>
           <a:solidFill>
-            <a:srgbClr val="DDD6FE"/>
+            <a:srgbClr val="CCFBF1"/>
           </a:solidFill>
           <a:ln w="19050">
             <a:solidFill>
-              <a:srgbClr val="7C3AED"/>
+              <a:srgbClr val="0D9488"/>
             </a:solidFill>
             <a:prstDash val="solid"/>
           </a:ln>
@@ -31770,7 +32150,7 @@
         </p:nvSpPr>
         <p:spPr>
           <a:xfrm>
-            <a:off x="2221992" y="2258568"/>
+            <a:off x="2938272" y="2258568"/>
             <a:ext cx="1828800" cy="292608"/>
           </a:xfrm>
           <a:prstGeom prst="rect">
@@ -31789,13 +32169,13 @@
             <a:r>
               <a:rPr lang="en-US" sz="1300" b="1" dirty="0">
                 <a:solidFill>
-                  <a:srgbClr val="4C1D95"/>
+                  <a:srgbClr val="0F766E"/>
                 </a:solidFill>
                 <a:latin typeface="Trebuchet MS" pitchFamily="34" charset="0"/>
                 <a:ea typeface="Trebuchet MS" pitchFamily="34" charset="-122"/>
                 <a:cs typeface="Trebuchet MS" pitchFamily="34" charset="-120"/>
               </a:rPr>
-              <a:t>micro</a:t>
+              <a:t>phon</a:t>
             </a:r>
             <a:endParaRPr lang="en-US" sz="1300" dirty="0"/>
           </a:p>
@@ -31809,7 +32189,7 @@
         </p:nvSpPr>
         <p:spPr>
           <a:xfrm>
-            <a:off x="2221992" y="2569464"/>
+            <a:off x="2938272" y="2569464"/>
             <a:ext cx="1828800" cy="201168"/>
           </a:xfrm>
           <a:prstGeom prst="rect">
@@ -31834,7 +32214,7 @@
                 <a:ea typeface="Calibri" pitchFamily="34" charset="-122"/>
                 <a:cs typeface="Calibri" pitchFamily="34" charset="-120"/>
               </a:rPr>
-              <a:t>small</a:t>
+              <a:t>sound</a:t>
             </a:r>
             <a:endParaRPr lang="en-US" sz="850" dirty="0"/>
           </a:p>
@@ -31848,7 +32228,7 @@
         </p:nvSpPr>
         <p:spPr>
           <a:xfrm>
-            <a:off x="4370832" y="2258568"/>
+            <a:off x="5803392" y="2258568"/>
             <a:ext cx="1828800" cy="292608"/>
           </a:xfrm>
           <a:prstGeom prst="rect">
@@ -31857,11 +32237,11 @@
             </a:avLst>
           </a:prstGeom>
           <a:solidFill>
-            <a:srgbClr val="CCFBF1"/>
+            <a:srgbClr val="FCE7F3"/>
           </a:solidFill>
           <a:ln w="19050">
             <a:solidFill>
-              <a:srgbClr val="0D9488"/>
+              <a:srgbClr val="DB2777"/>
             </a:solidFill>
             <a:prstDash val="solid"/>
           </a:ln>
@@ -31882,7 +32262,7 @@
         </p:nvSpPr>
         <p:spPr>
           <a:xfrm>
-            <a:off x="4370832" y="2258568"/>
+            <a:off x="5803392" y="2258568"/>
             <a:ext cx="1828800" cy="292608"/>
           </a:xfrm>
           <a:prstGeom prst="rect">
@@ -31901,13 +32281,13 @@
             <a:r>
               <a:rPr lang="en-US" sz="1300" b="1" dirty="0">
                 <a:solidFill>
-                  <a:srgbClr val="0F766E"/>
+                  <a:srgbClr val="9D174D"/>
                 </a:solidFill>
                 <a:latin typeface="Trebuchet MS" pitchFamily="34" charset="0"/>
                 <a:ea typeface="Trebuchet MS" pitchFamily="34" charset="-122"/>
                 <a:cs typeface="Trebuchet MS" pitchFamily="34" charset="-120"/>
               </a:rPr>
-              <a:t>phon</a:t>
+              <a:t>eme</a:t>
             </a:r>
             <a:endParaRPr lang="en-US" sz="1300" dirty="0"/>
           </a:p>
@@ -31921,7 +32301,7 @@
         </p:nvSpPr>
         <p:spPr>
           <a:xfrm>
-            <a:off x="4370832" y="2569464"/>
+            <a:off x="5803392" y="2569464"/>
             <a:ext cx="1828800" cy="201168"/>
           </a:xfrm>
           <a:prstGeom prst="rect">
@@ -31946,7 +32326,7 @@
                 <a:ea typeface="Calibri" pitchFamily="34" charset="-122"/>
                 <a:cs typeface="Calibri" pitchFamily="34" charset="-120"/>
               </a:rPr>
-              <a:t>sound</a:t>
+              <a:t>unit or element</a:t>
             </a:r>
             <a:endParaRPr lang="en-US" sz="850" dirty="0"/>
           </a:p>
@@ -31960,30 +32340,23 @@
         </p:nvSpPr>
         <p:spPr>
           <a:xfrm>
-            <a:off x="6519672" y="2258568"/>
-            <a:ext cx="1828800" cy="292608"/>
+            <a:off x="365760" y="3273552"/>
+            <a:ext cx="1371600" cy="658368"/>
           </a:xfrm>
           <a:prstGeom prst="rect">
             <a:avLst>
-              <a:gd name="adj" fmla="val 25000"/>
+              <a:gd name="adj" fmla="val 8333"/>
             </a:avLst>
           </a:prstGeom>
           <a:solidFill>
-            <a:srgbClr val="FCE7F3"/>
-          </a:solidFill>
-          <a:ln w="19050">
-            <a:solidFill>
-              <a:srgbClr val="DB2777"/>
-            </a:solidFill>
-            <a:prstDash val="solid"/>
-          </a:ln>
-          <a:effectLst>
-            <a:outerShdw sx="100000" sy="100000" kx="0" ky="0" algn="bl" rotWithShape="0" blurRad="101600" dist="38100" dir="8100000">
-              <a:srgbClr val="000000">
-                <a:alpha val="12000"/>
-              </a:srgbClr>
-            </a:outerShdw>
-          </a:effectLst>
+            <a:srgbClr val="E2E8F0"/>
+          </a:solidFill>
+          <a:ln w="12700">
+            <a:solidFill>
+              <a:srgbClr val="E2E8F0"/>
+            </a:solidFill>
+            <a:prstDash val="solid"/>
+          </a:ln>
         </p:spPr>
       </p:sp>
       <p:sp>
@@ -31994,86 +32367,47 @@
         </p:nvSpPr>
         <p:spPr>
           <a:xfrm>
-            <a:off x="6519672" y="2258568"/>
-            <a:ext cx="1828800" cy="292608"/>
-          </a:xfrm>
-          <a:prstGeom prst="rect">
-            <a:avLst/>
-          </a:prstGeom>
-          <a:noFill/>
-          <a:ln/>
-        </p:spPr>
-        <p:txBody>
-          <a:bodyPr wrap="square" lIns="0" tIns="0" rIns="0" bIns="0" rtlCol="0" anchor="ctr"/>
-          <a:lstStyle/>
-          <a:p>
-            <a:pPr algn="ctr" indent="0" marL="0">
-              <a:buNone/>
-            </a:pPr>
-            <a:r>
-              <a:rPr lang="en-US" sz="1300" b="1" dirty="0">
-                <a:solidFill>
-                  <a:srgbClr val="9D174D"/>
+            <a:off x="365760" y="3273552"/>
+            <a:ext cx="1371600" cy="658368"/>
+          </a:xfrm>
+          <a:prstGeom prst="rect">
+            <a:avLst/>
+          </a:prstGeom>
+          <a:noFill/>
+          <a:ln/>
+        </p:spPr>
+        <p:txBody>
+          <a:bodyPr wrap="square" lIns="0" tIns="0" rIns="0" bIns="0" rtlCol="0" anchor="ctr"/>
+          <a:lstStyle/>
+          <a:p>
+            <a:pPr algn="ctr" indent="0" marL="0">
+              <a:buNone/>
+            </a:pPr>
+            <a:r>
+              <a:rPr lang="en-US" sz="1100" b="1" dirty="0">
+                <a:solidFill>
+                  <a:srgbClr val="475569"/>
                 </a:solidFill>
                 <a:latin typeface="Trebuchet MS" pitchFamily="34" charset="0"/>
                 <a:ea typeface="Trebuchet MS" pitchFamily="34" charset="-122"/>
                 <a:cs typeface="Trebuchet MS" pitchFamily="34" charset="-120"/>
               </a:rPr>
-              <a:t>e</a:t>
-            </a:r>
-            <a:endParaRPr lang="en-US" sz="1300" dirty="0"/>
-          </a:p>
-        </p:txBody>
-      </p:sp>
-      <p:sp>
-        <p:nvSpPr>
-          <p:cNvPr id="24" name="Text 22"/>
-          <p:cNvSpPr/>
-          <p:nvPr/>
-        </p:nvSpPr>
-        <p:spPr>
-          <a:xfrm>
-            <a:off x="6519672" y="2569464"/>
-            <a:ext cx="1828800" cy="201168"/>
-          </a:xfrm>
-          <a:prstGeom prst="rect">
-            <a:avLst/>
-          </a:prstGeom>
-          <a:noFill/>
-          <a:ln/>
-        </p:spPr>
-        <p:txBody>
-          <a:bodyPr wrap="square" lIns="0" tIns="0" rIns="0" bIns="0" rtlCol="0" anchor="t"/>
-          <a:lstStyle/>
-          <a:p>
-            <a:pPr algn="ctr" indent="0" marL="0">
-              <a:buNone/>
-            </a:pPr>
-            <a:r>
-              <a:rPr lang="en-US" sz="850" dirty="0">
-                <a:solidFill>
-                  <a:srgbClr val="475569"/>
-                </a:solidFill>
-                <a:latin typeface="Calibri" pitchFamily="34" charset="0"/>
-                <a:ea typeface="Calibri" pitchFamily="34" charset="-122"/>
-                <a:cs typeface="Calibri" pitchFamily="34" charset="-120"/>
-              </a:rPr>
-              <a:t>noun-forming ending</a:t>
-            </a:r>
-            <a:endParaRPr lang="en-US" sz="850" dirty="0"/>
-          </a:p>
-        </p:txBody>
-      </p:sp>
-      <p:sp>
-        <p:nvSpPr>
-          <p:cNvPr id="25" name="Shape 23"/>
-          <p:cNvSpPr/>
-          <p:nvPr/>
-        </p:nvSpPr>
-        <p:spPr>
-          <a:xfrm>
-            <a:off x="365760" y="3273552"/>
-            <a:ext cx="1371600" cy="658368"/>
+              <a:t>Syllables</a:t>
+            </a:r>
+            <a:endParaRPr lang="en-US" sz="1100" dirty="0"/>
+          </a:p>
+        </p:txBody>
+      </p:sp>
+      <p:sp>
+        <p:nvSpPr>
+          <p:cNvPr id="24" name="Shape 22"/>
+          <p:cNvSpPr/>
+          <p:nvPr/>
+        </p:nvSpPr>
+        <p:spPr>
+          <a:xfrm>
+            <a:off x="1874520" y="3273552"/>
+            <a:ext cx="6903720" cy="658368"/>
           </a:xfrm>
           <a:prstGeom prst="rect">
             <a:avLst>
@@ -32081,11 +32415,38 @@
             </a:avLst>
           </a:prstGeom>
           <a:solidFill>
-            <a:srgbClr val="E2E8F0"/>
-          </a:solidFill>
-          <a:ln w="12700">
-            <a:solidFill>
-              <a:srgbClr val="E2E8F0"/>
+            <a:srgbClr val="CCFBF1"/>
+          </a:solidFill>
+          <a:ln w="12700">
+            <a:solidFill>
+              <a:srgbClr val="0D9488"/>
+            </a:solidFill>
+            <a:prstDash val="solid"/>
+          </a:ln>
+        </p:spPr>
+      </p:sp>
+      <p:sp>
+        <p:nvSpPr>
+          <p:cNvPr id="25" name="Shape 23"/>
+          <p:cNvSpPr/>
+          <p:nvPr/>
+        </p:nvSpPr>
+        <p:spPr>
+          <a:xfrm>
+            <a:off x="2999232" y="3364992"/>
+            <a:ext cx="1645920" cy="475488"/>
+          </a:xfrm>
+          <a:prstGeom prst="rect">
+            <a:avLst>
+              <a:gd name="adj" fmla="val 9615"/>
+            </a:avLst>
+          </a:prstGeom>
+          <a:solidFill>
+            <a:srgbClr val="FFFFFF"/>
+          </a:solidFill>
+          <a:ln w="12700">
+            <a:solidFill>
+              <a:srgbClr val="0D9488"/>
             </a:solidFill>
             <a:prstDash val="solid"/>
           </a:ln>
@@ -32099,63 +32460,75 @@
         </p:nvSpPr>
         <p:spPr>
           <a:xfrm>
-            <a:off x="365760" y="3273552"/>
-            <a:ext cx="1371600" cy="658368"/>
-          </a:xfrm>
-          <a:prstGeom prst="rect">
-            <a:avLst/>
-          </a:prstGeom>
-          <a:noFill/>
-          <a:ln/>
-        </p:spPr>
-        <p:txBody>
-          <a:bodyPr wrap="square" lIns="0" tIns="0" rIns="0" bIns="0" rtlCol="0" anchor="ctr"/>
-          <a:lstStyle/>
-          <a:p>
-            <a:pPr algn="ctr" indent="0" marL="0">
-              <a:buNone/>
-            </a:pPr>
-            <a:r>
-              <a:rPr lang="en-US" sz="1100" b="1" dirty="0">
-                <a:solidFill>
-                  <a:srgbClr val="475569"/>
+            <a:off x="2999232" y="3364992"/>
+            <a:ext cx="1645920" cy="475488"/>
+          </a:xfrm>
+          <a:prstGeom prst="rect">
+            <a:avLst/>
+          </a:prstGeom>
+          <a:noFill/>
+          <a:ln/>
+        </p:spPr>
+        <p:txBody>
+          <a:bodyPr wrap="square" lIns="0" tIns="0" rIns="0" bIns="0" rtlCol="0" anchor="ctr"/>
+          <a:lstStyle/>
+          <a:p>
+            <a:pPr algn="ctr" indent="0" marL="0">
+              <a:buNone/>
+            </a:pPr>
+            <a:r>
+              <a:rPr lang="en-US" sz="1400" b="1" dirty="0">
+                <a:solidFill>
+                  <a:srgbClr val="0D9488"/>
                 </a:solidFill>
                 <a:latin typeface="Trebuchet MS" pitchFamily="34" charset="0"/>
                 <a:ea typeface="Trebuchet MS" pitchFamily="34" charset="-122"/>
                 <a:cs typeface="Trebuchet MS" pitchFamily="34" charset="-120"/>
               </a:rPr>
-              <a:t>Syllables</a:t>
-            </a:r>
-            <a:endParaRPr lang="en-US" sz="1100" dirty="0"/>
-          </a:p>
-        </p:txBody>
-      </p:sp>
-      <p:sp>
-        <p:nvSpPr>
-          <p:cNvPr id="27" name="Shape 25"/>
-          <p:cNvSpPr/>
-          <p:nvPr/>
-        </p:nvSpPr>
-        <p:spPr>
-          <a:xfrm>
-            <a:off x="1874520" y="3273552"/>
-            <a:ext cx="6903720" cy="658368"/>
-          </a:xfrm>
-          <a:prstGeom prst="rect">
-            <a:avLst>
-              <a:gd name="adj" fmla="val 8333"/>
-            </a:avLst>
-          </a:prstGeom>
-          <a:solidFill>
-            <a:srgbClr val="CCFBF1"/>
-          </a:solidFill>
-          <a:ln w="12700">
-            <a:solidFill>
-              <a:srgbClr val="0D9488"/>
-            </a:solidFill>
-            <a:prstDash val="solid"/>
-          </a:ln>
-        </p:spPr>
+              <a:t>pho</a:t>
+            </a:r>
+            <a:endParaRPr lang="en-US" sz="1400" dirty="0"/>
+          </a:p>
+        </p:txBody>
+      </p:sp>
+      <p:sp>
+        <p:nvSpPr>
+          <p:cNvPr id="27" name="Text 25"/>
+          <p:cNvSpPr/>
+          <p:nvPr/>
+        </p:nvSpPr>
+        <p:spPr>
+          <a:xfrm>
+            <a:off x="4645152" y="3364992"/>
+            <a:ext cx="1097280" cy="475488"/>
+          </a:xfrm>
+          <a:prstGeom prst="rect">
+            <a:avLst/>
+          </a:prstGeom>
+          <a:noFill/>
+          <a:ln/>
+        </p:spPr>
+        <p:txBody>
+          <a:bodyPr wrap="square" lIns="0" tIns="0" rIns="0" bIns="0" rtlCol="0" anchor="ctr"/>
+          <a:lstStyle/>
+          <a:p>
+            <a:pPr algn="ctr" indent="0" marL="0">
+              <a:buNone/>
+            </a:pPr>
+            <a:r>
+              <a:rPr lang="en-US" sz="1600" b="1" dirty="0">
+                <a:solidFill>
+                  <a:srgbClr val="0D9488"/>
+                </a:solidFill>
+                <a:latin typeface="Trebuchet MS" pitchFamily="34" charset="0"/>
+                <a:ea typeface="Trebuchet MS" pitchFamily="34" charset="-122"/>
+                <a:cs typeface="Trebuchet MS" pitchFamily="34" charset="-120"/>
+              </a:rPr>
+              <a:t>·</a:t>
+            </a:r>
+            <a:endParaRPr lang="en-US" sz="1600" dirty="0"/>
+          </a:p>
+        </p:txBody>
       </p:sp>
       <p:sp>
         <p:nvSpPr>
@@ -32165,7 +32538,7 @@
         </p:nvSpPr>
         <p:spPr>
           <a:xfrm>
-            <a:off x="2313432" y="3364992"/>
+            <a:off x="5742432" y="3364992"/>
             <a:ext cx="1645920" cy="475488"/>
           </a:xfrm>
           <a:prstGeom prst="rect">
@@ -32192,7 +32565,7 @@
         </p:nvSpPr>
         <p:spPr>
           <a:xfrm>
-            <a:off x="2313432" y="3364992"/>
+            <a:off x="5742432" y="3364992"/>
             <a:ext cx="1645920" cy="475488"/>
           </a:xfrm>
           <a:prstGeom prst="rect">
@@ -32217,7 +32590,7 @@
                 <a:ea typeface="Trebuchet MS" pitchFamily="34" charset="-122"/>
                 <a:cs typeface="Trebuchet MS" pitchFamily="34" charset="-120"/>
               </a:rPr>
-              <a:t>mi</a:t>
+              <a:t>neme</a:t>
             </a:r>
             <a:endParaRPr lang="en-US" sz="1400" dirty="0"/>
           </a:p>
@@ -32225,224 +32598,80 @@
       </p:sp>
       <p:sp>
         <p:nvSpPr>
-          <p:cNvPr id="30" name="Text 28"/>
-          <p:cNvSpPr/>
-          <p:nvPr/>
-        </p:nvSpPr>
-        <p:spPr>
-          <a:xfrm>
-            <a:off x="3959352" y="3364992"/>
-            <a:ext cx="411480" cy="475488"/>
-          </a:xfrm>
-          <a:prstGeom prst="rect">
-            <a:avLst/>
-          </a:prstGeom>
-          <a:noFill/>
-          <a:ln/>
-        </p:spPr>
-        <p:txBody>
-          <a:bodyPr wrap="square" lIns="0" tIns="0" rIns="0" bIns="0" rtlCol="0" anchor="ctr"/>
-          <a:lstStyle/>
-          <a:p>
-            <a:pPr algn="ctr" indent="0" marL="0">
-              <a:buNone/>
-            </a:pPr>
-            <a:r>
-              <a:rPr lang="en-US" sz="1600" b="1" dirty="0">
-                <a:solidFill>
-                  <a:srgbClr val="0D9488"/>
+          <p:cNvPr id="30" name="Shape 28"/>
+          <p:cNvSpPr/>
+          <p:nvPr/>
+        </p:nvSpPr>
+        <p:spPr>
+          <a:xfrm>
+            <a:off x="365760" y="4096512"/>
+            <a:ext cx="1371600" cy="804672"/>
+          </a:xfrm>
+          <a:prstGeom prst="rect">
+            <a:avLst>
+              <a:gd name="adj" fmla="val 6818"/>
+            </a:avLst>
+          </a:prstGeom>
+          <a:solidFill>
+            <a:srgbClr val="E2E8F0"/>
+          </a:solidFill>
+          <a:ln w="12700">
+            <a:solidFill>
+              <a:srgbClr val="E2E8F0"/>
+            </a:solidFill>
+            <a:prstDash val="solid"/>
+          </a:ln>
+        </p:spPr>
+      </p:sp>
+      <p:sp>
+        <p:nvSpPr>
+          <p:cNvPr id="31" name="Text 29"/>
+          <p:cNvSpPr/>
+          <p:nvPr/>
+        </p:nvSpPr>
+        <p:spPr>
+          <a:xfrm>
+            <a:off x="365760" y="4096512"/>
+            <a:ext cx="1371600" cy="804672"/>
+          </a:xfrm>
+          <a:prstGeom prst="rect">
+            <a:avLst/>
+          </a:prstGeom>
+          <a:noFill/>
+          <a:ln/>
+        </p:spPr>
+        <p:txBody>
+          <a:bodyPr wrap="square" lIns="0" tIns="0" rIns="0" bIns="0" rtlCol="0" anchor="ctr"/>
+          <a:lstStyle/>
+          <a:p>
+            <a:pPr algn="ctr" indent="0" marL="0">
+              <a:buNone/>
+            </a:pPr>
+            <a:r>
+              <a:rPr lang="en-US" sz="1100" b="1" dirty="0">
+                <a:solidFill>
+                  <a:srgbClr val="475569"/>
                 </a:solidFill>
                 <a:latin typeface="Trebuchet MS" pitchFamily="34" charset="0"/>
                 <a:ea typeface="Trebuchet MS" pitchFamily="34" charset="-122"/>
                 <a:cs typeface="Trebuchet MS" pitchFamily="34" charset="-120"/>
               </a:rPr>
-              <a:t>·</a:t>
-            </a:r>
-            <a:endParaRPr lang="en-US" sz="1600" dirty="0"/>
-          </a:p>
-        </p:txBody>
-      </p:sp>
-      <p:sp>
-        <p:nvSpPr>
-          <p:cNvPr id="31" name="Shape 29"/>
-          <p:cNvSpPr/>
-          <p:nvPr/>
-        </p:nvSpPr>
-        <p:spPr>
-          <a:xfrm>
-            <a:off x="4370832" y="3364992"/>
-            <a:ext cx="1645920" cy="475488"/>
-          </a:xfrm>
-          <a:prstGeom prst="rect">
-            <a:avLst>
-              <a:gd name="adj" fmla="val 9615"/>
-            </a:avLst>
-          </a:prstGeom>
-          <a:solidFill>
-            <a:srgbClr val="FFFFFF"/>
-          </a:solidFill>
-          <a:ln w="12700">
-            <a:solidFill>
-              <a:srgbClr val="0D9488"/>
-            </a:solidFill>
-            <a:prstDash val="solid"/>
-          </a:ln>
-        </p:spPr>
-      </p:sp>
-      <p:sp>
-        <p:nvSpPr>
-          <p:cNvPr id="32" name="Text 30"/>
-          <p:cNvSpPr/>
-          <p:nvPr/>
-        </p:nvSpPr>
-        <p:spPr>
-          <a:xfrm>
-            <a:off x="4370832" y="3364992"/>
-            <a:ext cx="1645920" cy="475488"/>
-          </a:xfrm>
-          <a:prstGeom prst="rect">
-            <a:avLst/>
-          </a:prstGeom>
-          <a:noFill/>
-          <a:ln/>
-        </p:spPr>
-        <p:txBody>
-          <a:bodyPr wrap="square" lIns="0" tIns="0" rIns="0" bIns="0" rtlCol="0" anchor="ctr"/>
-          <a:lstStyle/>
-          <a:p>
-            <a:pPr algn="ctr" indent="0" marL="0">
-              <a:buNone/>
-            </a:pPr>
-            <a:r>
-              <a:rPr lang="en-US" sz="1400" b="1" dirty="0">
-                <a:solidFill>
-                  <a:srgbClr val="0D9488"/>
-                </a:solidFill>
-                <a:latin typeface="Trebuchet MS" pitchFamily="34" charset="0"/>
-                <a:ea typeface="Trebuchet MS" pitchFamily="34" charset="-122"/>
-                <a:cs typeface="Trebuchet MS" pitchFamily="34" charset="-120"/>
-              </a:rPr>
-              <a:t>cro</a:t>
-            </a:r>
-            <a:endParaRPr lang="en-US" sz="1400" dirty="0"/>
-          </a:p>
-        </p:txBody>
-      </p:sp>
-      <p:sp>
-        <p:nvSpPr>
-          <p:cNvPr id="33" name="Text 31"/>
-          <p:cNvSpPr/>
-          <p:nvPr/>
-        </p:nvSpPr>
-        <p:spPr>
-          <a:xfrm>
-            <a:off x="6016752" y="3364992"/>
-            <a:ext cx="411480" cy="475488"/>
-          </a:xfrm>
-          <a:prstGeom prst="rect">
-            <a:avLst/>
-          </a:prstGeom>
-          <a:noFill/>
-          <a:ln/>
-        </p:spPr>
-        <p:txBody>
-          <a:bodyPr wrap="square" lIns="0" tIns="0" rIns="0" bIns="0" rtlCol="0" anchor="ctr"/>
-          <a:lstStyle/>
-          <a:p>
-            <a:pPr algn="ctr" indent="0" marL="0">
-              <a:buNone/>
-            </a:pPr>
-            <a:r>
-              <a:rPr lang="en-US" sz="1600" b="1" dirty="0">
-                <a:solidFill>
-                  <a:srgbClr val="0D9488"/>
-                </a:solidFill>
-                <a:latin typeface="Trebuchet MS" pitchFamily="34" charset="0"/>
-                <a:ea typeface="Trebuchet MS" pitchFamily="34" charset="-122"/>
-                <a:cs typeface="Trebuchet MS" pitchFamily="34" charset="-120"/>
-              </a:rPr>
-              <a:t>·</a:t>
-            </a:r>
-            <a:endParaRPr lang="en-US" sz="1600" dirty="0"/>
-          </a:p>
-        </p:txBody>
-      </p:sp>
-      <p:sp>
-        <p:nvSpPr>
-          <p:cNvPr id="34" name="Shape 32"/>
-          <p:cNvSpPr/>
-          <p:nvPr/>
-        </p:nvSpPr>
-        <p:spPr>
-          <a:xfrm>
-            <a:off x="6428232" y="3364992"/>
-            <a:ext cx="1645920" cy="475488"/>
-          </a:xfrm>
-          <a:prstGeom prst="rect">
-            <a:avLst>
-              <a:gd name="adj" fmla="val 9615"/>
-            </a:avLst>
-          </a:prstGeom>
-          <a:solidFill>
-            <a:srgbClr val="FFFFFF"/>
-          </a:solidFill>
-          <a:ln w="12700">
-            <a:solidFill>
-              <a:srgbClr val="0D9488"/>
-            </a:solidFill>
-            <a:prstDash val="solid"/>
-          </a:ln>
-        </p:spPr>
-      </p:sp>
-      <p:sp>
-        <p:nvSpPr>
-          <p:cNvPr id="35" name="Text 33"/>
-          <p:cNvSpPr/>
-          <p:nvPr/>
-        </p:nvSpPr>
-        <p:spPr>
-          <a:xfrm>
-            <a:off x="6428232" y="3364992"/>
-            <a:ext cx="1645920" cy="475488"/>
-          </a:xfrm>
-          <a:prstGeom prst="rect">
-            <a:avLst/>
-          </a:prstGeom>
-          <a:noFill/>
-          <a:ln/>
-        </p:spPr>
-        <p:txBody>
-          <a:bodyPr wrap="square" lIns="0" tIns="0" rIns="0" bIns="0" rtlCol="0" anchor="ctr"/>
-          <a:lstStyle/>
-          <a:p>
-            <a:pPr algn="ctr" indent="0" marL="0">
-              <a:buNone/>
-            </a:pPr>
-            <a:r>
-              <a:rPr lang="en-US" sz="1400" b="1" dirty="0">
-                <a:solidFill>
-                  <a:srgbClr val="0D9488"/>
-                </a:solidFill>
-                <a:latin typeface="Trebuchet MS" pitchFamily="34" charset="0"/>
-                <a:ea typeface="Trebuchet MS" pitchFamily="34" charset="-122"/>
-                <a:cs typeface="Trebuchet MS" pitchFamily="34" charset="-120"/>
-              </a:rPr>
-              <a:t>phone</a:t>
-            </a:r>
-            <a:endParaRPr lang="en-US" sz="1400" dirty="0"/>
-          </a:p>
-        </p:txBody>
-      </p:sp>
-      <p:sp>
-        <p:nvSpPr>
-          <p:cNvPr id="36" name="Shape 34"/>
-          <p:cNvSpPr/>
-          <p:nvPr/>
-        </p:nvSpPr>
-        <p:spPr>
-          <a:xfrm>
-            <a:off x="365760" y="4096512"/>
-            <a:ext cx="1371600" cy="804672"/>
+              <a:t>Phonemes</a:t>
+            </a:r>
+            <a:endParaRPr lang="en-US" sz="1100" dirty="0"/>
+          </a:p>
+        </p:txBody>
+      </p:sp>
+      <p:sp>
+        <p:nvSpPr>
+          <p:cNvPr id="32" name="Shape 30"/>
+          <p:cNvSpPr/>
+          <p:nvPr/>
+        </p:nvSpPr>
+        <p:spPr>
+          <a:xfrm>
+            <a:off x="1874520" y="4096512"/>
+            <a:ext cx="6903720" cy="804672"/>
           </a:xfrm>
           <a:prstGeom prst="rect">
             <a:avLst>
@@ -32450,85 +32679,19 @@
             </a:avLst>
           </a:prstGeom>
           <a:solidFill>
-            <a:srgbClr val="E2E8F0"/>
+            <a:srgbClr val="F8FAFC"/>
           </a:solidFill>
           <a:ln w="12700">
             <a:solidFill>
               <a:srgbClr val="E2E8F0"/>
             </a:solidFill>
-            <a:prstDash val="solid"/>
-          </a:ln>
-        </p:spPr>
-      </p:sp>
-      <p:sp>
-        <p:nvSpPr>
-          <p:cNvPr id="37" name="Text 35"/>
-          <p:cNvSpPr/>
-          <p:nvPr/>
-        </p:nvSpPr>
-        <p:spPr>
-          <a:xfrm>
-            <a:off x="365760" y="4096512"/>
-            <a:ext cx="1371600" cy="804672"/>
-          </a:xfrm>
-          <a:prstGeom prst="rect">
-            <a:avLst/>
-          </a:prstGeom>
-          <a:noFill/>
-          <a:ln/>
-        </p:spPr>
-        <p:txBody>
-          <a:bodyPr wrap="square" lIns="0" tIns="0" rIns="0" bIns="0" rtlCol="0" anchor="ctr"/>
-          <a:lstStyle/>
-          <a:p>
-            <a:pPr algn="ctr" indent="0" marL="0">
-              <a:buNone/>
-            </a:pPr>
-            <a:r>
-              <a:rPr lang="en-US" sz="1100" b="1" dirty="0">
-                <a:solidFill>
-                  <a:srgbClr val="475569"/>
-                </a:solidFill>
-                <a:latin typeface="Trebuchet MS" pitchFamily="34" charset="0"/>
-                <a:ea typeface="Trebuchet MS" pitchFamily="34" charset="-122"/>
-                <a:cs typeface="Trebuchet MS" pitchFamily="34" charset="-120"/>
-              </a:rPr>
-              <a:t>Phonemes</a:t>
-            </a:r>
-            <a:endParaRPr lang="en-US" sz="1100" dirty="0"/>
-          </a:p>
-        </p:txBody>
-      </p:sp>
-      <p:sp>
-        <p:nvSpPr>
-          <p:cNvPr id="38" name="Shape 36"/>
-          <p:cNvSpPr/>
-          <p:nvPr/>
-        </p:nvSpPr>
-        <p:spPr>
-          <a:xfrm>
-            <a:off x="1874520" y="4096512"/>
-            <a:ext cx="6903720" cy="804672"/>
-          </a:xfrm>
-          <a:prstGeom prst="rect">
-            <a:avLst>
-              <a:gd name="adj" fmla="val 6818"/>
-            </a:avLst>
-          </a:prstGeom>
-          <a:solidFill>
-            <a:srgbClr val="F8FAFC"/>
-          </a:solidFill>
-          <a:ln w="12700">
-            <a:solidFill>
-              <a:srgbClr val="E2E8F0"/>
-            </a:solidFill>
             <a:prstDash val="dash"/>
           </a:ln>
         </p:spPr>
       </p:sp>
       <p:sp>
         <p:nvSpPr>
-          <p:cNvPr id="39" name="Text 37"/>
+          <p:cNvPr id="33" name="Text 31"/>
           <p:cNvSpPr/>
           <p:nvPr/>
         </p:nvSpPr>
@@ -32990,7 +33153,7 @@
                 <a:ea typeface="Trebuchet MS" pitchFamily="34" charset="-122"/>
                 <a:cs typeface="Trebuchet MS" pitchFamily="34" charset="-120"/>
               </a:rPr>
-              <a:t>microphone</a:t>
+              <a:t>phoneme</a:t>
             </a:r>
             <a:endParaRPr lang="en-US" sz="2800" dirty="0"/>
           </a:p>
@@ -33070,7 +33233,7 @@
         </p:nvSpPr>
         <p:spPr>
           <a:xfrm>
-            <a:off x="2221992" y="2258568"/>
+            <a:off x="2938272" y="2258568"/>
             <a:ext cx="1828800" cy="292608"/>
           </a:xfrm>
           <a:prstGeom prst="rect">
@@ -33079,11 +33242,11 @@
             </a:avLst>
           </a:prstGeom>
           <a:solidFill>
-            <a:srgbClr val="DDD6FE"/>
+            <a:srgbClr val="CCFBF1"/>
           </a:solidFill>
           <a:ln w="19050">
             <a:solidFill>
-              <a:srgbClr val="7C3AED"/>
+              <a:srgbClr val="0D9488"/>
             </a:solidFill>
             <a:prstDash val="solid"/>
           </a:ln>
@@ -33104,7 +33267,7 @@
         </p:nvSpPr>
         <p:spPr>
           <a:xfrm>
-            <a:off x="2221992" y="2258568"/>
+            <a:off x="2938272" y="2258568"/>
             <a:ext cx="1828800" cy="292608"/>
           </a:xfrm>
           <a:prstGeom prst="rect">
@@ -33123,13 +33286,13 @@
             <a:r>
               <a:rPr lang="en-US" sz="1300" b="1" dirty="0">
                 <a:solidFill>
-                  <a:srgbClr val="4C1D95"/>
+                  <a:srgbClr val="0F766E"/>
                 </a:solidFill>
                 <a:latin typeface="Trebuchet MS" pitchFamily="34" charset="0"/>
                 <a:ea typeface="Trebuchet MS" pitchFamily="34" charset="-122"/>
                 <a:cs typeface="Trebuchet MS" pitchFamily="34" charset="-120"/>
               </a:rPr>
-              <a:t>micro</a:t>
+              <a:t>phon</a:t>
             </a:r>
             <a:endParaRPr lang="en-US" sz="1300" dirty="0"/>
           </a:p>
@@ -33143,7 +33306,7 @@
         </p:nvSpPr>
         <p:spPr>
           <a:xfrm>
-            <a:off x="2221992" y="2569464"/>
+            <a:off x="2938272" y="2569464"/>
             <a:ext cx="1828800" cy="201168"/>
           </a:xfrm>
           <a:prstGeom prst="rect">
@@ -33168,7 +33331,7 @@
                 <a:ea typeface="Calibri" pitchFamily="34" charset="-122"/>
                 <a:cs typeface="Calibri" pitchFamily="34" charset="-120"/>
               </a:rPr>
-              <a:t>small</a:t>
+              <a:t>sound</a:t>
             </a:r>
             <a:endParaRPr lang="en-US" sz="850" dirty="0"/>
           </a:p>
@@ -33182,7 +33345,7 @@
         </p:nvSpPr>
         <p:spPr>
           <a:xfrm>
-            <a:off x="4370832" y="2258568"/>
+            <a:off x="5803392" y="2258568"/>
             <a:ext cx="1828800" cy="292608"/>
           </a:xfrm>
           <a:prstGeom prst="rect">
@@ -33191,11 +33354,11 @@
             </a:avLst>
           </a:prstGeom>
           <a:solidFill>
-            <a:srgbClr val="CCFBF1"/>
+            <a:srgbClr val="FCE7F3"/>
           </a:solidFill>
           <a:ln w="19050">
             <a:solidFill>
-              <a:srgbClr val="0D9488"/>
+              <a:srgbClr val="DB2777"/>
             </a:solidFill>
             <a:prstDash val="solid"/>
           </a:ln>
@@ -33216,7 +33379,7 @@
         </p:nvSpPr>
         <p:spPr>
           <a:xfrm>
-            <a:off x="4370832" y="2258568"/>
+            <a:off x="5803392" y="2258568"/>
             <a:ext cx="1828800" cy="292608"/>
           </a:xfrm>
           <a:prstGeom prst="rect">
@@ -33235,13 +33398,13 @@
             <a:r>
               <a:rPr lang="en-US" sz="1300" b="1" dirty="0">
                 <a:solidFill>
-                  <a:srgbClr val="0F766E"/>
+                  <a:srgbClr val="9D174D"/>
                 </a:solidFill>
                 <a:latin typeface="Trebuchet MS" pitchFamily="34" charset="0"/>
                 <a:ea typeface="Trebuchet MS" pitchFamily="34" charset="-122"/>
                 <a:cs typeface="Trebuchet MS" pitchFamily="34" charset="-120"/>
               </a:rPr>
-              <a:t>phon</a:t>
+              <a:t>eme</a:t>
             </a:r>
             <a:endParaRPr lang="en-US" sz="1300" dirty="0"/>
           </a:p>
@@ -33255,7 +33418,7 @@
         </p:nvSpPr>
         <p:spPr>
           <a:xfrm>
-            <a:off x="4370832" y="2569464"/>
+            <a:off x="5803392" y="2569464"/>
             <a:ext cx="1828800" cy="201168"/>
           </a:xfrm>
           <a:prstGeom prst="rect">
@@ -33280,7 +33443,7 @@
                 <a:ea typeface="Calibri" pitchFamily="34" charset="-122"/>
                 <a:cs typeface="Calibri" pitchFamily="34" charset="-120"/>
               </a:rPr>
-              <a:t>sound</a:t>
+              <a:t>unit or element</a:t>
             </a:r>
             <a:endParaRPr lang="en-US" sz="850" dirty="0"/>
           </a:p>
@@ -33294,30 +33457,23 @@
         </p:nvSpPr>
         <p:spPr>
           <a:xfrm>
-            <a:off x="6519672" y="2258568"/>
-            <a:ext cx="1828800" cy="292608"/>
+            <a:off x="365760" y="3273552"/>
+            <a:ext cx="1371600" cy="658368"/>
           </a:xfrm>
           <a:prstGeom prst="rect">
             <a:avLst>
-              <a:gd name="adj" fmla="val 25000"/>
+              <a:gd name="adj" fmla="val 8333"/>
             </a:avLst>
           </a:prstGeom>
           <a:solidFill>
-            <a:srgbClr val="FCE7F3"/>
-          </a:solidFill>
-          <a:ln w="19050">
-            <a:solidFill>
-              <a:srgbClr val="DB2777"/>
-            </a:solidFill>
-            <a:prstDash val="solid"/>
-          </a:ln>
-          <a:effectLst>
-            <a:outerShdw sx="100000" sy="100000" kx="0" ky="0" algn="bl" rotWithShape="0" blurRad="101600" dist="38100" dir="8100000">
-              <a:srgbClr val="000000">
-                <a:alpha val="12000"/>
-              </a:srgbClr>
-            </a:outerShdw>
-          </a:effectLst>
+            <a:srgbClr val="E2E8F0"/>
+          </a:solidFill>
+          <a:ln w="12700">
+            <a:solidFill>
+              <a:srgbClr val="E2E8F0"/>
+            </a:solidFill>
+            <a:prstDash val="solid"/>
+          </a:ln>
         </p:spPr>
       </p:sp>
       <p:sp>
@@ -33328,47 +33484,404 @@
         </p:nvSpPr>
         <p:spPr>
           <a:xfrm>
-            <a:off x="6519672" y="2258568"/>
-            <a:ext cx="1828800" cy="292608"/>
-          </a:xfrm>
-          <a:prstGeom prst="rect">
-            <a:avLst/>
-          </a:prstGeom>
-          <a:noFill/>
-          <a:ln/>
-        </p:spPr>
-        <p:txBody>
-          <a:bodyPr wrap="square" lIns="0" tIns="0" rIns="0" bIns="0" rtlCol="0" anchor="ctr"/>
-          <a:lstStyle/>
-          <a:p>
-            <a:pPr algn="ctr" indent="0" marL="0">
-              <a:buNone/>
-            </a:pPr>
-            <a:r>
-              <a:rPr lang="en-US" sz="1300" b="1" dirty="0">
-                <a:solidFill>
-                  <a:srgbClr val="9D174D"/>
+            <a:off x="365760" y="3273552"/>
+            <a:ext cx="1371600" cy="658368"/>
+          </a:xfrm>
+          <a:prstGeom prst="rect">
+            <a:avLst/>
+          </a:prstGeom>
+          <a:noFill/>
+          <a:ln/>
+        </p:spPr>
+        <p:txBody>
+          <a:bodyPr wrap="square" lIns="0" tIns="0" rIns="0" bIns="0" rtlCol="0" anchor="ctr"/>
+          <a:lstStyle/>
+          <a:p>
+            <a:pPr algn="ctr" indent="0" marL="0">
+              <a:buNone/>
+            </a:pPr>
+            <a:r>
+              <a:rPr lang="en-US" sz="1100" b="1" dirty="0">
+                <a:solidFill>
+                  <a:srgbClr val="475569"/>
                 </a:solidFill>
                 <a:latin typeface="Trebuchet MS" pitchFamily="34" charset="0"/>
                 <a:ea typeface="Trebuchet MS" pitchFamily="34" charset="-122"/>
                 <a:cs typeface="Trebuchet MS" pitchFamily="34" charset="-120"/>
               </a:rPr>
-              <a:t>e</a:t>
-            </a:r>
-            <a:endParaRPr lang="en-US" sz="1300" dirty="0"/>
-          </a:p>
-        </p:txBody>
-      </p:sp>
-      <p:sp>
-        <p:nvSpPr>
-          <p:cNvPr id="24" name="Text 22"/>
-          <p:cNvSpPr/>
-          <p:nvPr/>
-        </p:nvSpPr>
-        <p:spPr>
-          <a:xfrm>
-            <a:off x="6519672" y="2569464"/>
-            <a:ext cx="1828800" cy="201168"/>
+              <a:t>Syllables</a:t>
+            </a:r>
+            <a:endParaRPr lang="en-US" sz="1100" dirty="0"/>
+          </a:p>
+        </p:txBody>
+      </p:sp>
+      <p:sp>
+        <p:nvSpPr>
+          <p:cNvPr id="24" name="Shape 22"/>
+          <p:cNvSpPr/>
+          <p:nvPr/>
+        </p:nvSpPr>
+        <p:spPr>
+          <a:xfrm>
+            <a:off x="1874520" y="3273552"/>
+            <a:ext cx="6903720" cy="658368"/>
+          </a:xfrm>
+          <a:prstGeom prst="rect">
+            <a:avLst>
+              <a:gd name="adj" fmla="val 8333"/>
+            </a:avLst>
+          </a:prstGeom>
+          <a:solidFill>
+            <a:srgbClr val="CCFBF1"/>
+          </a:solidFill>
+          <a:ln w="12700">
+            <a:solidFill>
+              <a:srgbClr val="0D9488"/>
+            </a:solidFill>
+            <a:prstDash val="solid"/>
+          </a:ln>
+        </p:spPr>
+      </p:sp>
+      <p:sp>
+        <p:nvSpPr>
+          <p:cNvPr id="25" name="Shape 23"/>
+          <p:cNvSpPr/>
+          <p:nvPr/>
+        </p:nvSpPr>
+        <p:spPr>
+          <a:xfrm>
+            <a:off x="2999232" y="3364992"/>
+            <a:ext cx="1645920" cy="475488"/>
+          </a:xfrm>
+          <a:prstGeom prst="rect">
+            <a:avLst>
+              <a:gd name="adj" fmla="val 9615"/>
+            </a:avLst>
+          </a:prstGeom>
+          <a:solidFill>
+            <a:srgbClr val="FFFFFF"/>
+          </a:solidFill>
+          <a:ln w="12700">
+            <a:solidFill>
+              <a:srgbClr val="0D9488"/>
+            </a:solidFill>
+            <a:prstDash val="solid"/>
+          </a:ln>
+        </p:spPr>
+      </p:sp>
+      <p:sp>
+        <p:nvSpPr>
+          <p:cNvPr id="26" name="Text 24"/>
+          <p:cNvSpPr/>
+          <p:nvPr/>
+        </p:nvSpPr>
+        <p:spPr>
+          <a:xfrm>
+            <a:off x="2999232" y="3364992"/>
+            <a:ext cx="1645920" cy="475488"/>
+          </a:xfrm>
+          <a:prstGeom prst="rect">
+            <a:avLst/>
+          </a:prstGeom>
+          <a:noFill/>
+          <a:ln/>
+        </p:spPr>
+        <p:txBody>
+          <a:bodyPr wrap="square" lIns="0" tIns="0" rIns="0" bIns="0" rtlCol="0" anchor="ctr"/>
+          <a:lstStyle/>
+          <a:p>
+            <a:pPr algn="ctr" indent="0" marL="0">
+              <a:buNone/>
+            </a:pPr>
+            <a:r>
+              <a:rPr lang="en-US" sz="1400" b="1" dirty="0">
+                <a:solidFill>
+                  <a:srgbClr val="0D9488"/>
+                </a:solidFill>
+                <a:latin typeface="Trebuchet MS" pitchFamily="34" charset="0"/>
+                <a:ea typeface="Trebuchet MS" pitchFamily="34" charset="-122"/>
+                <a:cs typeface="Trebuchet MS" pitchFamily="34" charset="-120"/>
+              </a:rPr>
+              <a:t>pho</a:t>
+            </a:r>
+            <a:endParaRPr lang="en-US" sz="1400" dirty="0"/>
+          </a:p>
+        </p:txBody>
+      </p:sp>
+      <p:sp>
+        <p:nvSpPr>
+          <p:cNvPr id="27" name="Text 25"/>
+          <p:cNvSpPr/>
+          <p:nvPr/>
+        </p:nvSpPr>
+        <p:spPr>
+          <a:xfrm>
+            <a:off x="4645152" y="3364992"/>
+            <a:ext cx="1097280" cy="475488"/>
+          </a:xfrm>
+          <a:prstGeom prst="rect">
+            <a:avLst/>
+          </a:prstGeom>
+          <a:noFill/>
+          <a:ln/>
+        </p:spPr>
+        <p:txBody>
+          <a:bodyPr wrap="square" lIns="0" tIns="0" rIns="0" bIns="0" rtlCol="0" anchor="ctr"/>
+          <a:lstStyle/>
+          <a:p>
+            <a:pPr algn="ctr" indent="0" marL="0">
+              <a:buNone/>
+            </a:pPr>
+            <a:r>
+              <a:rPr lang="en-US" sz="1600" b="1" dirty="0">
+                <a:solidFill>
+                  <a:srgbClr val="0D9488"/>
+                </a:solidFill>
+                <a:latin typeface="Trebuchet MS" pitchFamily="34" charset="0"/>
+                <a:ea typeface="Trebuchet MS" pitchFamily="34" charset="-122"/>
+                <a:cs typeface="Trebuchet MS" pitchFamily="34" charset="-120"/>
+              </a:rPr>
+              <a:t>·</a:t>
+            </a:r>
+            <a:endParaRPr lang="en-US" sz="1600" dirty="0"/>
+          </a:p>
+        </p:txBody>
+      </p:sp>
+      <p:sp>
+        <p:nvSpPr>
+          <p:cNvPr id="28" name="Shape 26"/>
+          <p:cNvSpPr/>
+          <p:nvPr/>
+        </p:nvSpPr>
+        <p:spPr>
+          <a:xfrm>
+            <a:off x="5742432" y="3364992"/>
+            <a:ext cx="1645920" cy="475488"/>
+          </a:xfrm>
+          <a:prstGeom prst="rect">
+            <a:avLst>
+              <a:gd name="adj" fmla="val 9615"/>
+            </a:avLst>
+          </a:prstGeom>
+          <a:solidFill>
+            <a:srgbClr val="FFFFFF"/>
+          </a:solidFill>
+          <a:ln w="12700">
+            <a:solidFill>
+              <a:srgbClr val="0D9488"/>
+            </a:solidFill>
+            <a:prstDash val="solid"/>
+          </a:ln>
+        </p:spPr>
+      </p:sp>
+      <p:sp>
+        <p:nvSpPr>
+          <p:cNvPr id="29" name="Text 27"/>
+          <p:cNvSpPr/>
+          <p:nvPr/>
+        </p:nvSpPr>
+        <p:spPr>
+          <a:xfrm>
+            <a:off x="5742432" y="3364992"/>
+            <a:ext cx="1645920" cy="475488"/>
+          </a:xfrm>
+          <a:prstGeom prst="rect">
+            <a:avLst/>
+          </a:prstGeom>
+          <a:noFill/>
+          <a:ln/>
+        </p:spPr>
+        <p:txBody>
+          <a:bodyPr wrap="square" lIns="0" tIns="0" rIns="0" bIns="0" rtlCol="0" anchor="ctr"/>
+          <a:lstStyle/>
+          <a:p>
+            <a:pPr algn="ctr" indent="0" marL="0">
+              <a:buNone/>
+            </a:pPr>
+            <a:r>
+              <a:rPr lang="en-US" sz="1400" b="1" dirty="0">
+                <a:solidFill>
+                  <a:srgbClr val="0D9488"/>
+                </a:solidFill>
+                <a:latin typeface="Trebuchet MS" pitchFamily="34" charset="0"/>
+                <a:ea typeface="Trebuchet MS" pitchFamily="34" charset="-122"/>
+                <a:cs typeface="Trebuchet MS" pitchFamily="34" charset="-120"/>
+              </a:rPr>
+              <a:t>neme</a:t>
+            </a:r>
+            <a:endParaRPr lang="en-US" sz="1400" dirty="0"/>
+          </a:p>
+        </p:txBody>
+      </p:sp>
+      <p:sp>
+        <p:nvSpPr>
+          <p:cNvPr id="30" name="Shape 28"/>
+          <p:cNvSpPr/>
+          <p:nvPr/>
+        </p:nvSpPr>
+        <p:spPr>
+          <a:xfrm>
+            <a:off x="365760" y="4096512"/>
+            <a:ext cx="1371600" cy="804672"/>
+          </a:xfrm>
+          <a:prstGeom prst="rect">
+            <a:avLst>
+              <a:gd name="adj" fmla="val 6818"/>
+            </a:avLst>
+          </a:prstGeom>
+          <a:solidFill>
+            <a:srgbClr val="E2E8F0"/>
+          </a:solidFill>
+          <a:ln w="12700">
+            <a:solidFill>
+              <a:srgbClr val="E2E8F0"/>
+            </a:solidFill>
+            <a:prstDash val="solid"/>
+          </a:ln>
+        </p:spPr>
+      </p:sp>
+      <p:sp>
+        <p:nvSpPr>
+          <p:cNvPr id="31" name="Text 29"/>
+          <p:cNvSpPr/>
+          <p:nvPr/>
+        </p:nvSpPr>
+        <p:spPr>
+          <a:xfrm>
+            <a:off x="365760" y="4096512"/>
+            <a:ext cx="1371600" cy="804672"/>
+          </a:xfrm>
+          <a:prstGeom prst="rect">
+            <a:avLst/>
+          </a:prstGeom>
+          <a:noFill/>
+          <a:ln/>
+        </p:spPr>
+        <p:txBody>
+          <a:bodyPr wrap="square" lIns="0" tIns="0" rIns="0" bIns="0" rtlCol="0" anchor="ctr"/>
+          <a:lstStyle/>
+          <a:p>
+            <a:pPr algn="ctr" indent="0" marL="0">
+              <a:buNone/>
+            </a:pPr>
+            <a:r>
+              <a:rPr lang="en-US" sz="1100" b="1" dirty="0">
+                <a:solidFill>
+                  <a:srgbClr val="475569"/>
+                </a:solidFill>
+                <a:latin typeface="Trebuchet MS" pitchFamily="34" charset="0"/>
+                <a:ea typeface="Trebuchet MS" pitchFamily="34" charset="-122"/>
+                <a:cs typeface="Trebuchet MS" pitchFamily="34" charset="-120"/>
+              </a:rPr>
+              <a:t>Phonemes</a:t>
+            </a:r>
+            <a:endParaRPr lang="en-US" sz="1100" dirty="0"/>
+          </a:p>
+        </p:txBody>
+      </p:sp>
+      <p:sp>
+        <p:nvSpPr>
+          <p:cNvPr id="32" name="Shape 30"/>
+          <p:cNvSpPr/>
+          <p:nvPr/>
+        </p:nvSpPr>
+        <p:spPr>
+          <a:xfrm>
+            <a:off x="1874520" y="4096512"/>
+            <a:ext cx="6903720" cy="804672"/>
+          </a:xfrm>
+          <a:prstGeom prst="rect">
+            <a:avLst>
+              <a:gd name="adj" fmla="val 6818"/>
+            </a:avLst>
+          </a:prstGeom>
+          <a:solidFill>
+            <a:srgbClr val="FCE7F3"/>
+          </a:solidFill>
+          <a:ln w="12700">
+            <a:solidFill>
+              <a:srgbClr val="DB2777"/>
+            </a:solidFill>
+            <a:prstDash val="solid"/>
+          </a:ln>
+        </p:spPr>
+      </p:sp>
+      <p:sp>
+        <p:nvSpPr>
+          <p:cNvPr id="33" name="Shape 31"/>
+          <p:cNvSpPr/>
+          <p:nvPr/>
+        </p:nvSpPr>
+        <p:spPr>
+          <a:xfrm>
+            <a:off x="2254649" y="4169664"/>
+            <a:ext cx="685800" cy="384048"/>
+          </a:xfrm>
+          <a:prstGeom prst="rect">
+            <a:avLst>
+              <a:gd name="adj" fmla="val 9524"/>
+            </a:avLst>
+          </a:prstGeom>
+          <a:solidFill>
+            <a:srgbClr val="FFFFFF"/>
+          </a:solidFill>
+          <a:ln w="12700">
+            <a:solidFill>
+              <a:srgbClr val="DB2777"/>
+            </a:solidFill>
+            <a:prstDash val="solid"/>
+          </a:ln>
+        </p:spPr>
+      </p:sp>
+      <p:sp>
+        <p:nvSpPr>
+          <p:cNvPr id="34" name="Text 32"/>
+          <p:cNvSpPr/>
+          <p:nvPr/>
+        </p:nvSpPr>
+        <p:spPr>
+          <a:xfrm>
+            <a:off x="2254649" y="4169664"/>
+            <a:ext cx="685800" cy="384048"/>
+          </a:xfrm>
+          <a:prstGeom prst="rect">
+            <a:avLst/>
+          </a:prstGeom>
+          <a:noFill/>
+          <a:ln/>
+        </p:spPr>
+        <p:txBody>
+          <a:bodyPr wrap="square" lIns="0" tIns="0" rIns="0" bIns="0" rtlCol="0" anchor="ctr"/>
+          <a:lstStyle/>
+          <a:p>
+            <a:pPr algn="ctr" indent="0" marL="0">
+              <a:buNone/>
+            </a:pPr>
+            <a:r>
+              <a:rPr lang="en-US" sz="900" b="1" dirty="0">
+                <a:solidFill>
+                  <a:srgbClr val="9D174D"/>
+                </a:solidFill>
+                <a:latin typeface="Trebuchet MS" pitchFamily="34" charset="0"/>
+                <a:ea typeface="Trebuchet MS" pitchFamily="34" charset="-122"/>
+                <a:cs typeface="Trebuchet MS" pitchFamily="34" charset="-120"/>
+              </a:rPr>
+              <a:t>ph</a:t>
+            </a:r>
+            <a:endParaRPr lang="en-US" sz="900" dirty="0"/>
+          </a:p>
+        </p:txBody>
+      </p:sp>
+      <p:sp>
+        <p:nvSpPr>
+          <p:cNvPr id="35" name="Text 33"/>
+          <p:cNvSpPr/>
+          <p:nvPr/>
+        </p:nvSpPr>
+        <p:spPr>
+          <a:xfrm>
+            <a:off x="2254649" y="4572000"/>
+            <a:ext cx="685800" cy="219456"/>
           </a:xfrm>
           <a:prstGeom prst="rect">
             <a:avLst/>
@@ -33384,232 +33897,232 @@
               <a:buNone/>
             </a:pPr>
             <a:r>
-              <a:rPr lang="en-US" sz="850" dirty="0">
-                <a:solidFill>
-                  <a:srgbClr val="475569"/>
+              <a:rPr lang="en-US" sz="750" i="1" dirty="0">
+                <a:solidFill>
+                  <a:srgbClr val="94A3B8"/>
                 </a:solidFill>
                 <a:latin typeface="Calibri" pitchFamily="34" charset="0"/>
                 <a:ea typeface="Calibri" pitchFamily="34" charset="-122"/>
                 <a:cs typeface="Calibri" pitchFamily="34" charset="-120"/>
               </a:rPr>
-              <a:t>noun-forming ending</a:t>
-            </a:r>
-            <a:endParaRPr lang="en-US" sz="850" dirty="0"/>
-          </a:p>
-        </p:txBody>
-      </p:sp>
-      <p:sp>
-        <p:nvSpPr>
-          <p:cNvPr id="25" name="Shape 23"/>
-          <p:cNvSpPr/>
-          <p:nvPr/>
-        </p:nvSpPr>
-        <p:spPr>
-          <a:xfrm>
-            <a:off x="365760" y="3273552"/>
-            <a:ext cx="1371600" cy="658368"/>
+              <a:t>/f/</a:t>
+            </a:r>
+            <a:endParaRPr lang="en-US" sz="750" dirty="0"/>
+          </a:p>
+        </p:txBody>
+      </p:sp>
+      <p:sp>
+        <p:nvSpPr>
+          <p:cNvPr id="36" name="Shape 34"/>
+          <p:cNvSpPr/>
+          <p:nvPr/>
+        </p:nvSpPr>
+        <p:spPr>
+          <a:xfrm>
+            <a:off x="3293146" y="4169664"/>
+            <a:ext cx="685800" cy="384048"/>
           </a:xfrm>
           <a:prstGeom prst="rect">
             <a:avLst>
-              <a:gd name="adj" fmla="val 8333"/>
+              <a:gd name="adj" fmla="val 9524"/>
             </a:avLst>
           </a:prstGeom>
           <a:solidFill>
-            <a:srgbClr val="E2E8F0"/>
-          </a:solidFill>
-          <a:ln w="12700">
-            <a:solidFill>
-              <a:srgbClr val="E2E8F0"/>
-            </a:solidFill>
-            <a:prstDash val="solid"/>
-          </a:ln>
-        </p:spPr>
-      </p:sp>
-      <p:sp>
-        <p:nvSpPr>
-          <p:cNvPr id="26" name="Text 24"/>
-          <p:cNvSpPr/>
-          <p:nvPr/>
-        </p:nvSpPr>
-        <p:spPr>
-          <a:xfrm>
-            <a:off x="365760" y="3273552"/>
-            <a:ext cx="1371600" cy="658368"/>
-          </a:xfrm>
-          <a:prstGeom prst="rect">
-            <a:avLst/>
-          </a:prstGeom>
-          <a:noFill/>
-          <a:ln/>
-        </p:spPr>
-        <p:txBody>
-          <a:bodyPr wrap="square" lIns="0" tIns="0" rIns="0" bIns="0" rtlCol="0" anchor="ctr"/>
-          <a:lstStyle/>
-          <a:p>
-            <a:pPr algn="ctr" indent="0" marL="0">
-              <a:buNone/>
-            </a:pPr>
-            <a:r>
-              <a:rPr lang="en-US" sz="1100" b="1" dirty="0">
-                <a:solidFill>
-                  <a:srgbClr val="475569"/>
+            <a:srgbClr val="FFFFFF"/>
+          </a:solidFill>
+          <a:ln w="12700">
+            <a:solidFill>
+              <a:srgbClr val="DB2777"/>
+            </a:solidFill>
+            <a:prstDash val="solid"/>
+          </a:ln>
+        </p:spPr>
+      </p:sp>
+      <p:sp>
+        <p:nvSpPr>
+          <p:cNvPr id="37" name="Text 35"/>
+          <p:cNvSpPr/>
+          <p:nvPr/>
+        </p:nvSpPr>
+        <p:spPr>
+          <a:xfrm>
+            <a:off x="3293146" y="4169664"/>
+            <a:ext cx="685800" cy="384048"/>
+          </a:xfrm>
+          <a:prstGeom prst="rect">
+            <a:avLst/>
+          </a:prstGeom>
+          <a:noFill/>
+          <a:ln/>
+        </p:spPr>
+        <p:txBody>
+          <a:bodyPr wrap="square" lIns="0" tIns="0" rIns="0" bIns="0" rtlCol="0" anchor="ctr"/>
+          <a:lstStyle/>
+          <a:p>
+            <a:pPr algn="ctr" indent="0" marL="0">
+              <a:buNone/>
+            </a:pPr>
+            <a:r>
+              <a:rPr lang="en-US" sz="900" b="1" dirty="0">
+                <a:solidFill>
+                  <a:srgbClr val="9D174D"/>
                 </a:solidFill>
                 <a:latin typeface="Trebuchet MS" pitchFamily="34" charset="0"/>
                 <a:ea typeface="Trebuchet MS" pitchFamily="34" charset="-122"/>
                 <a:cs typeface="Trebuchet MS" pitchFamily="34" charset="-120"/>
               </a:rPr>
-              <a:t>Syllables</a:t>
-            </a:r>
-            <a:endParaRPr lang="en-US" sz="1100" dirty="0"/>
-          </a:p>
-        </p:txBody>
-      </p:sp>
-      <p:sp>
-        <p:nvSpPr>
-          <p:cNvPr id="27" name="Shape 25"/>
-          <p:cNvSpPr/>
-          <p:nvPr/>
-        </p:nvSpPr>
-        <p:spPr>
-          <a:xfrm>
-            <a:off x="1874520" y="3273552"/>
-            <a:ext cx="6903720" cy="658368"/>
+              <a:t>o</a:t>
+            </a:r>
+            <a:endParaRPr lang="en-US" sz="900" dirty="0"/>
+          </a:p>
+        </p:txBody>
+      </p:sp>
+      <p:sp>
+        <p:nvSpPr>
+          <p:cNvPr id="38" name="Shape 36"/>
+          <p:cNvSpPr/>
+          <p:nvPr/>
+        </p:nvSpPr>
+        <p:spPr>
+          <a:xfrm>
+            <a:off x="4331643" y="4169664"/>
+            <a:ext cx="685800" cy="384048"/>
           </a:xfrm>
           <a:prstGeom prst="rect">
             <a:avLst>
-              <a:gd name="adj" fmla="val 8333"/>
+              <a:gd name="adj" fmla="val 9524"/>
             </a:avLst>
           </a:prstGeom>
           <a:solidFill>
-            <a:srgbClr val="CCFBF1"/>
-          </a:solidFill>
-          <a:ln w="12700">
-            <a:solidFill>
-              <a:srgbClr val="0D9488"/>
-            </a:solidFill>
-            <a:prstDash val="solid"/>
-          </a:ln>
-        </p:spPr>
-      </p:sp>
-      <p:sp>
-        <p:nvSpPr>
-          <p:cNvPr id="28" name="Shape 26"/>
-          <p:cNvSpPr/>
-          <p:nvPr/>
-        </p:nvSpPr>
-        <p:spPr>
-          <a:xfrm>
-            <a:off x="2313432" y="3364992"/>
-            <a:ext cx="1645920" cy="475488"/>
-          </a:xfrm>
-          <a:prstGeom prst="rect">
-            <a:avLst>
-              <a:gd name="adj" fmla="val 9615"/>
-            </a:avLst>
-          </a:prstGeom>
-          <a:solidFill>
             <a:srgbClr val="FFFFFF"/>
           </a:solidFill>
           <a:ln w="12700">
             <a:solidFill>
-              <a:srgbClr val="0D9488"/>
-            </a:solidFill>
-            <a:prstDash val="solid"/>
-          </a:ln>
-        </p:spPr>
-      </p:sp>
-      <p:sp>
-        <p:nvSpPr>
-          <p:cNvPr id="29" name="Text 27"/>
-          <p:cNvSpPr/>
-          <p:nvPr/>
-        </p:nvSpPr>
-        <p:spPr>
-          <a:xfrm>
-            <a:off x="2313432" y="3364992"/>
-            <a:ext cx="1645920" cy="475488"/>
-          </a:xfrm>
-          <a:prstGeom prst="rect">
-            <a:avLst/>
-          </a:prstGeom>
-          <a:noFill/>
-          <a:ln/>
-        </p:spPr>
-        <p:txBody>
-          <a:bodyPr wrap="square" lIns="0" tIns="0" rIns="0" bIns="0" rtlCol="0" anchor="ctr"/>
-          <a:lstStyle/>
-          <a:p>
-            <a:pPr algn="ctr" indent="0" marL="0">
-              <a:buNone/>
-            </a:pPr>
-            <a:r>
-              <a:rPr lang="en-US" sz="1400" b="1" dirty="0">
-                <a:solidFill>
-                  <a:srgbClr val="0D9488"/>
+              <a:srgbClr val="DB2777"/>
+            </a:solidFill>
+            <a:prstDash val="solid"/>
+          </a:ln>
+        </p:spPr>
+      </p:sp>
+      <p:sp>
+        <p:nvSpPr>
+          <p:cNvPr id="39" name="Text 37"/>
+          <p:cNvSpPr/>
+          <p:nvPr/>
+        </p:nvSpPr>
+        <p:spPr>
+          <a:xfrm>
+            <a:off x="4331643" y="4169664"/>
+            <a:ext cx="685800" cy="384048"/>
+          </a:xfrm>
+          <a:prstGeom prst="rect">
+            <a:avLst/>
+          </a:prstGeom>
+          <a:noFill/>
+          <a:ln/>
+        </p:spPr>
+        <p:txBody>
+          <a:bodyPr wrap="square" lIns="0" tIns="0" rIns="0" bIns="0" rtlCol="0" anchor="ctr"/>
+          <a:lstStyle/>
+          <a:p>
+            <a:pPr algn="ctr" indent="0" marL="0">
+              <a:buNone/>
+            </a:pPr>
+            <a:r>
+              <a:rPr lang="en-US" sz="900" b="1" dirty="0">
+                <a:solidFill>
+                  <a:srgbClr val="9D174D"/>
                 </a:solidFill>
                 <a:latin typeface="Trebuchet MS" pitchFamily="34" charset="0"/>
                 <a:ea typeface="Trebuchet MS" pitchFamily="34" charset="-122"/>
                 <a:cs typeface="Trebuchet MS" pitchFamily="34" charset="-120"/>
               </a:rPr>
-              <a:t>mi</a:t>
-            </a:r>
-            <a:endParaRPr lang="en-US" sz="1400" dirty="0"/>
-          </a:p>
-        </p:txBody>
-      </p:sp>
-      <p:sp>
-        <p:nvSpPr>
-          <p:cNvPr id="30" name="Text 28"/>
-          <p:cNvSpPr/>
-          <p:nvPr/>
-        </p:nvSpPr>
-        <p:spPr>
-          <a:xfrm>
-            <a:off x="3959352" y="3364992"/>
-            <a:ext cx="411480" cy="475488"/>
-          </a:xfrm>
-          <a:prstGeom prst="rect">
-            <a:avLst/>
-          </a:prstGeom>
-          <a:noFill/>
-          <a:ln/>
-        </p:spPr>
-        <p:txBody>
-          <a:bodyPr wrap="square" lIns="0" tIns="0" rIns="0" bIns="0" rtlCol="0" anchor="ctr"/>
-          <a:lstStyle/>
-          <a:p>
-            <a:pPr algn="ctr" indent="0" marL="0">
-              <a:buNone/>
-            </a:pPr>
-            <a:r>
-              <a:rPr lang="en-US" sz="1600" b="1" dirty="0">
-                <a:solidFill>
-                  <a:srgbClr val="0D9488"/>
+              <a:t>n</a:t>
+            </a:r>
+            <a:endParaRPr lang="en-US" sz="900" dirty="0"/>
+          </a:p>
+        </p:txBody>
+      </p:sp>
+      <p:sp>
+        <p:nvSpPr>
+          <p:cNvPr id="40" name="Shape 38"/>
+          <p:cNvSpPr/>
+          <p:nvPr/>
+        </p:nvSpPr>
+        <p:spPr>
+          <a:xfrm>
+            <a:off x="5370141" y="4169664"/>
+            <a:ext cx="685800" cy="384048"/>
+          </a:xfrm>
+          <a:prstGeom prst="rect">
+            <a:avLst>
+              <a:gd name="adj" fmla="val 9524"/>
+            </a:avLst>
+          </a:prstGeom>
+          <a:solidFill>
+            <a:srgbClr val="FFFFFF"/>
+          </a:solidFill>
+          <a:ln w="12700">
+            <a:solidFill>
+              <a:srgbClr val="DB2777"/>
+            </a:solidFill>
+            <a:prstDash val="solid"/>
+          </a:ln>
+        </p:spPr>
+      </p:sp>
+      <p:sp>
+        <p:nvSpPr>
+          <p:cNvPr id="41" name="Text 39"/>
+          <p:cNvSpPr/>
+          <p:nvPr/>
+        </p:nvSpPr>
+        <p:spPr>
+          <a:xfrm>
+            <a:off x="5370141" y="4169664"/>
+            <a:ext cx="685800" cy="384048"/>
+          </a:xfrm>
+          <a:prstGeom prst="rect">
+            <a:avLst/>
+          </a:prstGeom>
+          <a:noFill/>
+          <a:ln/>
+        </p:spPr>
+        <p:txBody>
+          <a:bodyPr wrap="square" lIns="0" tIns="0" rIns="0" bIns="0" rtlCol="0" anchor="ctr"/>
+          <a:lstStyle/>
+          <a:p>
+            <a:pPr algn="ctr" indent="0" marL="0">
+              <a:buNone/>
+            </a:pPr>
+            <a:r>
+              <a:rPr lang="en-US" sz="900" b="1" dirty="0">
+                <a:solidFill>
+                  <a:srgbClr val="9D174D"/>
                 </a:solidFill>
                 <a:latin typeface="Trebuchet MS" pitchFamily="34" charset="0"/>
                 <a:ea typeface="Trebuchet MS" pitchFamily="34" charset="-122"/>
                 <a:cs typeface="Trebuchet MS" pitchFamily="34" charset="-120"/>
               </a:rPr>
-              <a:t>·</a:t>
-            </a:r>
-            <a:endParaRPr lang="en-US" sz="1600" dirty="0"/>
-          </a:p>
-        </p:txBody>
-      </p:sp>
-      <p:sp>
-        <p:nvSpPr>
-          <p:cNvPr id="31" name="Shape 29"/>
-          <p:cNvSpPr/>
-          <p:nvPr/>
-        </p:nvSpPr>
-        <p:spPr>
-          <a:xfrm>
-            <a:off x="4370832" y="3364992"/>
-            <a:ext cx="1645920" cy="475488"/>
+              <a:t>e</a:t>
+            </a:r>
+            <a:endParaRPr lang="en-US" sz="900" dirty="0"/>
+          </a:p>
+        </p:txBody>
+      </p:sp>
+      <p:sp>
+        <p:nvSpPr>
+          <p:cNvPr id="42" name="Shape 40"/>
+          <p:cNvSpPr/>
+          <p:nvPr/>
+        </p:nvSpPr>
+        <p:spPr>
+          <a:xfrm>
+            <a:off x="6408638" y="4169664"/>
+            <a:ext cx="685800" cy="384048"/>
           </a:xfrm>
           <a:prstGeom prst="rect">
             <a:avLst>
-              <a:gd name="adj" fmla="val 9615"/>
+              <a:gd name="adj" fmla="val 9524"/>
             </a:avLst>
           </a:prstGeom>
           <a:solidFill>
@@ -33617,259 +34130,61 @@
           </a:solidFill>
           <a:ln w="12700">
             <a:solidFill>
-              <a:srgbClr val="0D9488"/>
-            </a:solidFill>
-            <a:prstDash val="solid"/>
-          </a:ln>
-        </p:spPr>
-      </p:sp>
-      <p:sp>
-        <p:nvSpPr>
-          <p:cNvPr id="32" name="Text 30"/>
-          <p:cNvSpPr/>
-          <p:nvPr/>
-        </p:nvSpPr>
-        <p:spPr>
-          <a:xfrm>
-            <a:off x="4370832" y="3364992"/>
-            <a:ext cx="1645920" cy="475488"/>
-          </a:xfrm>
-          <a:prstGeom prst="rect">
-            <a:avLst/>
-          </a:prstGeom>
-          <a:noFill/>
-          <a:ln/>
-        </p:spPr>
-        <p:txBody>
-          <a:bodyPr wrap="square" lIns="0" tIns="0" rIns="0" bIns="0" rtlCol="0" anchor="ctr"/>
-          <a:lstStyle/>
-          <a:p>
-            <a:pPr algn="ctr" indent="0" marL="0">
-              <a:buNone/>
-            </a:pPr>
-            <a:r>
-              <a:rPr lang="en-US" sz="1400" b="1" dirty="0">
-                <a:solidFill>
-                  <a:srgbClr val="0D9488"/>
+              <a:srgbClr val="DB2777"/>
+            </a:solidFill>
+            <a:prstDash val="solid"/>
+          </a:ln>
+        </p:spPr>
+      </p:sp>
+      <p:sp>
+        <p:nvSpPr>
+          <p:cNvPr id="43" name="Text 41"/>
+          <p:cNvSpPr/>
+          <p:nvPr/>
+        </p:nvSpPr>
+        <p:spPr>
+          <a:xfrm>
+            <a:off x="6408638" y="4169664"/>
+            <a:ext cx="685800" cy="384048"/>
+          </a:xfrm>
+          <a:prstGeom prst="rect">
+            <a:avLst/>
+          </a:prstGeom>
+          <a:noFill/>
+          <a:ln/>
+        </p:spPr>
+        <p:txBody>
+          <a:bodyPr wrap="square" lIns="0" tIns="0" rIns="0" bIns="0" rtlCol="0" anchor="ctr"/>
+          <a:lstStyle/>
+          <a:p>
+            <a:pPr algn="ctr" indent="0" marL="0">
+              <a:buNone/>
+            </a:pPr>
+            <a:r>
+              <a:rPr lang="en-US" sz="900" b="1" dirty="0">
+                <a:solidFill>
+                  <a:srgbClr val="9D174D"/>
                 </a:solidFill>
                 <a:latin typeface="Trebuchet MS" pitchFamily="34" charset="0"/>
                 <a:ea typeface="Trebuchet MS" pitchFamily="34" charset="-122"/>
                 <a:cs typeface="Trebuchet MS" pitchFamily="34" charset="-120"/>
               </a:rPr>
-              <a:t>cro</a:t>
-            </a:r>
-            <a:endParaRPr lang="en-US" sz="1400" dirty="0"/>
-          </a:p>
-        </p:txBody>
-      </p:sp>
-      <p:sp>
-        <p:nvSpPr>
-          <p:cNvPr id="33" name="Text 31"/>
-          <p:cNvSpPr/>
-          <p:nvPr/>
-        </p:nvSpPr>
-        <p:spPr>
-          <a:xfrm>
-            <a:off x="6016752" y="3364992"/>
-            <a:ext cx="411480" cy="475488"/>
-          </a:xfrm>
-          <a:prstGeom prst="rect">
-            <a:avLst/>
-          </a:prstGeom>
-          <a:noFill/>
-          <a:ln/>
-        </p:spPr>
-        <p:txBody>
-          <a:bodyPr wrap="square" lIns="0" tIns="0" rIns="0" bIns="0" rtlCol="0" anchor="ctr"/>
-          <a:lstStyle/>
-          <a:p>
-            <a:pPr algn="ctr" indent="0" marL="0">
-              <a:buNone/>
-            </a:pPr>
-            <a:r>
-              <a:rPr lang="en-US" sz="1600" b="1" dirty="0">
-                <a:solidFill>
-                  <a:srgbClr val="0D9488"/>
-                </a:solidFill>
-                <a:latin typeface="Trebuchet MS" pitchFamily="34" charset="0"/>
-                <a:ea typeface="Trebuchet MS" pitchFamily="34" charset="-122"/>
-                <a:cs typeface="Trebuchet MS" pitchFamily="34" charset="-120"/>
-              </a:rPr>
-              <a:t>·</a:t>
-            </a:r>
-            <a:endParaRPr lang="en-US" sz="1600" dirty="0"/>
-          </a:p>
-        </p:txBody>
-      </p:sp>
-      <p:sp>
-        <p:nvSpPr>
-          <p:cNvPr id="34" name="Shape 32"/>
-          <p:cNvSpPr/>
-          <p:nvPr/>
-        </p:nvSpPr>
-        <p:spPr>
-          <a:xfrm>
-            <a:off x="6428232" y="3364992"/>
-            <a:ext cx="1645920" cy="475488"/>
-          </a:xfrm>
-          <a:prstGeom prst="rect">
-            <a:avLst>
-              <a:gd name="adj" fmla="val 9615"/>
-            </a:avLst>
-          </a:prstGeom>
-          <a:solidFill>
-            <a:srgbClr val="FFFFFF"/>
-          </a:solidFill>
-          <a:ln w="12700">
-            <a:solidFill>
-              <a:srgbClr val="0D9488"/>
-            </a:solidFill>
-            <a:prstDash val="solid"/>
-          </a:ln>
-        </p:spPr>
-      </p:sp>
-      <p:sp>
-        <p:nvSpPr>
-          <p:cNvPr id="35" name="Text 33"/>
-          <p:cNvSpPr/>
-          <p:nvPr/>
-        </p:nvSpPr>
-        <p:spPr>
-          <a:xfrm>
-            <a:off x="6428232" y="3364992"/>
-            <a:ext cx="1645920" cy="475488"/>
-          </a:xfrm>
-          <a:prstGeom prst="rect">
-            <a:avLst/>
-          </a:prstGeom>
-          <a:noFill/>
-          <a:ln/>
-        </p:spPr>
-        <p:txBody>
-          <a:bodyPr wrap="square" lIns="0" tIns="0" rIns="0" bIns="0" rtlCol="0" anchor="ctr"/>
-          <a:lstStyle/>
-          <a:p>
-            <a:pPr algn="ctr" indent="0" marL="0">
-              <a:buNone/>
-            </a:pPr>
-            <a:r>
-              <a:rPr lang="en-US" sz="1400" b="1" dirty="0">
-                <a:solidFill>
-                  <a:srgbClr val="0D9488"/>
-                </a:solidFill>
-                <a:latin typeface="Trebuchet MS" pitchFamily="34" charset="0"/>
-                <a:ea typeface="Trebuchet MS" pitchFamily="34" charset="-122"/>
-                <a:cs typeface="Trebuchet MS" pitchFamily="34" charset="-120"/>
-              </a:rPr>
-              <a:t>phone</a:t>
-            </a:r>
-            <a:endParaRPr lang="en-US" sz="1400" dirty="0"/>
-          </a:p>
-        </p:txBody>
-      </p:sp>
-      <p:sp>
-        <p:nvSpPr>
-          <p:cNvPr id="36" name="Shape 34"/>
-          <p:cNvSpPr/>
-          <p:nvPr/>
-        </p:nvSpPr>
-        <p:spPr>
-          <a:xfrm>
-            <a:off x="365760" y="4096512"/>
-            <a:ext cx="1371600" cy="804672"/>
-          </a:xfrm>
-          <a:prstGeom prst="rect">
-            <a:avLst>
-              <a:gd name="adj" fmla="val 6818"/>
-            </a:avLst>
-          </a:prstGeom>
-          <a:solidFill>
-            <a:srgbClr val="E2E8F0"/>
-          </a:solidFill>
-          <a:ln w="12700">
-            <a:solidFill>
-              <a:srgbClr val="E2E8F0"/>
-            </a:solidFill>
-            <a:prstDash val="solid"/>
-          </a:ln>
-        </p:spPr>
-      </p:sp>
-      <p:sp>
-        <p:nvSpPr>
-          <p:cNvPr id="37" name="Text 35"/>
-          <p:cNvSpPr/>
-          <p:nvPr/>
-        </p:nvSpPr>
-        <p:spPr>
-          <a:xfrm>
-            <a:off x="365760" y="4096512"/>
-            <a:ext cx="1371600" cy="804672"/>
-          </a:xfrm>
-          <a:prstGeom prst="rect">
-            <a:avLst/>
-          </a:prstGeom>
-          <a:noFill/>
-          <a:ln/>
-        </p:spPr>
-        <p:txBody>
-          <a:bodyPr wrap="square" lIns="0" tIns="0" rIns="0" bIns="0" rtlCol="0" anchor="ctr"/>
-          <a:lstStyle/>
-          <a:p>
-            <a:pPr algn="ctr" indent="0" marL="0">
-              <a:buNone/>
-            </a:pPr>
-            <a:r>
-              <a:rPr lang="en-US" sz="1100" b="1" dirty="0">
-                <a:solidFill>
-                  <a:srgbClr val="475569"/>
-                </a:solidFill>
-                <a:latin typeface="Trebuchet MS" pitchFamily="34" charset="0"/>
-                <a:ea typeface="Trebuchet MS" pitchFamily="34" charset="-122"/>
-                <a:cs typeface="Trebuchet MS" pitchFamily="34" charset="-120"/>
-              </a:rPr>
-              <a:t>Phonemes</a:t>
-            </a:r>
-            <a:endParaRPr lang="en-US" sz="1100" dirty="0"/>
-          </a:p>
-        </p:txBody>
-      </p:sp>
-      <p:sp>
-        <p:nvSpPr>
-          <p:cNvPr id="38" name="Shape 36"/>
-          <p:cNvSpPr/>
-          <p:nvPr/>
-        </p:nvSpPr>
-        <p:spPr>
-          <a:xfrm>
-            <a:off x="1874520" y="4096512"/>
-            <a:ext cx="6903720" cy="804672"/>
-          </a:xfrm>
-          <a:prstGeom prst="rect">
-            <a:avLst>
-              <a:gd name="adj" fmla="val 6818"/>
-            </a:avLst>
-          </a:prstGeom>
-          <a:solidFill>
-            <a:srgbClr val="FCE7F3"/>
-          </a:solidFill>
-          <a:ln w="12700">
-            <a:solidFill>
-              <a:srgbClr val="DB2777"/>
-            </a:solidFill>
-            <a:prstDash val="solid"/>
-          </a:ln>
-        </p:spPr>
-      </p:sp>
-      <p:sp>
-        <p:nvSpPr>
-          <p:cNvPr id="39" name="Shape 37"/>
-          <p:cNvSpPr/>
-          <p:nvPr/>
-        </p:nvSpPr>
-        <p:spPr>
-          <a:xfrm>
-            <a:off x="1951330" y="4169664"/>
-            <a:ext cx="676656" cy="384048"/>
+              <a:t>m</a:t>
+            </a:r>
+            <a:endParaRPr lang="en-US" sz="900" dirty="0"/>
+          </a:p>
+        </p:txBody>
+      </p:sp>
+      <p:sp>
+        <p:nvSpPr>
+          <p:cNvPr id="44" name="Shape 42"/>
+          <p:cNvSpPr/>
+          <p:nvPr/>
+        </p:nvSpPr>
+        <p:spPr>
+          <a:xfrm>
+            <a:off x="7447135" y="4169664"/>
+            <a:ext cx="685800" cy="384048"/>
           </a:xfrm>
           <a:prstGeom prst="rect">
             <a:avLst>
@@ -33889,620 +34204,14 @@
       </p:sp>
       <p:sp>
         <p:nvSpPr>
-          <p:cNvPr id="40" name="Text 38"/>
-          <p:cNvSpPr/>
-          <p:nvPr/>
-        </p:nvSpPr>
-        <p:spPr>
-          <a:xfrm>
-            <a:off x="1951330" y="4169664"/>
-            <a:ext cx="676656" cy="384048"/>
-          </a:xfrm>
-          <a:prstGeom prst="rect">
-            <a:avLst/>
-          </a:prstGeom>
-          <a:noFill/>
-          <a:ln/>
-        </p:spPr>
-        <p:txBody>
-          <a:bodyPr wrap="square" lIns="0" tIns="0" rIns="0" bIns="0" rtlCol="0" anchor="ctr"/>
-          <a:lstStyle/>
-          <a:p>
-            <a:pPr algn="ctr" indent="0" marL="0">
-              <a:buNone/>
-            </a:pPr>
-            <a:r>
-              <a:rPr lang="en-US" sz="900" b="1" dirty="0">
-                <a:solidFill>
-                  <a:srgbClr val="9D174D"/>
-                </a:solidFill>
-                <a:latin typeface="Trebuchet MS" pitchFamily="34" charset="0"/>
-                <a:ea typeface="Trebuchet MS" pitchFamily="34" charset="-122"/>
-                <a:cs typeface="Trebuchet MS" pitchFamily="34" charset="-120"/>
-              </a:rPr>
-              <a:t>m</a:t>
-            </a:r>
-            <a:endParaRPr lang="en-US" sz="900" dirty="0"/>
-          </a:p>
-        </p:txBody>
-      </p:sp>
-      <p:sp>
-        <p:nvSpPr>
-          <p:cNvPr id="41" name="Shape 39"/>
-          <p:cNvSpPr/>
-          <p:nvPr/>
-        </p:nvSpPr>
-        <p:spPr>
-          <a:xfrm>
-            <a:off x="2677363" y="4169664"/>
-            <a:ext cx="676656" cy="384048"/>
-          </a:xfrm>
-          <a:prstGeom prst="rect">
-            <a:avLst>
-              <a:gd name="adj" fmla="val 9524"/>
-            </a:avLst>
-          </a:prstGeom>
-          <a:solidFill>
-            <a:srgbClr val="FFFFFF"/>
-          </a:solidFill>
-          <a:ln w="12700">
-            <a:solidFill>
-              <a:srgbClr val="DB2777"/>
-            </a:solidFill>
-            <a:prstDash val="solid"/>
-          </a:ln>
-        </p:spPr>
-      </p:sp>
-      <p:sp>
-        <p:nvSpPr>
-          <p:cNvPr id="42" name="Text 40"/>
-          <p:cNvSpPr/>
-          <p:nvPr/>
-        </p:nvSpPr>
-        <p:spPr>
-          <a:xfrm>
-            <a:off x="2677363" y="4169664"/>
-            <a:ext cx="676656" cy="384048"/>
-          </a:xfrm>
-          <a:prstGeom prst="rect">
-            <a:avLst/>
-          </a:prstGeom>
-          <a:noFill/>
-          <a:ln/>
-        </p:spPr>
-        <p:txBody>
-          <a:bodyPr wrap="square" lIns="0" tIns="0" rIns="0" bIns="0" rtlCol="0" anchor="ctr"/>
-          <a:lstStyle/>
-          <a:p>
-            <a:pPr algn="ctr" indent="0" marL="0">
-              <a:buNone/>
-            </a:pPr>
-            <a:r>
-              <a:rPr lang="en-US" sz="900" b="1" dirty="0">
-                <a:solidFill>
-                  <a:srgbClr val="9D174D"/>
-                </a:solidFill>
-                <a:latin typeface="Trebuchet MS" pitchFamily="34" charset="0"/>
-                <a:ea typeface="Trebuchet MS" pitchFamily="34" charset="-122"/>
-                <a:cs typeface="Trebuchet MS" pitchFamily="34" charset="-120"/>
-              </a:rPr>
-              <a:t>i</a:t>
-            </a:r>
-            <a:endParaRPr lang="en-US" sz="900" dirty="0"/>
-          </a:p>
-        </p:txBody>
-      </p:sp>
-      <p:sp>
-        <p:nvSpPr>
-          <p:cNvPr id="43" name="Shape 41"/>
-          <p:cNvSpPr/>
-          <p:nvPr/>
-        </p:nvSpPr>
-        <p:spPr>
-          <a:xfrm>
-            <a:off x="3403397" y="4169664"/>
-            <a:ext cx="676656" cy="384048"/>
-          </a:xfrm>
-          <a:prstGeom prst="rect">
-            <a:avLst>
-              <a:gd name="adj" fmla="val 9524"/>
-            </a:avLst>
-          </a:prstGeom>
-          <a:solidFill>
-            <a:srgbClr val="FFFFFF"/>
-          </a:solidFill>
-          <a:ln w="12700">
-            <a:solidFill>
-              <a:srgbClr val="DB2777"/>
-            </a:solidFill>
-            <a:prstDash val="solid"/>
-          </a:ln>
-        </p:spPr>
-      </p:sp>
-      <p:sp>
-        <p:nvSpPr>
-          <p:cNvPr id="44" name="Text 42"/>
-          <p:cNvSpPr/>
-          <p:nvPr/>
-        </p:nvSpPr>
-        <p:spPr>
-          <a:xfrm>
-            <a:off x="3403397" y="4169664"/>
-            <a:ext cx="676656" cy="384048"/>
-          </a:xfrm>
-          <a:prstGeom prst="rect">
-            <a:avLst/>
-          </a:prstGeom>
-          <a:noFill/>
-          <a:ln/>
-        </p:spPr>
-        <p:txBody>
-          <a:bodyPr wrap="square" lIns="0" tIns="0" rIns="0" bIns="0" rtlCol="0" anchor="ctr"/>
-          <a:lstStyle/>
-          <a:p>
-            <a:pPr algn="ctr" indent="0" marL="0">
-              <a:buNone/>
-            </a:pPr>
-            <a:r>
-              <a:rPr lang="en-US" sz="900" b="1" dirty="0">
-                <a:solidFill>
-                  <a:srgbClr val="9D174D"/>
-                </a:solidFill>
-                <a:latin typeface="Trebuchet MS" pitchFamily="34" charset="0"/>
-                <a:ea typeface="Trebuchet MS" pitchFamily="34" charset="-122"/>
-                <a:cs typeface="Trebuchet MS" pitchFamily="34" charset="-120"/>
-              </a:rPr>
-              <a:t>c</a:t>
-            </a:r>
-            <a:endParaRPr lang="en-US" sz="900" dirty="0"/>
-          </a:p>
-        </p:txBody>
-      </p:sp>
-      <p:sp>
-        <p:nvSpPr>
           <p:cNvPr id="45" name="Text 43"/>
           <p:cNvSpPr/>
           <p:nvPr/>
         </p:nvSpPr>
         <p:spPr>
           <a:xfrm>
-            <a:off x="3403397" y="4572000"/>
-            <a:ext cx="676656" cy="219456"/>
-          </a:xfrm>
-          <a:prstGeom prst="rect">
-            <a:avLst/>
-          </a:prstGeom>
-          <a:noFill/>
-          <a:ln/>
-        </p:spPr>
-        <p:txBody>
-          <a:bodyPr wrap="square" lIns="0" tIns="0" rIns="0" bIns="0" rtlCol="0" anchor="t"/>
-          <a:lstStyle/>
-          <a:p>
-            <a:pPr algn="ctr" indent="0" marL="0">
-              <a:buNone/>
-            </a:pPr>
-            <a:r>
-              <a:rPr lang="en-US" sz="750" i="1" dirty="0">
-                <a:solidFill>
-                  <a:srgbClr val="94A3B8"/>
-                </a:solidFill>
-                <a:latin typeface="Calibri" pitchFamily="34" charset="0"/>
-                <a:ea typeface="Calibri" pitchFamily="34" charset="-122"/>
-                <a:cs typeface="Calibri" pitchFamily="34" charset="-120"/>
-              </a:rPr>
-              <a:t>/k/</a:t>
-            </a:r>
-            <a:endParaRPr lang="en-US" sz="750" dirty="0"/>
-          </a:p>
-        </p:txBody>
-      </p:sp>
-      <p:sp>
-        <p:nvSpPr>
-          <p:cNvPr id="46" name="Shape 44"/>
-          <p:cNvSpPr/>
-          <p:nvPr/>
-        </p:nvSpPr>
-        <p:spPr>
-          <a:xfrm>
-            <a:off x="4129430" y="4169664"/>
-            <a:ext cx="676656" cy="384048"/>
-          </a:xfrm>
-          <a:prstGeom prst="rect">
-            <a:avLst>
-              <a:gd name="adj" fmla="val 9524"/>
-            </a:avLst>
-          </a:prstGeom>
-          <a:solidFill>
-            <a:srgbClr val="FFFFFF"/>
-          </a:solidFill>
-          <a:ln w="12700">
-            <a:solidFill>
-              <a:srgbClr val="DB2777"/>
-            </a:solidFill>
-            <a:prstDash val="solid"/>
-          </a:ln>
-        </p:spPr>
-      </p:sp>
-      <p:sp>
-        <p:nvSpPr>
-          <p:cNvPr id="47" name="Text 45"/>
-          <p:cNvSpPr/>
-          <p:nvPr/>
-        </p:nvSpPr>
-        <p:spPr>
-          <a:xfrm>
-            <a:off x="4129430" y="4169664"/>
-            <a:ext cx="676656" cy="384048"/>
-          </a:xfrm>
-          <a:prstGeom prst="rect">
-            <a:avLst/>
-          </a:prstGeom>
-          <a:noFill/>
-          <a:ln/>
-        </p:spPr>
-        <p:txBody>
-          <a:bodyPr wrap="square" lIns="0" tIns="0" rIns="0" bIns="0" rtlCol="0" anchor="ctr"/>
-          <a:lstStyle/>
-          <a:p>
-            <a:pPr algn="ctr" indent="0" marL="0">
-              <a:buNone/>
-            </a:pPr>
-            <a:r>
-              <a:rPr lang="en-US" sz="900" b="1" dirty="0">
-                <a:solidFill>
-                  <a:srgbClr val="9D174D"/>
-                </a:solidFill>
-                <a:latin typeface="Trebuchet MS" pitchFamily="34" charset="0"/>
-                <a:ea typeface="Trebuchet MS" pitchFamily="34" charset="-122"/>
-                <a:cs typeface="Trebuchet MS" pitchFamily="34" charset="-120"/>
-              </a:rPr>
-              <a:t>r</a:t>
-            </a:r>
-            <a:endParaRPr lang="en-US" sz="900" dirty="0"/>
-          </a:p>
-        </p:txBody>
-      </p:sp>
-      <p:sp>
-        <p:nvSpPr>
-          <p:cNvPr id="48" name="Shape 46"/>
-          <p:cNvSpPr/>
-          <p:nvPr/>
-        </p:nvSpPr>
-        <p:spPr>
-          <a:xfrm>
-            <a:off x="4855464" y="4169664"/>
-            <a:ext cx="676656" cy="384048"/>
-          </a:xfrm>
-          <a:prstGeom prst="rect">
-            <a:avLst>
-              <a:gd name="adj" fmla="val 9524"/>
-            </a:avLst>
-          </a:prstGeom>
-          <a:solidFill>
-            <a:srgbClr val="FFFFFF"/>
-          </a:solidFill>
-          <a:ln w="12700">
-            <a:solidFill>
-              <a:srgbClr val="DB2777"/>
-            </a:solidFill>
-            <a:prstDash val="solid"/>
-          </a:ln>
-        </p:spPr>
-      </p:sp>
-      <p:sp>
-        <p:nvSpPr>
-          <p:cNvPr id="49" name="Text 47"/>
-          <p:cNvSpPr/>
-          <p:nvPr/>
-        </p:nvSpPr>
-        <p:spPr>
-          <a:xfrm>
-            <a:off x="4855464" y="4169664"/>
-            <a:ext cx="676656" cy="384048"/>
-          </a:xfrm>
-          <a:prstGeom prst="rect">
-            <a:avLst/>
-          </a:prstGeom>
-          <a:noFill/>
-          <a:ln/>
-        </p:spPr>
-        <p:txBody>
-          <a:bodyPr wrap="square" lIns="0" tIns="0" rIns="0" bIns="0" rtlCol="0" anchor="ctr"/>
-          <a:lstStyle/>
-          <a:p>
-            <a:pPr algn="ctr" indent="0" marL="0">
-              <a:buNone/>
-            </a:pPr>
-            <a:r>
-              <a:rPr lang="en-US" sz="900" b="1" dirty="0">
-                <a:solidFill>
-                  <a:srgbClr val="9D174D"/>
-                </a:solidFill>
-                <a:latin typeface="Trebuchet MS" pitchFamily="34" charset="0"/>
-                <a:ea typeface="Trebuchet MS" pitchFamily="34" charset="-122"/>
-                <a:cs typeface="Trebuchet MS" pitchFamily="34" charset="-120"/>
-              </a:rPr>
-              <a:t>o</a:t>
-            </a:r>
-            <a:endParaRPr lang="en-US" sz="900" dirty="0"/>
-          </a:p>
-        </p:txBody>
-      </p:sp>
-      <p:sp>
-        <p:nvSpPr>
-          <p:cNvPr id="50" name="Shape 48"/>
-          <p:cNvSpPr/>
-          <p:nvPr/>
-        </p:nvSpPr>
-        <p:spPr>
-          <a:xfrm>
-            <a:off x="5581498" y="4169664"/>
-            <a:ext cx="676656" cy="384048"/>
-          </a:xfrm>
-          <a:prstGeom prst="rect">
-            <a:avLst>
-              <a:gd name="adj" fmla="val 9524"/>
-            </a:avLst>
-          </a:prstGeom>
-          <a:solidFill>
-            <a:srgbClr val="FFFFFF"/>
-          </a:solidFill>
-          <a:ln w="12700">
-            <a:solidFill>
-              <a:srgbClr val="DB2777"/>
-            </a:solidFill>
-            <a:prstDash val="solid"/>
-          </a:ln>
-        </p:spPr>
-      </p:sp>
-      <p:sp>
-        <p:nvSpPr>
-          <p:cNvPr id="51" name="Text 49"/>
-          <p:cNvSpPr/>
-          <p:nvPr/>
-        </p:nvSpPr>
-        <p:spPr>
-          <a:xfrm>
-            <a:off x="5581498" y="4169664"/>
-            <a:ext cx="676656" cy="384048"/>
-          </a:xfrm>
-          <a:prstGeom prst="rect">
-            <a:avLst/>
-          </a:prstGeom>
-          <a:noFill/>
-          <a:ln/>
-        </p:spPr>
-        <p:txBody>
-          <a:bodyPr wrap="square" lIns="0" tIns="0" rIns="0" bIns="0" rtlCol="0" anchor="ctr"/>
-          <a:lstStyle/>
-          <a:p>
-            <a:pPr algn="ctr" indent="0" marL="0">
-              <a:buNone/>
-            </a:pPr>
-            <a:r>
-              <a:rPr lang="en-US" sz="900" b="1" dirty="0">
-                <a:solidFill>
-                  <a:srgbClr val="9D174D"/>
-                </a:solidFill>
-                <a:latin typeface="Trebuchet MS" pitchFamily="34" charset="0"/>
-                <a:ea typeface="Trebuchet MS" pitchFamily="34" charset="-122"/>
-                <a:cs typeface="Trebuchet MS" pitchFamily="34" charset="-120"/>
-              </a:rPr>
-              <a:t>ph</a:t>
-            </a:r>
-            <a:endParaRPr lang="en-US" sz="900" dirty="0"/>
-          </a:p>
-        </p:txBody>
-      </p:sp>
-      <p:sp>
-        <p:nvSpPr>
-          <p:cNvPr id="52" name="Text 50"/>
-          <p:cNvSpPr/>
-          <p:nvPr/>
-        </p:nvSpPr>
-        <p:spPr>
-          <a:xfrm>
-            <a:off x="5581498" y="4572000"/>
-            <a:ext cx="676656" cy="219456"/>
-          </a:xfrm>
-          <a:prstGeom prst="rect">
-            <a:avLst/>
-          </a:prstGeom>
-          <a:noFill/>
-          <a:ln/>
-        </p:spPr>
-        <p:txBody>
-          <a:bodyPr wrap="square" lIns="0" tIns="0" rIns="0" bIns="0" rtlCol="0" anchor="t"/>
-          <a:lstStyle/>
-          <a:p>
-            <a:pPr algn="ctr" indent="0" marL="0">
-              <a:buNone/>
-            </a:pPr>
-            <a:r>
-              <a:rPr lang="en-US" sz="750" i="1" dirty="0">
-                <a:solidFill>
-                  <a:srgbClr val="94A3B8"/>
-                </a:solidFill>
-                <a:latin typeface="Calibri" pitchFamily="34" charset="0"/>
-                <a:ea typeface="Calibri" pitchFamily="34" charset="-122"/>
-                <a:cs typeface="Calibri" pitchFamily="34" charset="-120"/>
-              </a:rPr>
-              <a:t>/f/</a:t>
-            </a:r>
-            <a:endParaRPr lang="en-US" sz="750" dirty="0"/>
-          </a:p>
-        </p:txBody>
-      </p:sp>
-      <p:sp>
-        <p:nvSpPr>
-          <p:cNvPr id="53" name="Shape 51"/>
-          <p:cNvSpPr/>
-          <p:nvPr/>
-        </p:nvSpPr>
-        <p:spPr>
-          <a:xfrm>
-            <a:off x="6307531" y="4169664"/>
-            <a:ext cx="676656" cy="384048"/>
-          </a:xfrm>
-          <a:prstGeom prst="rect">
-            <a:avLst>
-              <a:gd name="adj" fmla="val 9524"/>
-            </a:avLst>
-          </a:prstGeom>
-          <a:solidFill>
-            <a:srgbClr val="FFFFFF"/>
-          </a:solidFill>
-          <a:ln w="12700">
-            <a:solidFill>
-              <a:srgbClr val="DB2777"/>
-            </a:solidFill>
-            <a:prstDash val="solid"/>
-          </a:ln>
-        </p:spPr>
-      </p:sp>
-      <p:sp>
-        <p:nvSpPr>
-          <p:cNvPr id="54" name="Text 52"/>
-          <p:cNvSpPr/>
-          <p:nvPr/>
-        </p:nvSpPr>
-        <p:spPr>
-          <a:xfrm>
-            <a:off x="6307531" y="4169664"/>
-            <a:ext cx="676656" cy="384048"/>
-          </a:xfrm>
-          <a:prstGeom prst="rect">
-            <a:avLst/>
-          </a:prstGeom>
-          <a:noFill/>
-          <a:ln/>
-        </p:spPr>
-        <p:txBody>
-          <a:bodyPr wrap="square" lIns="0" tIns="0" rIns="0" bIns="0" rtlCol="0" anchor="ctr"/>
-          <a:lstStyle/>
-          <a:p>
-            <a:pPr algn="ctr" indent="0" marL="0">
-              <a:buNone/>
-            </a:pPr>
-            <a:r>
-              <a:rPr lang="en-US" sz="900" b="1" dirty="0">
-                <a:solidFill>
-                  <a:srgbClr val="9D174D"/>
-                </a:solidFill>
-                <a:latin typeface="Trebuchet MS" pitchFamily="34" charset="0"/>
-                <a:ea typeface="Trebuchet MS" pitchFamily="34" charset="-122"/>
-                <a:cs typeface="Trebuchet MS" pitchFamily="34" charset="-120"/>
-              </a:rPr>
-              <a:t>o</a:t>
-            </a:r>
-            <a:endParaRPr lang="en-US" sz="900" dirty="0"/>
-          </a:p>
-        </p:txBody>
-      </p:sp>
-      <p:sp>
-        <p:nvSpPr>
-          <p:cNvPr id="55" name="Shape 53"/>
-          <p:cNvSpPr/>
-          <p:nvPr/>
-        </p:nvSpPr>
-        <p:spPr>
-          <a:xfrm>
-            <a:off x="7033565" y="4169664"/>
-            <a:ext cx="676656" cy="384048"/>
-          </a:xfrm>
-          <a:prstGeom prst="rect">
-            <a:avLst>
-              <a:gd name="adj" fmla="val 9524"/>
-            </a:avLst>
-          </a:prstGeom>
-          <a:solidFill>
-            <a:srgbClr val="FFFFFF"/>
-          </a:solidFill>
-          <a:ln w="12700">
-            <a:solidFill>
-              <a:srgbClr val="DB2777"/>
-            </a:solidFill>
-            <a:prstDash val="solid"/>
-          </a:ln>
-        </p:spPr>
-      </p:sp>
-      <p:sp>
-        <p:nvSpPr>
-          <p:cNvPr id="56" name="Text 54"/>
-          <p:cNvSpPr/>
-          <p:nvPr/>
-        </p:nvSpPr>
-        <p:spPr>
-          <a:xfrm>
-            <a:off x="7033565" y="4169664"/>
-            <a:ext cx="676656" cy="384048"/>
-          </a:xfrm>
-          <a:prstGeom prst="rect">
-            <a:avLst/>
-          </a:prstGeom>
-          <a:noFill/>
-          <a:ln/>
-        </p:spPr>
-        <p:txBody>
-          <a:bodyPr wrap="square" lIns="0" tIns="0" rIns="0" bIns="0" rtlCol="0" anchor="ctr"/>
-          <a:lstStyle/>
-          <a:p>
-            <a:pPr algn="ctr" indent="0" marL="0">
-              <a:buNone/>
-            </a:pPr>
-            <a:r>
-              <a:rPr lang="en-US" sz="900" b="1" dirty="0">
-                <a:solidFill>
-                  <a:srgbClr val="9D174D"/>
-                </a:solidFill>
-                <a:latin typeface="Trebuchet MS" pitchFamily="34" charset="0"/>
-                <a:ea typeface="Trebuchet MS" pitchFamily="34" charset="-122"/>
-                <a:cs typeface="Trebuchet MS" pitchFamily="34" charset="-120"/>
-              </a:rPr>
-              <a:t>n</a:t>
-            </a:r>
-            <a:endParaRPr lang="en-US" sz="900" dirty="0"/>
-          </a:p>
-        </p:txBody>
-      </p:sp>
-      <p:sp>
-        <p:nvSpPr>
-          <p:cNvPr id="57" name="Shape 55"/>
-          <p:cNvSpPr/>
-          <p:nvPr/>
-        </p:nvSpPr>
-        <p:spPr>
-          <a:xfrm>
-            <a:off x="7759598" y="4169664"/>
-            <a:ext cx="676656" cy="384048"/>
-          </a:xfrm>
-          <a:prstGeom prst="rect">
-            <a:avLst>
-              <a:gd name="adj" fmla="val 9524"/>
-            </a:avLst>
-          </a:prstGeom>
-          <a:solidFill>
-            <a:srgbClr val="FFFFFF"/>
-          </a:solidFill>
-          <a:ln w="12700">
-            <a:solidFill>
-              <a:srgbClr val="DB2777"/>
-            </a:solidFill>
-            <a:prstDash val="solid"/>
-          </a:ln>
-        </p:spPr>
-      </p:sp>
-      <p:sp>
-        <p:nvSpPr>
-          <p:cNvPr id="58" name="Text 56"/>
-          <p:cNvSpPr/>
-          <p:nvPr/>
-        </p:nvSpPr>
-        <p:spPr>
-          <a:xfrm>
-            <a:off x="7759598" y="4169664"/>
-            <a:ext cx="676656" cy="384048"/>
+            <a:off x="7447135" y="4169664"/>
+            <a:ext cx="685800" cy="384048"/>
           </a:xfrm>
           <a:prstGeom prst="rect">
             <a:avLst/>
@@ -37397,7 +37106,7 @@
                 <a:ea typeface="Trebuchet MS" pitchFamily="34" charset="-122"/>
                 <a:cs typeface="Trebuchet MS" pitchFamily="34" charset="-120"/>
               </a:rPr>
-              <a:t>megaphone</a:t>
+              <a:t>saxophone</a:t>
             </a:r>
             <a:endParaRPr lang="en-US" sz="1200" dirty="0"/>
           </a:p>
@@ -37463,7 +37172,7 @@
                 <a:ea typeface="Trebuchet MS" pitchFamily="34" charset="-122"/>
                 <a:cs typeface="Trebuchet MS" pitchFamily="34" charset="-120"/>
               </a:rPr>
-              <a:t>saxophone</a:t>
+              <a:t>megaphone</a:t>
             </a:r>
             <a:endParaRPr lang="en-US" sz="1200" dirty="0"/>
           </a:p>
@@ -37529,7 +37238,7 @@
                 <a:ea typeface="Trebuchet MS" pitchFamily="34" charset="-122"/>
                 <a:cs typeface="Trebuchet MS" pitchFamily="34" charset="-120"/>
               </a:rPr>
-              <a:t>phoneme</a:t>
+              <a:t>xylophone</a:t>
             </a:r>
             <a:endParaRPr lang="en-US" sz="1200" dirty="0"/>
           </a:p>
@@ -37595,7 +37304,7 @@
                 <a:ea typeface="Trebuchet MS" pitchFamily="34" charset="-122"/>
                 <a:cs typeface="Trebuchet MS" pitchFamily="34" charset="-120"/>
               </a:rPr>
-              <a:t>xylophone</a:t>
+              <a:t>phoneme</a:t>
             </a:r>
             <a:endParaRPr lang="en-US" sz="1200" dirty="0"/>
           </a:p>
@@ -38783,7 +38492,7 @@
                 <a:ea typeface="Calibri" pitchFamily="34" charset="-122"/>
                 <a:cs typeface="Calibri" pitchFamily="34" charset="-120"/>
               </a:rPr>
-              <a:t>1.  The root 'phon' comes from Greek and means sound or voice.</a:t>
+              <a:t>1.  The word 'telephone' has nothing to do with sound.</a:t>
             </a:r>
             <a:endParaRPr lang="en-US" sz="1300" dirty="0"/>
           </a:p>
@@ -38806,11 +38515,11 @@
             </a:avLst>
           </a:prstGeom>
           <a:solidFill>
-            <a:srgbClr val="DCFCE7"/>
-          </a:solidFill>
-          <a:ln w="12700">
-            <a:solidFill>
-              <a:srgbClr val="16A34A"/>
+            <a:srgbClr val="FEE2E2"/>
+          </a:solidFill>
+          <a:ln w="12700">
+            <a:solidFill>
+              <a:srgbClr val="DC2626"/>
             </a:solidFill>
             <a:prstDash val="solid"/>
           </a:ln>
@@ -38843,13 +38552,13 @@
             <a:r>
               <a:rPr lang="en-US" sz="1100" b="1" dirty="0">
                 <a:solidFill>
-                  <a:srgbClr val="16A34A"/>
+                  <a:srgbClr val="DC2626"/>
                 </a:solidFill>
                 <a:latin typeface="Trebuchet MS" pitchFamily="34" charset="0"/>
                 <a:ea typeface="Trebuchet MS" pitchFamily="34" charset="-122"/>
                 <a:cs typeface="Trebuchet MS" pitchFamily="34" charset="-120"/>
               </a:rPr>
-              <a:t>TRUE</a:t>
+              <a:t>FALSE</a:t>
             </a:r>
             <a:endParaRPr lang="en-US" sz="1100" dirty="0"/>
           </a:p>
@@ -38922,7 +38631,7 @@
                 <a:ea typeface="Calibri" pitchFamily="34" charset="-122"/>
                 <a:cs typeface="Calibri" pitchFamily="34" charset="-120"/>
               </a:rPr>
-              <a:t>2.  A microphone makes sounds quieter so fewer people can hear them.</a:t>
+              <a:t>2.  The root 'phon' comes from a Greek word meaning sound or voice.</a:t>
             </a:r>
             <a:endParaRPr lang="en-US" sz="1300" dirty="0"/>
           </a:p>
@@ -38945,11 +38654,11 @@
             </a:avLst>
           </a:prstGeom>
           <a:solidFill>
-            <a:srgbClr val="FEE2E2"/>
-          </a:solidFill>
-          <a:ln w="12700">
-            <a:solidFill>
-              <a:srgbClr val="DC2626"/>
+            <a:srgbClr val="DCFCE7"/>
+          </a:solidFill>
+          <a:ln w="12700">
+            <a:solidFill>
+              <a:srgbClr val="16A34A"/>
             </a:solidFill>
             <a:prstDash val="solid"/>
           </a:ln>
@@ -38982,13 +38691,13 @@
             <a:r>
               <a:rPr lang="en-US" sz="1100" b="1" dirty="0">
                 <a:solidFill>
-                  <a:srgbClr val="DC2626"/>
+                  <a:srgbClr val="16A34A"/>
                 </a:solidFill>
                 <a:latin typeface="Trebuchet MS" pitchFamily="34" charset="0"/>
                 <a:ea typeface="Trebuchet MS" pitchFamily="34" charset="-122"/>
                 <a:cs typeface="Trebuchet MS" pitchFamily="34" charset="-120"/>
               </a:rPr>
-              <a:t>FALSE</a:t>
+              <a:t>TRUE</a:t>
             </a:r>
             <a:endParaRPr lang="en-US" sz="1100" dirty="0"/>
           </a:p>
@@ -39061,7 +38770,7 @@
                 <a:ea typeface="Calibri" pitchFamily="34" charset="-122"/>
                 <a:cs typeface="Calibri" pitchFamily="34" charset="-120"/>
               </a:rPr>
-              <a:t>3.  The word 'phoneme' contains the root 'phon', which relates to sound.</a:t>
+              <a:t>3.  A microphone makes sounds quieter so they are easier to listen to.</a:t>
             </a:r>
             <a:endParaRPr lang="en-US" sz="1300" dirty="0"/>
           </a:p>
@@ -39084,11 +38793,11 @@
             </a:avLst>
           </a:prstGeom>
           <a:solidFill>
-            <a:srgbClr val="DCFCE7"/>
-          </a:solidFill>
-          <a:ln w="12700">
-            <a:solidFill>
-              <a:srgbClr val="16A34A"/>
+            <a:srgbClr val="FEE2E2"/>
+          </a:solidFill>
+          <a:ln w="12700">
+            <a:solidFill>
+              <a:srgbClr val="DC2626"/>
             </a:solidFill>
             <a:prstDash val="solid"/>
           </a:ln>
@@ -39121,13 +38830,13 @@
             <a:r>
               <a:rPr lang="en-US" sz="1100" b="1" dirty="0">
                 <a:solidFill>
-                  <a:srgbClr val="16A34A"/>
+                  <a:srgbClr val="DC2626"/>
                 </a:solidFill>
                 <a:latin typeface="Trebuchet MS" pitchFamily="34" charset="0"/>
                 <a:ea typeface="Trebuchet MS" pitchFamily="34" charset="-122"/>
                 <a:cs typeface="Trebuchet MS" pitchFamily="34" charset="-120"/>
               </a:rPr>
-              <a:t>TRUE</a:t>
+              <a:t>FALSE</a:t>
             </a:r>
             <a:endParaRPr lang="en-US" sz="1100" dirty="0"/>
           </a:p>
@@ -39339,7 +39048,7 @@
                 <a:ea typeface="Calibri" pitchFamily="34" charset="-122"/>
                 <a:cs typeface="Calibri" pitchFamily="34" charset="-120"/>
               </a:rPr>
-              <a:t>5.  The root 'phon' comes from the Latin word for writing.</a:t>
+              <a:t>5.  Phonics lessons help students learn the sounds that letters make.</a:t>
             </a:r>
             <a:endParaRPr lang="en-US" sz="1300" dirty="0"/>
           </a:p>
@@ -39362,11 +39071,11 @@
             </a:avLst>
           </a:prstGeom>
           <a:solidFill>
-            <a:srgbClr val="FEE2E2"/>
-          </a:solidFill>
-          <a:ln w="12700">
-            <a:solidFill>
-              <a:srgbClr val="DC2626"/>
+            <a:srgbClr val="DCFCE7"/>
+          </a:solidFill>
+          <a:ln w="12700">
+            <a:solidFill>
+              <a:srgbClr val="16A34A"/>
             </a:solidFill>
             <a:prstDash val="solid"/>
           </a:ln>
@@ -39399,13 +39108,13 @@
             <a:r>
               <a:rPr lang="en-US" sz="1100" b="1" dirty="0">
                 <a:solidFill>
-                  <a:srgbClr val="DC2626"/>
+                  <a:srgbClr val="16A34A"/>
                 </a:solidFill>
                 <a:latin typeface="Trebuchet MS" pitchFamily="34" charset="0"/>
                 <a:ea typeface="Trebuchet MS" pitchFamily="34" charset="-122"/>
                 <a:cs typeface="Trebuchet MS" pitchFamily="34" charset="-120"/>
               </a:rPr>
-              <a:t>FALSE</a:t>
+              <a:t>TRUE</a:t>
             </a:r>
             <a:endParaRPr lang="en-US" sz="1100" dirty="0"/>
           </a:p>
@@ -40242,7 +39951,7 @@
                 <a:ea typeface="Trebuchet MS" pitchFamily="34" charset="-122"/>
                 <a:cs typeface="Trebuchet MS" pitchFamily="34" charset="-120"/>
               </a:rPr>
-              <a:t>megaphone</a:t>
+              <a:t>saxophone</a:t>
             </a:r>
             <a:endParaRPr lang="en-US" sz="1300" dirty="0"/>
           </a:p>
@@ -40308,7 +40017,7 @@
                 <a:ea typeface="Trebuchet MS" pitchFamily="34" charset="-122"/>
                 <a:cs typeface="Trebuchet MS" pitchFamily="34" charset="-120"/>
               </a:rPr>
-              <a:t>saxophone</a:t>
+              <a:t>megaphone</a:t>
             </a:r>
             <a:endParaRPr lang="en-US" sz="1300" dirty="0"/>
           </a:p>
@@ -40374,7 +40083,7 @@
                 <a:ea typeface="Trebuchet MS" pitchFamily="34" charset="-122"/>
                 <a:cs typeface="Trebuchet MS" pitchFamily="34" charset="-120"/>
               </a:rPr>
-              <a:t>phoneme</a:t>
+              <a:t>xylophone</a:t>
             </a:r>
             <a:endParaRPr lang="en-US" sz="1300" dirty="0"/>
           </a:p>
@@ -42618,7 +42327,7 @@
                 <a:ea typeface="Calibri" pitchFamily="34" charset="-122"/>
                 <a:cs typeface="Calibri" pitchFamily="34" charset="-120"/>
               </a:rPr>
-              <a:t>A long piece of music written for a full orchestra, where all the instruments play together in harmony.</a:t>
+              <a:t>A long piece of music played by a large orchestra with many different instruments working together.</a:t>
             </a:r>
             <a:endParaRPr lang="en-US" sz="1200" dirty="0"/>
           </a:p>
@@ -42757,7 +42466,7 @@
                 <a:ea typeface="Calibri" pitchFamily="34" charset="-122"/>
                 <a:cs typeface="Calibri" pitchFamily="34" charset="-120"/>
               </a:rPr>
-              <a:t>A cone-shaped device you speak into to make your voice much louder.</a:t>
+              <a:t>A musical instrument you blow into that makes sound through a reed, often used in jazz music.</a:t>
             </a:r>
             <a:endParaRPr lang="en-US" sz="1200" dirty="0"/>
           </a:p>
@@ -42896,7 +42605,7 @@
                 <a:ea typeface="Calibri" pitchFamily="34" charset="-122"/>
                 <a:cs typeface="Calibri" pitchFamily="34" charset="-120"/>
               </a:rPr>
-              <a:t>A device that lets you speak to someone far away by sending your voice through wires or signals.</a:t>
+              <a:t>A device that lets you talk to someone far away by sending sound through wires or signals.</a:t>
             </a:r>
             <a:endParaRPr lang="en-US" sz="1200" dirty="0"/>
           </a:p>
@@ -43035,7 +42744,7 @@
                 <a:ea typeface="Calibri" pitchFamily="34" charset="-122"/>
                 <a:cs typeface="Calibri" pitchFamily="34" charset="-120"/>
               </a:rPr>
-              <a:t>A musical instrument you blow into, usually made of brass, that makes a rich, warm sound.</a:t>
+              <a:t>A cone-shaped device you speak into to make your voice much louder for a crowd to hear.</a:t>
             </a:r>
             <a:endParaRPr lang="en-US" sz="1200" dirty="0"/>
           </a:p>
@@ -43108,7 +42817,7 @@
                 <a:ea typeface="Trebuchet MS" pitchFamily="34" charset="-122"/>
                 <a:cs typeface="Trebuchet MS" pitchFamily="34" charset="-120"/>
               </a:rPr>
-              <a:t>megaphone</a:t>
+              <a:t>saxophone</a:t>
             </a:r>
             <a:endParaRPr lang="en-US" sz="1200" dirty="0"/>
           </a:p>
@@ -43174,7 +42883,7 @@
                 <a:ea typeface="Calibri" pitchFamily="34" charset="-122"/>
                 <a:cs typeface="Calibri" pitchFamily="34" charset="-120"/>
               </a:rPr>
-              <a:t>The smallest unit of sound in a word, such as the /b/ sound at the start of 'ball'.</a:t>
+              <a:t>A musical instrument with wooden bars that you hit with mallets to make different sounds.</a:t>
             </a:r>
             <a:endParaRPr lang="en-US" sz="1200" dirty="0"/>
           </a:p>
@@ -43247,7 +42956,7 @@
                 <a:ea typeface="Trebuchet MS" pitchFamily="34" charset="-122"/>
                 <a:cs typeface="Trebuchet MS" pitchFamily="34" charset="-120"/>
               </a:rPr>
-              <a:t>saxophone</a:t>
+              <a:t>megaphone</a:t>
             </a:r>
             <a:endParaRPr lang="en-US" sz="1200" dirty="0"/>
           </a:p>
@@ -43313,7 +43022,7 @@
                 <a:ea typeface="Calibri" pitchFamily="34" charset="-122"/>
                 <a:cs typeface="Calibri" pitchFamily="34" charset="-120"/>
               </a:rPr>
-              <a:t>A way of learning to read by matching letters to the sounds they make.</a:t>
+              <a:t>A way of learning to read by connecting letters to the sounds they make.</a:t>
             </a:r>
             <a:endParaRPr lang="en-US" sz="1200" dirty="0"/>
           </a:p>
@@ -43386,7 +43095,7 @@
                 <a:ea typeface="Trebuchet MS" pitchFamily="34" charset="-122"/>
                 <a:cs typeface="Trebuchet MS" pitchFamily="34" charset="-120"/>
               </a:rPr>
-              <a:t>phoneme</a:t>
+              <a:t>xylophone</a:t>
             </a:r>
             <a:endParaRPr lang="en-US" sz="1200" dirty="0"/>
           </a:p>
@@ -43452,7 +43161,7 @@
                 <a:ea typeface="Calibri" pitchFamily="34" charset="-122"/>
                 <a:cs typeface="Calibri" pitchFamily="34" charset="-120"/>
               </a:rPr>
-              <a:t>A small tool that picks up sounds and makes your voice louder so more people can hear you.</a:t>
+              <a:t>A tool that picks up sounds and makes them louder so more people can hear.</a:t>
             </a:r>
             <a:endParaRPr lang="en-US" sz="1200" dirty="0"/>
           </a:p>
@@ -43947,7 +43656,7 @@
                 <a:ea typeface="Calibri" pitchFamily="34" charset="-122"/>
                 <a:cs typeface="Calibri" pitchFamily="34" charset="-120"/>
               </a:rPr>
-              <a:t>The scientist spoke into the microphone so the whole audience could hear her clearly.</a:t>
+              <a:t>The student spoke clearly into the microphone so the whole audience could hear her speech.</a:t>
             </a:r>
             <a:endParaRPr lang="en-US" sz="1500" dirty="0"/>
           </a:p>
@@ -44111,7 +43820,7 @@
                 <a:ea typeface="Calibri" pitchFamily="34" charset="-122"/>
                 <a:cs typeface="Calibri" pitchFamily="34" charset="-120"/>
               </a:rPr>
-              <a:t>We are learning phonics this term to help us sound out tricky new words.</a:t>
+              <a:t>Learning phonics helps young readers sound out new and unfamiliar words.</a:t>
             </a:r>
             <a:endParaRPr lang="en-US" sz="1500" dirty="0"/>
           </a:p>
